--- a/01 Classes/Aula4 - Gestão da Informação - GOVERNANÇA DE TI.pptx
+++ b/01 Classes/Aula4 - Gestão da Informação - GOVERNANÇA DE TI.pptx
@@ -5,17 +5,24 @@
     <p:sldMasterId id="2147483648" r:id="rId1"/>
   </p:sldMasterIdLst>
   <p:notesMasterIdLst>
-    <p:notesMasterId r:id="rId10"/>
+    <p:notesMasterId r:id="rId17"/>
   </p:notesMasterIdLst>
   <p:sldIdLst>
     <p:sldId id="256" r:id="rId2"/>
     <p:sldId id="291" r:id="rId3"/>
     <p:sldId id="331" r:id="rId4"/>
-    <p:sldId id="333" r:id="rId5"/>
-    <p:sldId id="323" r:id="rId6"/>
-    <p:sldId id="360" r:id="rId7"/>
-    <p:sldId id="337" r:id="rId8"/>
-    <p:sldId id="309" r:id="rId9"/>
+    <p:sldId id="361" r:id="rId5"/>
+    <p:sldId id="362" r:id="rId6"/>
+    <p:sldId id="363" r:id="rId7"/>
+    <p:sldId id="364" r:id="rId8"/>
+    <p:sldId id="365" r:id="rId9"/>
+    <p:sldId id="333" r:id="rId10"/>
+    <p:sldId id="323" r:id="rId11"/>
+    <p:sldId id="360" r:id="rId12"/>
+    <p:sldId id="366" r:id="rId13"/>
+    <p:sldId id="367" r:id="rId14"/>
+    <p:sldId id="337" r:id="rId15"/>
+    <p:sldId id="309" r:id="rId16"/>
   </p:sldIdLst>
   <p:sldSz cx="9144000" cy="5143500" type="screen16x9"/>
   <p:notesSz cx="6858000" cy="9144000"/>
@@ -562,205 +569,7 @@
 </p:notes>
 </file>
 
-<file path=ppt/notesSlides/notesSlide2.xml><?xml version="1.0" encoding="utf-8"?>
-<p:notes xmlns:a="http://schemas.openxmlformats.org/drawingml/2006/main" xmlns:r="http://schemas.openxmlformats.org/officeDocument/2006/relationships" xmlns:p="http://schemas.openxmlformats.org/presentationml/2006/main">
-  <p:cSld>
-    <p:spTree>
-      <p:nvGrpSpPr>
-        <p:cNvPr id="1" name=""/>
-        <p:cNvGrpSpPr/>
-        <p:nvPr/>
-      </p:nvGrpSpPr>
-      <p:grpSpPr>
-        <a:xfrm>
-          <a:off x="0" y="0"/>
-          <a:ext cx="0" cy="0"/>
-          <a:chOff x="0" y="0"/>
-          <a:chExt cx="0" cy="0"/>
-        </a:xfrm>
-      </p:grpSpPr>
-      <p:sp>
-        <p:nvSpPr>
-          <p:cNvPr id="2" name="Espaço Reservado para Imagem de Slide 1"/>
-          <p:cNvSpPr>
-            <a:spLocks noGrp="1" noRot="1" noChangeAspect="1"/>
-          </p:cNvSpPr>
-          <p:nvPr>
-            <p:ph type="sldImg"/>
-          </p:nvPr>
-        </p:nvSpPr>
-        <p:spPr>
-          <a:xfrm>
-            <a:off x="381000" y="685800"/>
-            <a:ext cx="6096000" cy="3429000"/>
-          </a:xfrm>
-        </p:spPr>
-      </p:sp>
-      <p:sp>
-        <p:nvSpPr>
-          <p:cNvPr id="3" name="Espaço Reservado para Anotações 2"/>
-          <p:cNvSpPr>
-            <a:spLocks noGrp="1"/>
-          </p:cNvSpPr>
-          <p:nvPr>
-            <p:ph type="body" idx="1"/>
-          </p:nvPr>
-        </p:nvSpPr>
-        <p:spPr/>
-        <p:txBody>
-          <a:bodyPr/>
-          <a:lstStyle/>
-          <a:p>
-            <a:endParaRPr lang="pt-BR" dirty="0"/>
-          </a:p>
-        </p:txBody>
-      </p:sp>
-    </p:spTree>
-    <p:extLst>
-      <p:ext uri="{BB962C8B-B14F-4D97-AF65-F5344CB8AC3E}">
-        <p14:creationId xmlns:p14="http://schemas.microsoft.com/office/powerpoint/2010/main" val="3035753547"/>
-      </p:ext>
-    </p:extLst>
-  </p:cSld>
-  <p:clrMapOvr>
-    <a:masterClrMapping/>
-  </p:clrMapOvr>
-</p:notes>
-</file>
-
-<file path=ppt/notesSlides/notesSlide3.xml><?xml version="1.0" encoding="utf-8"?>
-<p:notes xmlns:a="http://schemas.openxmlformats.org/drawingml/2006/main" xmlns:r="http://schemas.openxmlformats.org/officeDocument/2006/relationships" xmlns:p="http://schemas.openxmlformats.org/presentationml/2006/main">
-  <p:cSld>
-    <p:spTree>
-      <p:nvGrpSpPr>
-        <p:cNvPr id="1" name=""/>
-        <p:cNvGrpSpPr/>
-        <p:nvPr/>
-      </p:nvGrpSpPr>
-      <p:grpSpPr>
-        <a:xfrm>
-          <a:off x="0" y="0"/>
-          <a:ext cx="0" cy="0"/>
-          <a:chOff x="0" y="0"/>
-          <a:chExt cx="0" cy="0"/>
-        </a:xfrm>
-      </p:grpSpPr>
-      <p:sp>
-        <p:nvSpPr>
-          <p:cNvPr id="2" name="Espaço Reservado para Imagem de Slide 1"/>
-          <p:cNvSpPr>
-            <a:spLocks noGrp="1" noRot="1" noChangeAspect="1"/>
-          </p:cNvSpPr>
-          <p:nvPr>
-            <p:ph type="sldImg"/>
-          </p:nvPr>
-        </p:nvSpPr>
-        <p:spPr>
-          <a:xfrm>
-            <a:off x="381000" y="685800"/>
-            <a:ext cx="6096000" cy="3429000"/>
-          </a:xfrm>
-        </p:spPr>
-      </p:sp>
-      <p:sp>
-        <p:nvSpPr>
-          <p:cNvPr id="3" name="Espaço Reservado para Anotações 2"/>
-          <p:cNvSpPr>
-            <a:spLocks noGrp="1"/>
-          </p:cNvSpPr>
-          <p:nvPr>
-            <p:ph type="body" idx="1"/>
-          </p:nvPr>
-        </p:nvSpPr>
-        <p:spPr/>
-        <p:txBody>
-          <a:bodyPr/>
-          <a:lstStyle/>
-          <a:p>
-            <a:endParaRPr lang="pt-BR" dirty="0"/>
-          </a:p>
-        </p:txBody>
-      </p:sp>
-    </p:spTree>
-    <p:extLst>
-      <p:ext uri="{BB962C8B-B14F-4D97-AF65-F5344CB8AC3E}">
-        <p14:creationId xmlns:p14="http://schemas.microsoft.com/office/powerpoint/2010/main" val="585304384"/>
-      </p:ext>
-    </p:extLst>
-  </p:cSld>
-  <p:clrMapOvr>
-    <a:masterClrMapping/>
-  </p:clrMapOvr>
-</p:notes>
-</file>
-
-<file path=ppt/notesSlides/notesSlide4.xml><?xml version="1.0" encoding="utf-8"?>
-<p:notes xmlns:a="http://schemas.openxmlformats.org/drawingml/2006/main" xmlns:r="http://schemas.openxmlformats.org/officeDocument/2006/relationships" xmlns:p="http://schemas.openxmlformats.org/presentationml/2006/main">
-  <p:cSld>
-    <p:spTree>
-      <p:nvGrpSpPr>
-        <p:cNvPr id="1" name=""/>
-        <p:cNvGrpSpPr/>
-        <p:nvPr/>
-      </p:nvGrpSpPr>
-      <p:grpSpPr>
-        <a:xfrm>
-          <a:off x="0" y="0"/>
-          <a:ext cx="0" cy="0"/>
-          <a:chOff x="0" y="0"/>
-          <a:chExt cx="0" cy="0"/>
-        </a:xfrm>
-      </p:grpSpPr>
-      <p:sp>
-        <p:nvSpPr>
-          <p:cNvPr id="2" name="Espaço Reservado para Imagem de Slide 1"/>
-          <p:cNvSpPr>
-            <a:spLocks noGrp="1" noRot="1" noChangeAspect="1"/>
-          </p:cNvSpPr>
-          <p:nvPr>
-            <p:ph type="sldImg"/>
-          </p:nvPr>
-        </p:nvSpPr>
-        <p:spPr>
-          <a:xfrm>
-            <a:off x="381000" y="685800"/>
-            <a:ext cx="6096000" cy="3429000"/>
-          </a:xfrm>
-        </p:spPr>
-      </p:sp>
-      <p:sp>
-        <p:nvSpPr>
-          <p:cNvPr id="3" name="Espaço Reservado para Anotações 2"/>
-          <p:cNvSpPr>
-            <a:spLocks noGrp="1"/>
-          </p:cNvSpPr>
-          <p:nvPr>
-            <p:ph type="body" idx="1"/>
-          </p:nvPr>
-        </p:nvSpPr>
-        <p:spPr/>
-        <p:txBody>
-          <a:bodyPr/>
-          <a:lstStyle/>
-          <a:p>
-            <a:endParaRPr lang="pt-BR" dirty="0"/>
-          </a:p>
-        </p:txBody>
-      </p:sp>
-    </p:spTree>
-    <p:extLst>
-      <p:ext uri="{BB962C8B-B14F-4D97-AF65-F5344CB8AC3E}">
-        <p14:creationId xmlns:p14="http://schemas.microsoft.com/office/powerpoint/2010/main" val="2709569597"/>
-      </p:ext>
-    </p:extLst>
-  </p:cSld>
-  <p:clrMapOvr>
-    <a:masterClrMapping/>
-  </p:clrMapOvr>
-</p:notes>
-</file>
-
-<file path=ppt/notesSlides/notesSlide5.xml><?xml version="1.0" encoding="utf-8"?>
+<file path=ppt/notesSlides/notesSlide10.xml><?xml version="1.0" encoding="utf-8"?>
 <p:notes xmlns:a="http://schemas.openxmlformats.org/drawingml/2006/main" xmlns:r="http://schemas.openxmlformats.org/officeDocument/2006/relationships" xmlns:p="http://schemas.openxmlformats.org/presentationml/2006/main">
   <p:cSld>
     <p:spTree>
@@ -844,7 +653,175 @@
 </p:notes>
 </file>
 
-<file path=ppt/notesSlides/notesSlide6.xml><?xml version="1.0" encoding="utf-8"?>
+<file path=ppt/notesSlides/notesSlide11.xml><?xml version="1.0" encoding="utf-8"?>
+<p:notes xmlns:a="http://schemas.openxmlformats.org/drawingml/2006/main" xmlns:r="http://schemas.openxmlformats.org/officeDocument/2006/relationships" xmlns:p="http://schemas.openxmlformats.org/presentationml/2006/main">
+  <p:cSld>
+    <p:spTree>
+      <p:nvGrpSpPr>
+        <p:cNvPr id="1" name="">
+          <a:extLst>
+            <a:ext uri="{FF2B5EF4-FFF2-40B4-BE49-F238E27FC236}">
+              <a16:creationId xmlns:a16="http://schemas.microsoft.com/office/drawing/2014/main" id="{452691DA-9EE7-4ECA-20A3-384286A720C3}"/>
+            </a:ext>
+          </a:extLst>
+        </p:cNvPr>
+        <p:cNvGrpSpPr/>
+        <p:nvPr/>
+      </p:nvGrpSpPr>
+      <p:grpSpPr>
+        <a:xfrm>
+          <a:off x="0" y="0"/>
+          <a:ext cx="0" cy="0"/>
+          <a:chOff x="0" y="0"/>
+          <a:chExt cx="0" cy="0"/>
+        </a:xfrm>
+      </p:grpSpPr>
+      <p:sp>
+        <p:nvSpPr>
+          <p:cNvPr id="2" name="Espaço Reservado para Imagem de Slide 1">
+            <a:extLst>
+              <a:ext uri="{FF2B5EF4-FFF2-40B4-BE49-F238E27FC236}">
+                <a16:creationId xmlns:a16="http://schemas.microsoft.com/office/drawing/2014/main" id="{199625D2-DDA8-0B6A-998D-2A339B25CBE8}"/>
+              </a:ext>
+            </a:extLst>
+          </p:cNvPr>
+          <p:cNvSpPr>
+            <a:spLocks noGrp="1" noRot="1" noChangeAspect="1"/>
+          </p:cNvSpPr>
+          <p:nvPr>
+            <p:ph type="sldImg"/>
+          </p:nvPr>
+        </p:nvSpPr>
+        <p:spPr>
+          <a:xfrm>
+            <a:off x="381000" y="685800"/>
+            <a:ext cx="6096000" cy="3429000"/>
+          </a:xfrm>
+        </p:spPr>
+      </p:sp>
+      <p:sp>
+        <p:nvSpPr>
+          <p:cNvPr id="3" name="Espaço Reservado para Anotações 2">
+            <a:extLst>
+              <a:ext uri="{FF2B5EF4-FFF2-40B4-BE49-F238E27FC236}">
+                <a16:creationId xmlns:a16="http://schemas.microsoft.com/office/drawing/2014/main" id="{6AAD2D7F-7120-4831-818D-068F2E03AAE6}"/>
+              </a:ext>
+            </a:extLst>
+          </p:cNvPr>
+          <p:cNvSpPr>
+            <a:spLocks noGrp="1"/>
+          </p:cNvSpPr>
+          <p:nvPr>
+            <p:ph type="body" idx="1"/>
+          </p:nvPr>
+        </p:nvSpPr>
+        <p:spPr/>
+        <p:txBody>
+          <a:bodyPr/>
+          <a:lstStyle/>
+          <a:p>
+            <a:endParaRPr lang="pt-BR" dirty="0"/>
+          </a:p>
+        </p:txBody>
+      </p:sp>
+    </p:spTree>
+    <p:extLst>
+      <p:ext uri="{BB962C8B-B14F-4D97-AF65-F5344CB8AC3E}">
+        <p14:creationId xmlns:p14="http://schemas.microsoft.com/office/powerpoint/2010/main" val="4219697636"/>
+      </p:ext>
+    </p:extLst>
+  </p:cSld>
+  <p:clrMapOvr>
+    <a:masterClrMapping/>
+  </p:clrMapOvr>
+</p:notes>
+</file>
+
+<file path=ppt/notesSlides/notesSlide12.xml><?xml version="1.0" encoding="utf-8"?>
+<p:notes xmlns:a="http://schemas.openxmlformats.org/drawingml/2006/main" xmlns:r="http://schemas.openxmlformats.org/officeDocument/2006/relationships" xmlns:p="http://schemas.openxmlformats.org/presentationml/2006/main">
+  <p:cSld>
+    <p:spTree>
+      <p:nvGrpSpPr>
+        <p:cNvPr id="1" name="">
+          <a:extLst>
+            <a:ext uri="{FF2B5EF4-FFF2-40B4-BE49-F238E27FC236}">
+              <a16:creationId xmlns:a16="http://schemas.microsoft.com/office/drawing/2014/main" id="{25B2242B-F1A9-C118-692F-6BB2C2A333B1}"/>
+            </a:ext>
+          </a:extLst>
+        </p:cNvPr>
+        <p:cNvGrpSpPr/>
+        <p:nvPr/>
+      </p:nvGrpSpPr>
+      <p:grpSpPr>
+        <a:xfrm>
+          <a:off x="0" y="0"/>
+          <a:ext cx="0" cy="0"/>
+          <a:chOff x="0" y="0"/>
+          <a:chExt cx="0" cy="0"/>
+        </a:xfrm>
+      </p:grpSpPr>
+      <p:sp>
+        <p:nvSpPr>
+          <p:cNvPr id="2" name="Espaço Reservado para Imagem de Slide 1">
+            <a:extLst>
+              <a:ext uri="{FF2B5EF4-FFF2-40B4-BE49-F238E27FC236}">
+                <a16:creationId xmlns:a16="http://schemas.microsoft.com/office/drawing/2014/main" id="{B478D07E-AB63-79F4-10D5-94B035DF0CC1}"/>
+              </a:ext>
+            </a:extLst>
+          </p:cNvPr>
+          <p:cNvSpPr>
+            <a:spLocks noGrp="1" noRot="1" noChangeAspect="1"/>
+          </p:cNvSpPr>
+          <p:nvPr>
+            <p:ph type="sldImg"/>
+          </p:nvPr>
+        </p:nvSpPr>
+        <p:spPr>
+          <a:xfrm>
+            <a:off x="381000" y="685800"/>
+            <a:ext cx="6096000" cy="3429000"/>
+          </a:xfrm>
+        </p:spPr>
+      </p:sp>
+      <p:sp>
+        <p:nvSpPr>
+          <p:cNvPr id="3" name="Espaço Reservado para Anotações 2">
+            <a:extLst>
+              <a:ext uri="{FF2B5EF4-FFF2-40B4-BE49-F238E27FC236}">
+                <a16:creationId xmlns:a16="http://schemas.microsoft.com/office/drawing/2014/main" id="{5709462A-E3CD-0DD8-0A94-790C2D9BF7AD}"/>
+              </a:ext>
+            </a:extLst>
+          </p:cNvPr>
+          <p:cNvSpPr>
+            <a:spLocks noGrp="1"/>
+          </p:cNvSpPr>
+          <p:nvPr>
+            <p:ph type="body" idx="1"/>
+          </p:nvPr>
+        </p:nvSpPr>
+        <p:spPr/>
+        <p:txBody>
+          <a:bodyPr/>
+          <a:lstStyle/>
+          <a:p>
+            <a:endParaRPr lang="pt-BR" dirty="0"/>
+          </a:p>
+        </p:txBody>
+      </p:sp>
+    </p:spTree>
+    <p:extLst>
+      <p:ext uri="{BB962C8B-B14F-4D97-AF65-F5344CB8AC3E}">
+        <p14:creationId xmlns:p14="http://schemas.microsoft.com/office/powerpoint/2010/main" val="3637520640"/>
+      </p:ext>
+    </p:extLst>
+  </p:cSld>
+  <p:clrMapOvr>
+    <a:masterClrMapping/>
+  </p:clrMapOvr>
+</p:notes>
+</file>
+
+<file path=ppt/notesSlides/notesSlide13.xml><?xml version="1.0" encoding="utf-8"?>
 <p:notes xmlns:a="http://schemas.openxmlformats.org/drawingml/2006/main" xmlns:r="http://schemas.openxmlformats.org/officeDocument/2006/relationships" xmlns:p="http://schemas.openxmlformats.org/presentationml/2006/main">
   <p:cSld>
     <p:spTree>
@@ -901,6 +878,624 @@
     <p:extLst>
       <p:ext uri="{BB962C8B-B14F-4D97-AF65-F5344CB8AC3E}">
         <p14:creationId xmlns:p14="http://schemas.microsoft.com/office/powerpoint/2010/main" val="4290351292"/>
+      </p:ext>
+    </p:extLst>
+  </p:cSld>
+  <p:clrMapOvr>
+    <a:masterClrMapping/>
+  </p:clrMapOvr>
+</p:notes>
+</file>
+
+<file path=ppt/notesSlides/notesSlide2.xml><?xml version="1.0" encoding="utf-8"?>
+<p:notes xmlns:a="http://schemas.openxmlformats.org/drawingml/2006/main" xmlns:r="http://schemas.openxmlformats.org/officeDocument/2006/relationships" xmlns:p="http://schemas.openxmlformats.org/presentationml/2006/main">
+  <p:cSld>
+    <p:spTree>
+      <p:nvGrpSpPr>
+        <p:cNvPr id="1" name=""/>
+        <p:cNvGrpSpPr/>
+        <p:nvPr/>
+      </p:nvGrpSpPr>
+      <p:grpSpPr>
+        <a:xfrm>
+          <a:off x="0" y="0"/>
+          <a:ext cx="0" cy="0"/>
+          <a:chOff x="0" y="0"/>
+          <a:chExt cx="0" cy="0"/>
+        </a:xfrm>
+      </p:grpSpPr>
+      <p:sp>
+        <p:nvSpPr>
+          <p:cNvPr id="2" name="Espaço Reservado para Imagem de Slide 1"/>
+          <p:cNvSpPr>
+            <a:spLocks noGrp="1" noRot="1" noChangeAspect="1"/>
+          </p:cNvSpPr>
+          <p:nvPr>
+            <p:ph type="sldImg"/>
+          </p:nvPr>
+        </p:nvSpPr>
+        <p:spPr>
+          <a:xfrm>
+            <a:off x="381000" y="685800"/>
+            <a:ext cx="6096000" cy="3429000"/>
+          </a:xfrm>
+        </p:spPr>
+      </p:sp>
+      <p:sp>
+        <p:nvSpPr>
+          <p:cNvPr id="3" name="Espaço Reservado para Anotações 2"/>
+          <p:cNvSpPr>
+            <a:spLocks noGrp="1"/>
+          </p:cNvSpPr>
+          <p:nvPr>
+            <p:ph type="body" idx="1"/>
+          </p:nvPr>
+        </p:nvSpPr>
+        <p:spPr/>
+        <p:txBody>
+          <a:bodyPr/>
+          <a:lstStyle/>
+          <a:p>
+            <a:endParaRPr lang="pt-BR" dirty="0"/>
+          </a:p>
+        </p:txBody>
+      </p:sp>
+    </p:spTree>
+    <p:extLst>
+      <p:ext uri="{BB962C8B-B14F-4D97-AF65-F5344CB8AC3E}">
+        <p14:creationId xmlns:p14="http://schemas.microsoft.com/office/powerpoint/2010/main" val="3035753547"/>
+      </p:ext>
+    </p:extLst>
+  </p:cSld>
+  <p:clrMapOvr>
+    <a:masterClrMapping/>
+  </p:clrMapOvr>
+</p:notes>
+</file>
+
+<file path=ppt/notesSlides/notesSlide3.xml><?xml version="1.0" encoding="utf-8"?>
+<p:notes xmlns:a="http://schemas.openxmlformats.org/drawingml/2006/main" xmlns:r="http://schemas.openxmlformats.org/officeDocument/2006/relationships" xmlns:p="http://schemas.openxmlformats.org/presentationml/2006/main">
+  <p:cSld>
+    <p:spTree>
+      <p:nvGrpSpPr>
+        <p:cNvPr id="1" name="">
+          <a:extLst>
+            <a:ext uri="{FF2B5EF4-FFF2-40B4-BE49-F238E27FC236}">
+              <a16:creationId xmlns:a16="http://schemas.microsoft.com/office/drawing/2014/main" id="{747D3FCF-CA15-FF42-58E3-D3B8422C322B}"/>
+            </a:ext>
+          </a:extLst>
+        </p:cNvPr>
+        <p:cNvGrpSpPr/>
+        <p:nvPr/>
+      </p:nvGrpSpPr>
+      <p:grpSpPr>
+        <a:xfrm>
+          <a:off x="0" y="0"/>
+          <a:ext cx="0" cy="0"/>
+          <a:chOff x="0" y="0"/>
+          <a:chExt cx="0" cy="0"/>
+        </a:xfrm>
+      </p:grpSpPr>
+      <p:sp>
+        <p:nvSpPr>
+          <p:cNvPr id="2" name="Espaço Reservado para Imagem de Slide 1">
+            <a:extLst>
+              <a:ext uri="{FF2B5EF4-FFF2-40B4-BE49-F238E27FC236}">
+                <a16:creationId xmlns:a16="http://schemas.microsoft.com/office/drawing/2014/main" id="{B3E60601-59D4-0BB3-0771-ADCC88A8ACB7}"/>
+              </a:ext>
+            </a:extLst>
+          </p:cNvPr>
+          <p:cNvSpPr>
+            <a:spLocks noGrp="1" noRot="1" noChangeAspect="1"/>
+          </p:cNvSpPr>
+          <p:nvPr>
+            <p:ph type="sldImg"/>
+          </p:nvPr>
+        </p:nvSpPr>
+        <p:spPr>
+          <a:xfrm>
+            <a:off x="381000" y="685800"/>
+            <a:ext cx="6096000" cy="3429000"/>
+          </a:xfrm>
+        </p:spPr>
+      </p:sp>
+      <p:sp>
+        <p:nvSpPr>
+          <p:cNvPr id="3" name="Espaço Reservado para Anotações 2">
+            <a:extLst>
+              <a:ext uri="{FF2B5EF4-FFF2-40B4-BE49-F238E27FC236}">
+                <a16:creationId xmlns:a16="http://schemas.microsoft.com/office/drawing/2014/main" id="{03A8AF91-92BE-55E1-7888-7826FED1E6F8}"/>
+              </a:ext>
+            </a:extLst>
+          </p:cNvPr>
+          <p:cNvSpPr>
+            <a:spLocks noGrp="1"/>
+          </p:cNvSpPr>
+          <p:nvPr>
+            <p:ph type="body" idx="1"/>
+          </p:nvPr>
+        </p:nvSpPr>
+        <p:spPr/>
+        <p:txBody>
+          <a:bodyPr/>
+          <a:lstStyle/>
+          <a:p>
+            <a:endParaRPr lang="pt-BR" dirty="0"/>
+          </a:p>
+        </p:txBody>
+      </p:sp>
+    </p:spTree>
+    <p:extLst>
+      <p:ext uri="{BB962C8B-B14F-4D97-AF65-F5344CB8AC3E}">
+        <p14:creationId xmlns:p14="http://schemas.microsoft.com/office/powerpoint/2010/main" val="1199181546"/>
+      </p:ext>
+    </p:extLst>
+  </p:cSld>
+  <p:clrMapOvr>
+    <a:masterClrMapping/>
+  </p:clrMapOvr>
+</p:notes>
+</file>
+
+<file path=ppt/notesSlides/notesSlide4.xml><?xml version="1.0" encoding="utf-8"?>
+<p:notes xmlns:a="http://schemas.openxmlformats.org/drawingml/2006/main" xmlns:r="http://schemas.openxmlformats.org/officeDocument/2006/relationships" xmlns:p="http://schemas.openxmlformats.org/presentationml/2006/main">
+  <p:cSld>
+    <p:spTree>
+      <p:nvGrpSpPr>
+        <p:cNvPr id="1" name="">
+          <a:extLst>
+            <a:ext uri="{FF2B5EF4-FFF2-40B4-BE49-F238E27FC236}">
+              <a16:creationId xmlns:a16="http://schemas.microsoft.com/office/drawing/2014/main" id="{DDF06A23-A3C2-CAE4-699A-B8178FC56009}"/>
+            </a:ext>
+          </a:extLst>
+        </p:cNvPr>
+        <p:cNvGrpSpPr/>
+        <p:nvPr/>
+      </p:nvGrpSpPr>
+      <p:grpSpPr>
+        <a:xfrm>
+          <a:off x="0" y="0"/>
+          <a:ext cx="0" cy="0"/>
+          <a:chOff x="0" y="0"/>
+          <a:chExt cx="0" cy="0"/>
+        </a:xfrm>
+      </p:grpSpPr>
+      <p:sp>
+        <p:nvSpPr>
+          <p:cNvPr id="2" name="Espaço Reservado para Imagem de Slide 1">
+            <a:extLst>
+              <a:ext uri="{FF2B5EF4-FFF2-40B4-BE49-F238E27FC236}">
+                <a16:creationId xmlns:a16="http://schemas.microsoft.com/office/drawing/2014/main" id="{338BC3E8-B58B-22D1-2F42-99413F1CB709}"/>
+              </a:ext>
+            </a:extLst>
+          </p:cNvPr>
+          <p:cNvSpPr>
+            <a:spLocks noGrp="1" noRot="1" noChangeAspect="1"/>
+          </p:cNvSpPr>
+          <p:nvPr>
+            <p:ph type="sldImg"/>
+          </p:nvPr>
+        </p:nvSpPr>
+        <p:spPr>
+          <a:xfrm>
+            <a:off x="381000" y="685800"/>
+            <a:ext cx="6096000" cy="3429000"/>
+          </a:xfrm>
+        </p:spPr>
+      </p:sp>
+      <p:sp>
+        <p:nvSpPr>
+          <p:cNvPr id="3" name="Espaço Reservado para Anotações 2">
+            <a:extLst>
+              <a:ext uri="{FF2B5EF4-FFF2-40B4-BE49-F238E27FC236}">
+                <a16:creationId xmlns:a16="http://schemas.microsoft.com/office/drawing/2014/main" id="{2C4916ED-8239-A5B4-398F-258842960FDE}"/>
+              </a:ext>
+            </a:extLst>
+          </p:cNvPr>
+          <p:cNvSpPr>
+            <a:spLocks noGrp="1"/>
+          </p:cNvSpPr>
+          <p:nvPr>
+            <p:ph type="body" idx="1"/>
+          </p:nvPr>
+        </p:nvSpPr>
+        <p:spPr/>
+        <p:txBody>
+          <a:bodyPr/>
+          <a:lstStyle/>
+          <a:p>
+            <a:endParaRPr lang="pt-BR" dirty="0"/>
+          </a:p>
+        </p:txBody>
+      </p:sp>
+    </p:spTree>
+    <p:extLst>
+      <p:ext uri="{BB962C8B-B14F-4D97-AF65-F5344CB8AC3E}">
+        <p14:creationId xmlns:p14="http://schemas.microsoft.com/office/powerpoint/2010/main" val="3125426895"/>
+      </p:ext>
+    </p:extLst>
+  </p:cSld>
+  <p:clrMapOvr>
+    <a:masterClrMapping/>
+  </p:clrMapOvr>
+</p:notes>
+</file>
+
+<file path=ppt/notesSlides/notesSlide5.xml><?xml version="1.0" encoding="utf-8"?>
+<p:notes xmlns:a="http://schemas.openxmlformats.org/drawingml/2006/main" xmlns:r="http://schemas.openxmlformats.org/officeDocument/2006/relationships" xmlns:p="http://schemas.openxmlformats.org/presentationml/2006/main">
+  <p:cSld>
+    <p:spTree>
+      <p:nvGrpSpPr>
+        <p:cNvPr id="1" name="">
+          <a:extLst>
+            <a:ext uri="{FF2B5EF4-FFF2-40B4-BE49-F238E27FC236}">
+              <a16:creationId xmlns:a16="http://schemas.microsoft.com/office/drawing/2014/main" id="{0049FC6F-0F03-AFA2-4994-360A3FEED739}"/>
+            </a:ext>
+          </a:extLst>
+        </p:cNvPr>
+        <p:cNvGrpSpPr/>
+        <p:nvPr/>
+      </p:nvGrpSpPr>
+      <p:grpSpPr>
+        <a:xfrm>
+          <a:off x="0" y="0"/>
+          <a:ext cx="0" cy="0"/>
+          <a:chOff x="0" y="0"/>
+          <a:chExt cx="0" cy="0"/>
+        </a:xfrm>
+      </p:grpSpPr>
+      <p:sp>
+        <p:nvSpPr>
+          <p:cNvPr id="2" name="Espaço Reservado para Imagem de Slide 1">
+            <a:extLst>
+              <a:ext uri="{FF2B5EF4-FFF2-40B4-BE49-F238E27FC236}">
+                <a16:creationId xmlns:a16="http://schemas.microsoft.com/office/drawing/2014/main" id="{507771BB-9145-8B49-C187-272161F372D6}"/>
+              </a:ext>
+            </a:extLst>
+          </p:cNvPr>
+          <p:cNvSpPr>
+            <a:spLocks noGrp="1" noRot="1" noChangeAspect="1"/>
+          </p:cNvSpPr>
+          <p:nvPr>
+            <p:ph type="sldImg"/>
+          </p:nvPr>
+        </p:nvSpPr>
+        <p:spPr>
+          <a:xfrm>
+            <a:off x="381000" y="685800"/>
+            <a:ext cx="6096000" cy="3429000"/>
+          </a:xfrm>
+        </p:spPr>
+      </p:sp>
+      <p:sp>
+        <p:nvSpPr>
+          <p:cNvPr id="3" name="Espaço Reservado para Anotações 2">
+            <a:extLst>
+              <a:ext uri="{FF2B5EF4-FFF2-40B4-BE49-F238E27FC236}">
+                <a16:creationId xmlns:a16="http://schemas.microsoft.com/office/drawing/2014/main" id="{1FE35EBD-AD4C-5C5A-0743-29238E59D953}"/>
+              </a:ext>
+            </a:extLst>
+          </p:cNvPr>
+          <p:cNvSpPr>
+            <a:spLocks noGrp="1"/>
+          </p:cNvSpPr>
+          <p:nvPr>
+            <p:ph type="body" idx="1"/>
+          </p:nvPr>
+        </p:nvSpPr>
+        <p:spPr/>
+        <p:txBody>
+          <a:bodyPr/>
+          <a:lstStyle/>
+          <a:p>
+            <a:endParaRPr lang="pt-BR" dirty="0"/>
+          </a:p>
+        </p:txBody>
+      </p:sp>
+    </p:spTree>
+    <p:extLst>
+      <p:ext uri="{BB962C8B-B14F-4D97-AF65-F5344CB8AC3E}">
+        <p14:creationId xmlns:p14="http://schemas.microsoft.com/office/powerpoint/2010/main" val="2144903574"/>
+      </p:ext>
+    </p:extLst>
+  </p:cSld>
+  <p:clrMapOvr>
+    <a:masterClrMapping/>
+  </p:clrMapOvr>
+</p:notes>
+</file>
+
+<file path=ppt/notesSlides/notesSlide6.xml><?xml version="1.0" encoding="utf-8"?>
+<p:notes xmlns:a="http://schemas.openxmlformats.org/drawingml/2006/main" xmlns:r="http://schemas.openxmlformats.org/officeDocument/2006/relationships" xmlns:p="http://schemas.openxmlformats.org/presentationml/2006/main">
+  <p:cSld>
+    <p:spTree>
+      <p:nvGrpSpPr>
+        <p:cNvPr id="1" name="">
+          <a:extLst>
+            <a:ext uri="{FF2B5EF4-FFF2-40B4-BE49-F238E27FC236}">
+              <a16:creationId xmlns:a16="http://schemas.microsoft.com/office/drawing/2014/main" id="{7B7841E9-0F75-E8E3-1E1E-9FAB357BD235}"/>
+            </a:ext>
+          </a:extLst>
+        </p:cNvPr>
+        <p:cNvGrpSpPr/>
+        <p:nvPr/>
+      </p:nvGrpSpPr>
+      <p:grpSpPr>
+        <a:xfrm>
+          <a:off x="0" y="0"/>
+          <a:ext cx="0" cy="0"/>
+          <a:chOff x="0" y="0"/>
+          <a:chExt cx="0" cy="0"/>
+        </a:xfrm>
+      </p:grpSpPr>
+      <p:sp>
+        <p:nvSpPr>
+          <p:cNvPr id="2" name="Espaço Reservado para Imagem de Slide 1">
+            <a:extLst>
+              <a:ext uri="{FF2B5EF4-FFF2-40B4-BE49-F238E27FC236}">
+                <a16:creationId xmlns:a16="http://schemas.microsoft.com/office/drawing/2014/main" id="{C6562A91-16D5-7529-049D-A5B5CE379AE7}"/>
+              </a:ext>
+            </a:extLst>
+          </p:cNvPr>
+          <p:cNvSpPr>
+            <a:spLocks noGrp="1" noRot="1" noChangeAspect="1"/>
+          </p:cNvSpPr>
+          <p:nvPr>
+            <p:ph type="sldImg"/>
+          </p:nvPr>
+        </p:nvSpPr>
+        <p:spPr>
+          <a:xfrm>
+            <a:off x="381000" y="685800"/>
+            <a:ext cx="6096000" cy="3429000"/>
+          </a:xfrm>
+        </p:spPr>
+      </p:sp>
+      <p:sp>
+        <p:nvSpPr>
+          <p:cNvPr id="3" name="Espaço Reservado para Anotações 2">
+            <a:extLst>
+              <a:ext uri="{FF2B5EF4-FFF2-40B4-BE49-F238E27FC236}">
+                <a16:creationId xmlns:a16="http://schemas.microsoft.com/office/drawing/2014/main" id="{9B96222B-39EC-37B6-483B-0F8D8D25E789}"/>
+              </a:ext>
+            </a:extLst>
+          </p:cNvPr>
+          <p:cNvSpPr>
+            <a:spLocks noGrp="1"/>
+          </p:cNvSpPr>
+          <p:nvPr>
+            <p:ph type="body" idx="1"/>
+          </p:nvPr>
+        </p:nvSpPr>
+        <p:spPr/>
+        <p:txBody>
+          <a:bodyPr/>
+          <a:lstStyle/>
+          <a:p>
+            <a:endParaRPr lang="pt-BR" dirty="0"/>
+          </a:p>
+        </p:txBody>
+      </p:sp>
+    </p:spTree>
+    <p:extLst>
+      <p:ext uri="{BB962C8B-B14F-4D97-AF65-F5344CB8AC3E}">
+        <p14:creationId xmlns:p14="http://schemas.microsoft.com/office/powerpoint/2010/main" val="3700859743"/>
+      </p:ext>
+    </p:extLst>
+  </p:cSld>
+  <p:clrMapOvr>
+    <a:masterClrMapping/>
+  </p:clrMapOvr>
+</p:notes>
+</file>
+
+<file path=ppt/notesSlides/notesSlide7.xml><?xml version="1.0" encoding="utf-8"?>
+<p:notes xmlns:a="http://schemas.openxmlformats.org/drawingml/2006/main" xmlns:r="http://schemas.openxmlformats.org/officeDocument/2006/relationships" xmlns:p="http://schemas.openxmlformats.org/presentationml/2006/main">
+  <p:cSld>
+    <p:spTree>
+      <p:nvGrpSpPr>
+        <p:cNvPr id="1" name="">
+          <a:extLst>
+            <a:ext uri="{FF2B5EF4-FFF2-40B4-BE49-F238E27FC236}">
+              <a16:creationId xmlns:a16="http://schemas.microsoft.com/office/drawing/2014/main" id="{204FF97A-273D-AE85-6449-BA3C7F0C04B1}"/>
+            </a:ext>
+          </a:extLst>
+        </p:cNvPr>
+        <p:cNvGrpSpPr/>
+        <p:nvPr/>
+      </p:nvGrpSpPr>
+      <p:grpSpPr>
+        <a:xfrm>
+          <a:off x="0" y="0"/>
+          <a:ext cx="0" cy="0"/>
+          <a:chOff x="0" y="0"/>
+          <a:chExt cx="0" cy="0"/>
+        </a:xfrm>
+      </p:grpSpPr>
+      <p:sp>
+        <p:nvSpPr>
+          <p:cNvPr id="2" name="Espaço Reservado para Imagem de Slide 1">
+            <a:extLst>
+              <a:ext uri="{FF2B5EF4-FFF2-40B4-BE49-F238E27FC236}">
+                <a16:creationId xmlns:a16="http://schemas.microsoft.com/office/drawing/2014/main" id="{A335EE5A-F7E8-00C4-4837-BC29E9FC332C}"/>
+              </a:ext>
+            </a:extLst>
+          </p:cNvPr>
+          <p:cNvSpPr>
+            <a:spLocks noGrp="1" noRot="1" noChangeAspect="1"/>
+          </p:cNvSpPr>
+          <p:nvPr>
+            <p:ph type="sldImg"/>
+          </p:nvPr>
+        </p:nvSpPr>
+        <p:spPr>
+          <a:xfrm>
+            <a:off x="381000" y="685800"/>
+            <a:ext cx="6096000" cy="3429000"/>
+          </a:xfrm>
+        </p:spPr>
+      </p:sp>
+      <p:sp>
+        <p:nvSpPr>
+          <p:cNvPr id="3" name="Espaço Reservado para Anotações 2">
+            <a:extLst>
+              <a:ext uri="{FF2B5EF4-FFF2-40B4-BE49-F238E27FC236}">
+                <a16:creationId xmlns:a16="http://schemas.microsoft.com/office/drawing/2014/main" id="{5531E44A-A1D0-1030-72D1-90F834C48E3D}"/>
+              </a:ext>
+            </a:extLst>
+          </p:cNvPr>
+          <p:cNvSpPr>
+            <a:spLocks noGrp="1"/>
+          </p:cNvSpPr>
+          <p:nvPr>
+            <p:ph type="body" idx="1"/>
+          </p:nvPr>
+        </p:nvSpPr>
+        <p:spPr/>
+        <p:txBody>
+          <a:bodyPr/>
+          <a:lstStyle/>
+          <a:p>
+            <a:endParaRPr lang="pt-BR" dirty="0"/>
+          </a:p>
+        </p:txBody>
+      </p:sp>
+    </p:spTree>
+    <p:extLst>
+      <p:ext uri="{BB962C8B-B14F-4D97-AF65-F5344CB8AC3E}">
+        <p14:creationId xmlns:p14="http://schemas.microsoft.com/office/powerpoint/2010/main" val="3318269600"/>
+      </p:ext>
+    </p:extLst>
+  </p:cSld>
+  <p:clrMapOvr>
+    <a:masterClrMapping/>
+  </p:clrMapOvr>
+</p:notes>
+</file>
+
+<file path=ppt/notesSlides/notesSlide8.xml><?xml version="1.0" encoding="utf-8"?>
+<p:notes xmlns:a="http://schemas.openxmlformats.org/drawingml/2006/main" xmlns:r="http://schemas.openxmlformats.org/officeDocument/2006/relationships" xmlns:p="http://schemas.openxmlformats.org/presentationml/2006/main">
+  <p:cSld>
+    <p:spTree>
+      <p:nvGrpSpPr>
+        <p:cNvPr id="1" name=""/>
+        <p:cNvGrpSpPr/>
+        <p:nvPr/>
+      </p:nvGrpSpPr>
+      <p:grpSpPr>
+        <a:xfrm>
+          <a:off x="0" y="0"/>
+          <a:ext cx="0" cy="0"/>
+          <a:chOff x="0" y="0"/>
+          <a:chExt cx="0" cy="0"/>
+        </a:xfrm>
+      </p:grpSpPr>
+      <p:sp>
+        <p:nvSpPr>
+          <p:cNvPr id="2" name="Espaço Reservado para Imagem de Slide 1"/>
+          <p:cNvSpPr>
+            <a:spLocks noGrp="1" noRot="1" noChangeAspect="1"/>
+          </p:cNvSpPr>
+          <p:nvPr>
+            <p:ph type="sldImg"/>
+          </p:nvPr>
+        </p:nvSpPr>
+        <p:spPr>
+          <a:xfrm>
+            <a:off x="381000" y="685800"/>
+            <a:ext cx="6096000" cy="3429000"/>
+          </a:xfrm>
+        </p:spPr>
+      </p:sp>
+      <p:sp>
+        <p:nvSpPr>
+          <p:cNvPr id="3" name="Espaço Reservado para Anotações 2"/>
+          <p:cNvSpPr>
+            <a:spLocks noGrp="1"/>
+          </p:cNvSpPr>
+          <p:nvPr>
+            <p:ph type="body" idx="1"/>
+          </p:nvPr>
+        </p:nvSpPr>
+        <p:spPr/>
+        <p:txBody>
+          <a:bodyPr/>
+          <a:lstStyle/>
+          <a:p>
+            <a:endParaRPr lang="pt-BR" dirty="0"/>
+          </a:p>
+        </p:txBody>
+      </p:sp>
+    </p:spTree>
+    <p:extLst>
+      <p:ext uri="{BB962C8B-B14F-4D97-AF65-F5344CB8AC3E}">
+        <p14:creationId xmlns:p14="http://schemas.microsoft.com/office/powerpoint/2010/main" val="585304384"/>
+      </p:ext>
+    </p:extLst>
+  </p:cSld>
+  <p:clrMapOvr>
+    <a:masterClrMapping/>
+  </p:clrMapOvr>
+</p:notes>
+</file>
+
+<file path=ppt/notesSlides/notesSlide9.xml><?xml version="1.0" encoding="utf-8"?>
+<p:notes xmlns:a="http://schemas.openxmlformats.org/drawingml/2006/main" xmlns:r="http://schemas.openxmlformats.org/officeDocument/2006/relationships" xmlns:p="http://schemas.openxmlformats.org/presentationml/2006/main">
+  <p:cSld>
+    <p:spTree>
+      <p:nvGrpSpPr>
+        <p:cNvPr id="1" name=""/>
+        <p:cNvGrpSpPr/>
+        <p:nvPr/>
+      </p:nvGrpSpPr>
+      <p:grpSpPr>
+        <a:xfrm>
+          <a:off x="0" y="0"/>
+          <a:ext cx="0" cy="0"/>
+          <a:chOff x="0" y="0"/>
+          <a:chExt cx="0" cy="0"/>
+        </a:xfrm>
+      </p:grpSpPr>
+      <p:sp>
+        <p:nvSpPr>
+          <p:cNvPr id="2" name="Espaço Reservado para Imagem de Slide 1"/>
+          <p:cNvSpPr>
+            <a:spLocks noGrp="1" noRot="1" noChangeAspect="1"/>
+          </p:cNvSpPr>
+          <p:nvPr>
+            <p:ph type="sldImg"/>
+          </p:nvPr>
+        </p:nvSpPr>
+        <p:spPr>
+          <a:xfrm>
+            <a:off x="381000" y="685800"/>
+            <a:ext cx="6096000" cy="3429000"/>
+          </a:xfrm>
+        </p:spPr>
+      </p:sp>
+      <p:sp>
+        <p:nvSpPr>
+          <p:cNvPr id="3" name="Espaço Reservado para Anotações 2"/>
+          <p:cNvSpPr>
+            <a:spLocks noGrp="1"/>
+          </p:cNvSpPr>
+          <p:nvPr>
+            <p:ph type="body" idx="1"/>
+          </p:nvPr>
+        </p:nvSpPr>
+        <p:spPr/>
+        <p:txBody>
+          <a:bodyPr/>
+          <a:lstStyle/>
+          <a:p>
+            <a:endParaRPr lang="pt-BR" dirty="0"/>
+          </a:p>
+        </p:txBody>
+      </p:sp>
+    </p:spTree>
+    <p:extLst>
+      <p:ext uri="{BB962C8B-B14F-4D97-AF65-F5344CB8AC3E}">
+        <p14:creationId xmlns:p14="http://schemas.microsoft.com/office/powerpoint/2010/main" val="2709569597"/>
       </p:ext>
     </p:extLst>
   </p:cSld>
@@ -3847,6 +4442,1767 @@
 </p:sld>
 </file>
 
+<file path=ppt/slides/slide10.xml><?xml version="1.0" encoding="utf-8"?>
+<p:sld xmlns:a="http://schemas.openxmlformats.org/drawingml/2006/main" xmlns:r="http://schemas.openxmlformats.org/officeDocument/2006/relationships" xmlns:p="http://schemas.openxmlformats.org/presentationml/2006/main">
+  <p:cSld>
+    <p:spTree>
+      <p:nvGrpSpPr>
+        <p:cNvPr id="1" name=""/>
+        <p:cNvGrpSpPr/>
+        <p:nvPr/>
+      </p:nvGrpSpPr>
+      <p:grpSpPr>
+        <a:xfrm>
+          <a:off x="0" y="0"/>
+          <a:ext cx="0" cy="0"/>
+          <a:chOff x="0" y="0"/>
+          <a:chExt cx="0" cy="0"/>
+        </a:xfrm>
+      </p:grpSpPr>
+      <p:sp>
+        <p:nvSpPr>
+          <p:cNvPr id="6" name="Title 1"/>
+          <p:cNvSpPr>
+            <a:spLocks noGrp="1"/>
+          </p:cNvSpPr>
+          <p:nvPr>
+            <p:ph type="title"/>
+          </p:nvPr>
+        </p:nvSpPr>
+        <p:spPr>
+          <a:xfrm>
+            <a:off x="457200" y="205980"/>
+            <a:ext cx="8229600" cy="857251"/>
+          </a:xfrm>
+        </p:spPr>
+        <p:txBody>
+          <a:bodyPr>
+            <a:normAutofit/>
+          </a:bodyPr>
+          <a:lstStyle/>
+          <a:p>
+            <a:r>
+              <a:rPr lang="en-US" b="1" dirty="0" err="1">
+                <a:solidFill>
+                  <a:srgbClr val="0070C0"/>
+                </a:solidFill>
+              </a:rPr>
+              <a:t>Aprenda</a:t>
+            </a:r>
+            <a:r>
+              <a:rPr lang="en-US" b="1" dirty="0">
+                <a:solidFill>
+                  <a:srgbClr val="0070C0"/>
+                </a:solidFill>
+              </a:rPr>
+              <a:t>+</a:t>
+            </a:r>
+          </a:p>
+        </p:txBody>
+      </p:sp>
+      <p:sp>
+        <p:nvSpPr>
+          <p:cNvPr id="8" name="Text Placeholder 2"/>
+          <p:cNvSpPr>
+            <a:spLocks noGrp="1"/>
+          </p:cNvSpPr>
+          <p:nvPr>
+            <p:ph type="body" sz="half" idx="1"/>
+          </p:nvPr>
+        </p:nvSpPr>
+        <p:spPr>
+          <a:xfrm>
+            <a:off x="142865" y="1200150"/>
+            <a:ext cx="8865056" cy="3737370"/>
+          </a:xfrm>
+        </p:spPr>
+        <p:txBody>
+          <a:bodyPr>
+            <a:noAutofit/>
+          </a:bodyPr>
+          <a:lstStyle/>
+          <a:p>
+            <a:pPr marL="0" indent="0" algn="just">
+              <a:buNone/>
+            </a:pPr>
+            <a:r>
+              <a:rPr lang="pt-BR" sz="2200" dirty="0">
+                <a:latin typeface="Times New Roman" panose="02020603050405020304" pitchFamily="18" charset="0"/>
+                <a:cs typeface="Times New Roman" panose="02020603050405020304" pitchFamily="18" charset="0"/>
+              </a:rPr>
+              <a:t>[1] </a:t>
+            </a:r>
+            <a:r>
+              <a:rPr lang="pt-BR" sz="2200" b="1" dirty="0">
+                <a:latin typeface="Times New Roman" panose="02020603050405020304" pitchFamily="18" charset="0"/>
+                <a:cs typeface="Times New Roman" panose="02020603050405020304" pitchFamily="18" charset="0"/>
+              </a:rPr>
+              <a:t>O que é Governança de TI (explicação clara)</a:t>
+            </a:r>
+          </a:p>
+          <a:p>
+            <a:pPr marL="0" indent="0" algn="just">
+              <a:buNone/>
+            </a:pPr>
+            <a:r>
+              <a:rPr lang="pt-BR" sz="2200" b="1" dirty="0">
+                <a:solidFill>
+                  <a:srgbClr val="FF0000"/>
+                </a:solidFill>
+                <a:latin typeface="Times New Roman" panose="02020603050405020304" pitchFamily="18" charset="0"/>
+                <a:cs typeface="Times New Roman" panose="02020603050405020304" pitchFamily="18" charset="0"/>
+              </a:rPr>
+              <a:t>Disponível em: </a:t>
+            </a:r>
+            <a:r>
+              <a:rPr lang="pt-BR" sz="2200" dirty="0">
+                <a:latin typeface="Times New Roman" panose="02020603050405020304" pitchFamily="18" charset="0"/>
+                <a:cs typeface="Times New Roman" panose="02020603050405020304" pitchFamily="18" charset="0"/>
+                <a:hlinkClick r:id="rId3"/>
+              </a:rPr>
+              <a:t>https://www.youtube.com/watch?v=ZC9G4cW0Y3E</a:t>
+            </a:r>
+            <a:r>
+              <a:rPr lang="pt-BR" sz="2200" dirty="0">
+                <a:latin typeface="Times New Roman" panose="02020603050405020304" pitchFamily="18" charset="0"/>
+                <a:cs typeface="Times New Roman" panose="02020603050405020304" pitchFamily="18" charset="0"/>
+              </a:rPr>
+              <a:t> </a:t>
+            </a:r>
+          </a:p>
+          <a:p>
+            <a:pPr marL="0" indent="0" algn="just">
+              <a:buNone/>
+            </a:pPr>
+            <a:endParaRPr lang="pt-BR" sz="2200" dirty="0">
+              <a:latin typeface="Times New Roman" panose="02020603050405020304" pitchFamily="18" charset="0"/>
+              <a:cs typeface="Times New Roman" panose="02020603050405020304" pitchFamily="18" charset="0"/>
+            </a:endParaRPr>
+          </a:p>
+          <a:p>
+            <a:pPr marL="0" indent="0" algn="just">
+              <a:buNone/>
+            </a:pPr>
+            <a:endParaRPr lang="pt-BR" sz="2200" dirty="0">
+              <a:latin typeface="Times New Roman" panose="02020603050405020304" pitchFamily="18" charset="0"/>
+              <a:cs typeface="Times New Roman" panose="02020603050405020304" pitchFamily="18" charset="0"/>
+            </a:endParaRPr>
+          </a:p>
+          <a:p>
+            <a:pPr marL="0" indent="0" algn="just">
+              <a:buNone/>
+            </a:pPr>
+            <a:endParaRPr lang="pt-BR" sz="2200" dirty="0">
+              <a:latin typeface="Times New Roman" panose="02020603050405020304" pitchFamily="18" charset="0"/>
+              <a:cs typeface="Times New Roman" panose="02020603050405020304" pitchFamily="18" charset="0"/>
+            </a:endParaRPr>
+          </a:p>
+          <a:p>
+            <a:pPr marL="0" indent="0" algn="just">
+              <a:buNone/>
+            </a:pPr>
+            <a:r>
+              <a:rPr lang="pt-BR" sz="2200" dirty="0">
+                <a:latin typeface="Times New Roman" panose="02020603050405020304" pitchFamily="18" charset="0"/>
+                <a:cs typeface="Times New Roman" panose="02020603050405020304" pitchFamily="18" charset="0"/>
+              </a:rPr>
+              <a:t>[2] </a:t>
+            </a:r>
+            <a:r>
+              <a:rPr lang="pt-BR" sz="2200" b="1" dirty="0">
+                <a:latin typeface="Times New Roman" panose="02020603050405020304" pitchFamily="18" charset="0"/>
+                <a:cs typeface="Times New Roman" panose="02020603050405020304" pitchFamily="18" charset="0"/>
+              </a:rPr>
+              <a:t>COBIT na prática</a:t>
+            </a:r>
+          </a:p>
+          <a:p>
+            <a:pPr marL="0" indent="0" algn="just">
+              <a:buNone/>
+            </a:pPr>
+            <a:r>
+              <a:rPr lang="pt-BR" sz="2200" b="1" dirty="0">
+                <a:solidFill>
+                  <a:srgbClr val="FF0000"/>
+                </a:solidFill>
+                <a:latin typeface="Times New Roman" panose="02020603050405020304" pitchFamily="18" charset="0"/>
+                <a:cs typeface="Times New Roman" panose="02020603050405020304" pitchFamily="18" charset="0"/>
+              </a:rPr>
+              <a:t>Disponível em: </a:t>
+            </a:r>
+            <a:r>
+              <a:rPr lang="pt-BR" sz="2200" dirty="0">
+                <a:latin typeface="Times New Roman" panose="02020603050405020304" pitchFamily="18" charset="0"/>
+                <a:cs typeface="Times New Roman" panose="02020603050405020304" pitchFamily="18" charset="0"/>
+                <a:hlinkClick r:id="rId4"/>
+              </a:rPr>
+              <a:t>https://www.youtube.com/watch?v=3uZ7k8p9b5E</a:t>
+            </a:r>
+            <a:endParaRPr lang="pt-BR" sz="2200" dirty="0">
+              <a:latin typeface="Times New Roman" panose="02020603050405020304" pitchFamily="18" charset="0"/>
+              <a:cs typeface="Times New Roman" panose="02020603050405020304" pitchFamily="18" charset="0"/>
+            </a:endParaRPr>
+          </a:p>
+        </p:txBody>
+      </p:sp>
+    </p:spTree>
+    <p:extLst>
+      <p:ext uri="{BB962C8B-B14F-4D97-AF65-F5344CB8AC3E}">
+        <p14:creationId xmlns:p14="http://schemas.microsoft.com/office/powerpoint/2010/main" val="2747596967"/>
+      </p:ext>
+    </p:extLst>
+  </p:cSld>
+  <p:clrMapOvr>
+    <a:masterClrMapping/>
+  </p:clrMapOvr>
+  <p:transition spd="med"/>
+</p:sld>
+</file>
+
+<file path=ppt/slides/slide11.xml><?xml version="1.0" encoding="utf-8"?>
+<p:sld xmlns:a="http://schemas.openxmlformats.org/drawingml/2006/main" xmlns:r="http://schemas.openxmlformats.org/officeDocument/2006/relationships" xmlns:p="http://schemas.openxmlformats.org/presentationml/2006/main">
+  <p:cSld>
+    <p:spTree>
+      <p:nvGrpSpPr>
+        <p:cNvPr id="1" name="">
+          <a:extLst>
+            <a:ext uri="{FF2B5EF4-FFF2-40B4-BE49-F238E27FC236}">
+              <a16:creationId xmlns:a16="http://schemas.microsoft.com/office/drawing/2014/main" id="{2953AC7D-8CF9-A63F-57A2-D983DEB50039}"/>
+            </a:ext>
+          </a:extLst>
+        </p:cNvPr>
+        <p:cNvGrpSpPr/>
+        <p:nvPr/>
+      </p:nvGrpSpPr>
+      <p:grpSpPr>
+        <a:xfrm>
+          <a:off x="0" y="0"/>
+          <a:ext cx="0" cy="0"/>
+          <a:chOff x="0" y="0"/>
+          <a:chExt cx="0" cy="0"/>
+        </a:xfrm>
+      </p:grpSpPr>
+      <p:sp>
+        <p:nvSpPr>
+          <p:cNvPr id="6" name="Title 1">
+            <a:extLst>
+              <a:ext uri="{FF2B5EF4-FFF2-40B4-BE49-F238E27FC236}">
+                <a16:creationId xmlns:a16="http://schemas.microsoft.com/office/drawing/2014/main" id="{CC4C3A19-ED0C-1CE0-1512-03DBBA8E622A}"/>
+              </a:ext>
+            </a:extLst>
+          </p:cNvPr>
+          <p:cNvSpPr>
+            <a:spLocks noGrp="1"/>
+          </p:cNvSpPr>
+          <p:nvPr>
+            <p:ph type="title"/>
+          </p:nvPr>
+        </p:nvSpPr>
+        <p:spPr>
+          <a:xfrm>
+            <a:off x="457200" y="205980"/>
+            <a:ext cx="8229600" cy="857251"/>
+          </a:xfrm>
+        </p:spPr>
+        <p:txBody>
+          <a:bodyPr>
+            <a:normAutofit/>
+          </a:bodyPr>
+          <a:lstStyle/>
+          <a:p>
+            <a:r>
+              <a:rPr lang="en-US" b="1" dirty="0" err="1">
+                <a:solidFill>
+                  <a:srgbClr val="0070C0"/>
+                </a:solidFill>
+              </a:rPr>
+              <a:t>Atividade</a:t>
+            </a:r>
+            <a:r>
+              <a:rPr lang="en-US" b="1" dirty="0">
+                <a:solidFill>
+                  <a:srgbClr val="0070C0"/>
+                </a:solidFill>
+              </a:rPr>
+              <a:t>: </a:t>
+            </a:r>
+            <a:r>
+              <a:rPr lang="en-US" b="1" dirty="0" err="1">
+                <a:solidFill>
+                  <a:srgbClr val="0070C0"/>
+                </a:solidFill>
+              </a:rPr>
+              <a:t>Estudo</a:t>
+            </a:r>
+            <a:r>
+              <a:rPr lang="en-US" b="1" dirty="0">
+                <a:solidFill>
+                  <a:srgbClr val="0070C0"/>
+                </a:solidFill>
+              </a:rPr>
+              <a:t> de Caso</a:t>
+            </a:r>
+          </a:p>
+        </p:txBody>
+      </p:sp>
+      <p:sp>
+        <p:nvSpPr>
+          <p:cNvPr id="8" name="Text Placeholder 2">
+            <a:extLst>
+              <a:ext uri="{FF2B5EF4-FFF2-40B4-BE49-F238E27FC236}">
+                <a16:creationId xmlns:a16="http://schemas.microsoft.com/office/drawing/2014/main" id="{B45119E1-EF11-7248-2ADA-8776A0D7E7E3}"/>
+              </a:ext>
+            </a:extLst>
+          </p:cNvPr>
+          <p:cNvSpPr>
+            <a:spLocks noGrp="1"/>
+          </p:cNvSpPr>
+          <p:nvPr>
+            <p:ph type="body" sz="half" idx="1"/>
+          </p:nvPr>
+        </p:nvSpPr>
+        <p:spPr>
+          <a:xfrm>
+            <a:off x="142865" y="1035050"/>
+            <a:ext cx="8865056" cy="3994150"/>
+          </a:xfrm>
+        </p:spPr>
+        <p:txBody>
+          <a:bodyPr>
+            <a:noAutofit/>
+          </a:bodyPr>
+          <a:lstStyle/>
+          <a:p>
+            <a:pPr marL="0" indent="0">
+              <a:buNone/>
+            </a:pPr>
+            <a:r>
+              <a:rPr lang="pt-BR" sz="2000" b="1" dirty="0">
+                <a:latin typeface="Times New Roman" panose="02020603050405020304" pitchFamily="18" charset="0"/>
+                <a:cs typeface="Times New Roman" panose="02020603050405020304" pitchFamily="18" charset="0"/>
+              </a:rPr>
+              <a:t>Uma empresa apresenta problemas</a:t>
+            </a:r>
+            <a:endParaRPr lang="pt-BR" sz="2000" dirty="0">
+              <a:latin typeface="Times New Roman" panose="02020603050405020304" pitchFamily="18" charset="0"/>
+              <a:cs typeface="Times New Roman" panose="02020603050405020304" pitchFamily="18" charset="0"/>
+            </a:endParaRPr>
+          </a:p>
+          <a:p>
+            <a:pPr marL="457200" indent="-457200">
+              <a:buFont typeface="+mj-lt"/>
+              <a:buAutoNum type="arabicPeriod"/>
+            </a:pPr>
+            <a:endParaRPr lang="pt-BR" sz="2000" dirty="0">
+              <a:latin typeface="Times New Roman" panose="02020603050405020304" pitchFamily="18" charset="0"/>
+              <a:cs typeface="Times New Roman" panose="02020603050405020304" pitchFamily="18" charset="0"/>
+            </a:endParaRPr>
+          </a:p>
+          <a:p>
+            <a:pPr marL="457200" indent="-457200">
+              <a:buFont typeface="+mj-lt"/>
+              <a:buAutoNum type="arabicPeriod"/>
+            </a:pPr>
+            <a:r>
+              <a:rPr lang="pt-BR" sz="2000" dirty="0">
+                <a:latin typeface="Times New Roman" panose="02020603050405020304" pitchFamily="18" charset="0"/>
+                <a:cs typeface="Times New Roman" panose="02020603050405020304" pitchFamily="18" charset="0"/>
+              </a:rPr>
+              <a:t>Sistemas fora do ar</a:t>
+            </a:r>
+          </a:p>
+          <a:p>
+            <a:pPr marL="457200" indent="-457200">
+              <a:buFont typeface="+mj-lt"/>
+              <a:buAutoNum type="arabicPeriod"/>
+            </a:pPr>
+            <a:r>
+              <a:rPr lang="pt-BR" sz="2000" dirty="0">
+                <a:latin typeface="Times New Roman" panose="02020603050405020304" pitchFamily="18" charset="0"/>
+                <a:cs typeface="Times New Roman" panose="02020603050405020304" pitchFamily="18" charset="0"/>
+              </a:rPr>
+              <a:t>Falta de controle de </a:t>
+            </a:r>
+            <a:r>
+              <a:rPr lang="pt-BR" sz="2000" b="1" dirty="0">
+                <a:latin typeface="Times New Roman" panose="02020603050405020304" pitchFamily="18" charset="0"/>
+                <a:cs typeface="Times New Roman" panose="02020603050405020304" pitchFamily="18" charset="0"/>
+              </a:rPr>
+              <a:t>TI</a:t>
+            </a:r>
+          </a:p>
+          <a:p>
+            <a:pPr marL="457200" indent="-457200">
+              <a:buFont typeface="+mj-lt"/>
+              <a:buAutoNum type="arabicPeriod"/>
+            </a:pPr>
+            <a:r>
+              <a:rPr lang="pt-BR" sz="2000" dirty="0">
+                <a:latin typeface="Times New Roman" panose="02020603050405020304" pitchFamily="18" charset="0"/>
+                <a:cs typeface="Times New Roman" panose="02020603050405020304" pitchFamily="18" charset="0"/>
+              </a:rPr>
+              <a:t>Custos elevados</a:t>
+            </a:r>
+          </a:p>
+          <a:p>
+            <a:pPr marL="457200" indent="-457200">
+              <a:buFont typeface="+mj-lt"/>
+              <a:buAutoNum type="arabicPeriod"/>
+            </a:pPr>
+            <a:endParaRPr lang="pt-BR" sz="2000" dirty="0">
+              <a:latin typeface="Times New Roman" panose="02020603050405020304" pitchFamily="18" charset="0"/>
+              <a:cs typeface="Times New Roman" panose="02020603050405020304" pitchFamily="18" charset="0"/>
+            </a:endParaRPr>
+          </a:p>
+          <a:p>
+            <a:pPr marL="0" indent="0">
+              <a:buNone/>
+            </a:pPr>
+            <a:r>
+              <a:rPr lang="pt-BR" sz="2000" b="1" dirty="0">
+                <a:solidFill>
+                  <a:srgbClr val="FF0000"/>
+                </a:solidFill>
+                <a:latin typeface="Times New Roman" panose="02020603050405020304" pitchFamily="18" charset="0"/>
+                <a:cs typeface="Times New Roman" panose="02020603050405020304" pitchFamily="18" charset="0"/>
+              </a:rPr>
+              <a:t>Pergunta</a:t>
+            </a:r>
+            <a:r>
+              <a:rPr lang="pt-BR" sz="2000" dirty="0">
+                <a:latin typeface="Times New Roman" panose="02020603050405020304" pitchFamily="18" charset="0"/>
+                <a:cs typeface="Times New Roman" panose="02020603050405020304" pitchFamily="18" charset="0"/>
+              </a:rPr>
+              <a:t>:</a:t>
+            </a:r>
+          </a:p>
+          <a:p>
+            <a:pPr marL="0" indent="0">
+              <a:buNone/>
+            </a:pPr>
+            <a:r>
+              <a:rPr lang="pt-BR" sz="2000" dirty="0">
+                <a:latin typeface="Times New Roman" panose="02020603050405020304" pitchFamily="18" charset="0"/>
+                <a:cs typeface="Times New Roman" panose="02020603050405020304" pitchFamily="18" charset="0"/>
+              </a:rPr>
+              <a:t>Como a Governança de </a:t>
+            </a:r>
+            <a:r>
+              <a:rPr lang="pt-BR" sz="2000" b="1" dirty="0">
+                <a:latin typeface="Times New Roman" panose="02020603050405020304" pitchFamily="18" charset="0"/>
+                <a:cs typeface="Times New Roman" panose="02020603050405020304" pitchFamily="18" charset="0"/>
+              </a:rPr>
+              <a:t>TI</a:t>
+            </a:r>
+            <a:r>
+              <a:rPr lang="pt-BR" sz="2000" dirty="0">
+                <a:latin typeface="Times New Roman" panose="02020603050405020304" pitchFamily="18" charset="0"/>
+                <a:cs typeface="Times New Roman" panose="02020603050405020304" pitchFamily="18" charset="0"/>
+              </a:rPr>
+              <a:t> pode resolver?</a:t>
+            </a:r>
+          </a:p>
+          <a:p>
+            <a:pPr marL="0" indent="0">
+              <a:buNone/>
+            </a:pPr>
+            <a:endParaRPr lang="pt-BR" sz="2000" dirty="0">
+              <a:latin typeface="Times New Roman" panose="02020603050405020304" pitchFamily="18" charset="0"/>
+              <a:cs typeface="Times New Roman" panose="02020603050405020304" pitchFamily="18" charset="0"/>
+            </a:endParaRPr>
+          </a:p>
+          <a:p>
+            <a:pPr marL="0" indent="0" algn="just">
+              <a:buNone/>
+            </a:pPr>
+            <a:r>
+              <a:rPr lang="pt-BR" sz="2000" b="1" dirty="0">
+                <a:solidFill>
+                  <a:srgbClr val="FF0000"/>
+                </a:solidFill>
+                <a:latin typeface="Times New Roman" panose="02020603050405020304" pitchFamily="18" charset="0"/>
+                <a:cs typeface="Times New Roman" panose="02020603050405020304" pitchFamily="18" charset="0"/>
+              </a:rPr>
+              <a:t>Entrega</a:t>
+            </a:r>
+            <a:r>
+              <a:rPr lang="pt-BR" sz="2000" dirty="0">
+                <a:latin typeface="Times New Roman" panose="02020603050405020304" pitchFamily="18" charset="0"/>
+                <a:cs typeface="Times New Roman" panose="02020603050405020304" pitchFamily="18" charset="0"/>
+              </a:rPr>
+              <a:t>: apresentação (</a:t>
+            </a:r>
+            <a:r>
+              <a:rPr lang="pt-BR" sz="2000" b="1" dirty="0">
+                <a:solidFill>
+                  <a:srgbClr val="FF0000"/>
+                </a:solidFill>
+                <a:latin typeface="Times New Roman" panose="02020603050405020304" pitchFamily="18" charset="0"/>
+                <a:cs typeface="Times New Roman" panose="02020603050405020304" pitchFamily="18" charset="0"/>
+              </a:rPr>
+              <a:t>08 min</a:t>
+            </a:r>
+            <a:r>
+              <a:rPr lang="pt-BR" sz="2000" dirty="0">
+                <a:latin typeface="Times New Roman" panose="02020603050405020304" pitchFamily="18" charset="0"/>
+                <a:cs typeface="Times New Roman" panose="02020603050405020304" pitchFamily="18" charset="0"/>
+              </a:rPr>
+              <a:t>)</a:t>
+            </a:r>
+          </a:p>
+        </p:txBody>
+      </p:sp>
+    </p:spTree>
+    <p:extLst>
+      <p:ext uri="{BB962C8B-B14F-4D97-AF65-F5344CB8AC3E}">
+        <p14:creationId xmlns:p14="http://schemas.microsoft.com/office/powerpoint/2010/main" val="2976682751"/>
+      </p:ext>
+    </p:extLst>
+  </p:cSld>
+  <p:clrMapOvr>
+    <a:masterClrMapping/>
+  </p:clrMapOvr>
+  <p:transition spd="med"/>
+</p:sld>
+</file>
+
+<file path=ppt/slides/slide12.xml><?xml version="1.0" encoding="utf-8"?>
+<p:sld xmlns:a="http://schemas.openxmlformats.org/drawingml/2006/main" xmlns:r="http://schemas.openxmlformats.org/officeDocument/2006/relationships" xmlns:p="http://schemas.openxmlformats.org/presentationml/2006/main">
+  <p:cSld>
+    <p:spTree>
+      <p:nvGrpSpPr>
+        <p:cNvPr id="1" name="">
+          <a:extLst>
+            <a:ext uri="{FF2B5EF4-FFF2-40B4-BE49-F238E27FC236}">
+              <a16:creationId xmlns:a16="http://schemas.microsoft.com/office/drawing/2014/main" id="{6D4DDABA-F85B-CCBA-0EA4-1824BC8D543E}"/>
+            </a:ext>
+          </a:extLst>
+        </p:cNvPr>
+        <p:cNvGrpSpPr/>
+        <p:nvPr/>
+      </p:nvGrpSpPr>
+      <p:grpSpPr>
+        <a:xfrm>
+          <a:off x="0" y="0"/>
+          <a:ext cx="0" cy="0"/>
+          <a:chOff x="0" y="0"/>
+          <a:chExt cx="0" cy="0"/>
+        </a:xfrm>
+      </p:grpSpPr>
+      <p:sp>
+        <p:nvSpPr>
+          <p:cNvPr id="6" name="Title 1">
+            <a:extLst>
+              <a:ext uri="{FF2B5EF4-FFF2-40B4-BE49-F238E27FC236}">
+                <a16:creationId xmlns:a16="http://schemas.microsoft.com/office/drawing/2014/main" id="{7B6AF369-8A31-B707-3254-F4E38B4F75F1}"/>
+              </a:ext>
+            </a:extLst>
+          </p:cNvPr>
+          <p:cNvSpPr>
+            <a:spLocks noGrp="1"/>
+          </p:cNvSpPr>
+          <p:nvPr>
+            <p:ph type="title"/>
+          </p:nvPr>
+        </p:nvSpPr>
+        <p:spPr>
+          <a:xfrm>
+            <a:off x="457200" y="205980"/>
+            <a:ext cx="8229600" cy="857251"/>
+          </a:xfrm>
+        </p:spPr>
+        <p:txBody>
+          <a:bodyPr>
+            <a:normAutofit/>
+          </a:bodyPr>
+          <a:lstStyle/>
+          <a:p>
+            <a:r>
+              <a:rPr lang="en-US" b="1" dirty="0" err="1">
+                <a:solidFill>
+                  <a:srgbClr val="0070C0"/>
+                </a:solidFill>
+              </a:rPr>
+              <a:t>Atividade</a:t>
+            </a:r>
+            <a:r>
+              <a:rPr lang="en-US" b="1" dirty="0">
+                <a:solidFill>
+                  <a:srgbClr val="0070C0"/>
+                </a:solidFill>
+              </a:rPr>
+              <a:t>: Framework</a:t>
+            </a:r>
+          </a:p>
+        </p:txBody>
+      </p:sp>
+      <p:sp>
+        <p:nvSpPr>
+          <p:cNvPr id="8" name="Text Placeholder 2">
+            <a:extLst>
+              <a:ext uri="{FF2B5EF4-FFF2-40B4-BE49-F238E27FC236}">
+                <a16:creationId xmlns:a16="http://schemas.microsoft.com/office/drawing/2014/main" id="{7464EDAB-47D4-0A5D-DC77-98FA139836A2}"/>
+              </a:ext>
+            </a:extLst>
+          </p:cNvPr>
+          <p:cNvSpPr>
+            <a:spLocks noGrp="1"/>
+          </p:cNvSpPr>
+          <p:nvPr>
+            <p:ph type="body" sz="half" idx="1"/>
+          </p:nvPr>
+        </p:nvSpPr>
+        <p:spPr>
+          <a:xfrm>
+            <a:off x="142865" y="1035050"/>
+            <a:ext cx="8865056" cy="3994150"/>
+          </a:xfrm>
+        </p:spPr>
+        <p:txBody>
+          <a:bodyPr>
+            <a:noAutofit/>
+          </a:bodyPr>
+          <a:lstStyle/>
+          <a:p>
+            <a:pPr marL="0" indent="0">
+              <a:buNone/>
+            </a:pPr>
+            <a:r>
+              <a:rPr lang="pt-BR" sz="2000" b="1" dirty="0">
+                <a:latin typeface="Times New Roman" panose="02020603050405020304" pitchFamily="18" charset="0"/>
+                <a:cs typeface="Times New Roman" panose="02020603050405020304" pitchFamily="18" charset="0"/>
+              </a:rPr>
+              <a:t>Escolher entre COBIT ou </a:t>
+            </a:r>
+            <a:r>
+              <a:rPr lang="pt-BR" sz="2000" b="1" dirty="0">
+                <a:solidFill>
+                  <a:srgbClr val="FF0000"/>
+                </a:solidFill>
+                <a:latin typeface="Times New Roman" panose="02020603050405020304" pitchFamily="18" charset="0"/>
+                <a:cs typeface="Times New Roman" panose="02020603050405020304" pitchFamily="18" charset="0"/>
+              </a:rPr>
+              <a:t>ITIL</a:t>
+            </a:r>
+          </a:p>
+          <a:p>
+            <a:pPr marL="0" indent="0">
+              <a:buNone/>
+            </a:pPr>
+            <a:endParaRPr lang="pt-BR" sz="2000" b="1" dirty="0">
+              <a:latin typeface="Times New Roman" panose="02020603050405020304" pitchFamily="18" charset="0"/>
+              <a:cs typeface="Times New Roman" panose="02020603050405020304" pitchFamily="18" charset="0"/>
+            </a:endParaRPr>
+          </a:p>
+          <a:p>
+            <a:pPr marL="0" indent="0">
+              <a:buNone/>
+            </a:pPr>
+            <a:r>
+              <a:rPr lang="pt-BR" sz="2000" b="1" dirty="0">
+                <a:solidFill>
+                  <a:srgbClr val="FF0000"/>
+                </a:solidFill>
+                <a:latin typeface="Times New Roman" panose="02020603050405020304" pitchFamily="18" charset="0"/>
+                <a:cs typeface="Times New Roman" panose="02020603050405020304" pitchFamily="18" charset="0"/>
+              </a:rPr>
+              <a:t>Propor</a:t>
+            </a:r>
+            <a:r>
+              <a:rPr lang="pt-BR" sz="2000" b="1" dirty="0">
+                <a:latin typeface="Times New Roman" panose="02020603050405020304" pitchFamily="18" charset="0"/>
+                <a:cs typeface="Times New Roman" panose="02020603050405020304" pitchFamily="18" charset="0"/>
+              </a:rPr>
+              <a:t>:</a:t>
+            </a:r>
+          </a:p>
+          <a:p>
+            <a:r>
+              <a:rPr lang="pt-BR" sz="2000" dirty="0">
+                <a:latin typeface="Times New Roman" panose="02020603050405020304" pitchFamily="18" charset="0"/>
+                <a:cs typeface="Times New Roman" panose="02020603050405020304" pitchFamily="18" charset="0"/>
+              </a:rPr>
+              <a:t>2 práticas aplicáveis;</a:t>
+            </a:r>
+          </a:p>
+          <a:p>
+            <a:r>
+              <a:rPr lang="pt-BR" sz="2000" dirty="0">
+                <a:latin typeface="Times New Roman" panose="02020603050405020304" pitchFamily="18" charset="0"/>
+                <a:cs typeface="Times New Roman" panose="02020603050405020304" pitchFamily="18" charset="0"/>
+              </a:rPr>
+              <a:t>1 benefício esperado.</a:t>
+            </a:r>
+          </a:p>
+          <a:p>
+            <a:pPr marL="0" indent="0">
+              <a:buNone/>
+            </a:pPr>
+            <a:endParaRPr lang="pt-BR" sz="2000" dirty="0">
+              <a:latin typeface="Times New Roman" panose="02020603050405020304" pitchFamily="18" charset="0"/>
+              <a:cs typeface="Times New Roman" panose="02020603050405020304" pitchFamily="18" charset="0"/>
+            </a:endParaRPr>
+          </a:p>
+          <a:p>
+            <a:pPr marL="0" indent="0">
+              <a:buNone/>
+            </a:pPr>
+            <a:endParaRPr lang="pt-BR" sz="2000" dirty="0">
+              <a:latin typeface="Times New Roman" panose="02020603050405020304" pitchFamily="18" charset="0"/>
+              <a:cs typeface="Times New Roman" panose="02020603050405020304" pitchFamily="18" charset="0"/>
+            </a:endParaRPr>
+          </a:p>
+          <a:p>
+            <a:pPr marL="0" indent="0" algn="just">
+              <a:buNone/>
+            </a:pPr>
+            <a:r>
+              <a:rPr lang="pt-BR" sz="2000" b="1" dirty="0">
+                <a:solidFill>
+                  <a:srgbClr val="FF0000"/>
+                </a:solidFill>
+                <a:latin typeface="Times New Roman" panose="02020603050405020304" pitchFamily="18" charset="0"/>
+                <a:cs typeface="Times New Roman" panose="02020603050405020304" pitchFamily="18" charset="0"/>
+              </a:rPr>
+              <a:t>Entrega</a:t>
+            </a:r>
+            <a:r>
+              <a:rPr lang="pt-BR" sz="2000" dirty="0">
+                <a:latin typeface="Times New Roman" panose="02020603050405020304" pitchFamily="18" charset="0"/>
+                <a:cs typeface="Times New Roman" panose="02020603050405020304" pitchFamily="18" charset="0"/>
+              </a:rPr>
+              <a:t>: apresentação (</a:t>
+            </a:r>
+            <a:r>
+              <a:rPr lang="pt-BR" sz="2000" b="1" dirty="0">
+                <a:solidFill>
+                  <a:srgbClr val="FF0000"/>
+                </a:solidFill>
+                <a:latin typeface="Times New Roman" panose="02020603050405020304" pitchFamily="18" charset="0"/>
+                <a:cs typeface="Times New Roman" panose="02020603050405020304" pitchFamily="18" charset="0"/>
+              </a:rPr>
+              <a:t>08 min</a:t>
+            </a:r>
+            <a:r>
+              <a:rPr lang="pt-BR" sz="2000" dirty="0">
+                <a:latin typeface="Times New Roman" panose="02020603050405020304" pitchFamily="18" charset="0"/>
+                <a:cs typeface="Times New Roman" panose="02020603050405020304" pitchFamily="18" charset="0"/>
+              </a:rPr>
+              <a:t>)</a:t>
+            </a:r>
+          </a:p>
+        </p:txBody>
+      </p:sp>
+    </p:spTree>
+    <p:extLst>
+      <p:ext uri="{BB962C8B-B14F-4D97-AF65-F5344CB8AC3E}">
+        <p14:creationId xmlns:p14="http://schemas.microsoft.com/office/powerpoint/2010/main" val="3476569383"/>
+      </p:ext>
+    </p:extLst>
+  </p:cSld>
+  <p:clrMapOvr>
+    <a:masterClrMapping/>
+  </p:clrMapOvr>
+  <p:transition spd="med"/>
+</p:sld>
+</file>
+
+<file path=ppt/slides/slide13.xml><?xml version="1.0" encoding="utf-8"?>
+<p:sld xmlns:a="http://schemas.openxmlformats.org/drawingml/2006/main" xmlns:r="http://schemas.openxmlformats.org/officeDocument/2006/relationships" xmlns:p="http://schemas.openxmlformats.org/presentationml/2006/main">
+  <p:cSld>
+    <p:spTree>
+      <p:nvGrpSpPr>
+        <p:cNvPr id="1" name="">
+          <a:extLst>
+            <a:ext uri="{FF2B5EF4-FFF2-40B4-BE49-F238E27FC236}">
+              <a16:creationId xmlns:a16="http://schemas.microsoft.com/office/drawing/2014/main" id="{5697023E-9858-F34E-8D96-DFAF4AFE4222}"/>
+            </a:ext>
+          </a:extLst>
+        </p:cNvPr>
+        <p:cNvGrpSpPr/>
+        <p:nvPr/>
+      </p:nvGrpSpPr>
+      <p:grpSpPr>
+        <a:xfrm>
+          <a:off x="0" y="0"/>
+          <a:ext cx="0" cy="0"/>
+          <a:chOff x="0" y="0"/>
+          <a:chExt cx="0" cy="0"/>
+        </a:xfrm>
+      </p:grpSpPr>
+      <p:sp>
+        <p:nvSpPr>
+          <p:cNvPr id="6" name="Title 1">
+            <a:extLst>
+              <a:ext uri="{FF2B5EF4-FFF2-40B4-BE49-F238E27FC236}">
+                <a16:creationId xmlns:a16="http://schemas.microsoft.com/office/drawing/2014/main" id="{96847EEC-3AB4-A0A1-0F83-8E5155C2CAA1}"/>
+              </a:ext>
+            </a:extLst>
+          </p:cNvPr>
+          <p:cNvSpPr>
+            <a:spLocks noGrp="1"/>
+          </p:cNvSpPr>
+          <p:nvPr>
+            <p:ph type="title"/>
+          </p:nvPr>
+        </p:nvSpPr>
+        <p:spPr>
+          <a:xfrm>
+            <a:off x="457200" y="205980"/>
+            <a:ext cx="8229600" cy="857251"/>
+          </a:xfrm>
+        </p:spPr>
+        <p:txBody>
+          <a:bodyPr>
+            <a:normAutofit/>
+          </a:bodyPr>
+          <a:lstStyle/>
+          <a:p>
+            <a:r>
+              <a:rPr lang="en-US" b="1" dirty="0" err="1">
+                <a:solidFill>
+                  <a:srgbClr val="0070C0"/>
+                </a:solidFill>
+              </a:rPr>
+              <a:t>Atividade</a:t>
+            </a:r>
+            <a:r>
+              <a:rPr lang="en-US" b="1" dirty="0">
+                <a:solidFill>
+                  <a:srgbClr val="0070C0"/>
+                </a:solidFill>
+              </a:rPr>
+              <a:t>: Debate</a:t>
+            </a:r>
+          </a:p>
+        </p:txBody>
+      </p:sp>
+      <p:sp>
+        <p:nvSpPr>
+          <p:cNvPr id="8" name="Text Placeholder 2">
+            <a:extLst>
+              <a:ext uri="{FF2B5EF4-FFF2-40B4-BE49-F238E27FC236}">
+                <a16:creationId xmlns:a16="http://schemas.microsoft.com/office/drawing/2014/main" id="{1F63BD2E-EC71-8BB0-9C9F-8558967657B6}"/>
+              </a:ext>
+            </a:extLst>
+          </p:cNvPr>
+          <p:cNvSpPr>
+            <a:spLocks noGrp="1"/>
+          </p:cNvSpPr>
+          <p:nvPr>
+            <p:ph type="body" sz="half" idx="1"/>
+          </p:nvPr>
+        </p:nvSpPr>
+        <p:spPr>
+          <a:xfrm>
+            <a:off x="142865" y="1035050"/>
+            <a:ext cx="8865056" cy="3994150"/>
+          </a:xfrm>
+        </p:spPr>
+        <p:txBody>
+          <a:bodyPr>
+            <a:noAutofit/>
+          </a:bodyPr>
+          <a:lstStyle/>
+          <a:p>
+            <a:pPr marL="0" indent="0">
+              <a:buNone/>
+            </a:pPr>
+            <a:endParaRPr lang="pt-BR" sz="2200" b="1" dirty="0">
+              <a:latin typeface="Times New Roman" panose="02020603050405020304" pitchFamily="18" charset="0"/>
+              <a:cs typeface="Times New Roman" panose="02020603050405020304" pitchFamily="18" charset="0"/>
+            </a:endParaRPr>
+          </a:p>
+          <a:p>
+            <a:pPr marL="0" indent="0">
+              <a:buNone/>
+            </a:pPr>
+            <a:endParaRPr lang="pt-BR" sz="2200" b="1" dirty="0">
+              <a:latin typeface="Times New Roman" panose="02020603050405020304" pitchFamily="18" charset="0"/>
+              <a:cs typeface="Times New Roman" panose="02020603050405020304" pitchFamily="18" charset="0"/>
+            </a:endParaRPr>
+          </a:p>
+          <a:p>
+            <a:pPr marL="0" indent="0">
+              <a:buNone/>
+            </a:pPr>
+            <a:endParaRPr lang="pt-BR" sz="2200" b="1" dirty="0">
+              <a:latin typeface="Times New Roman" panose="02020603050405020304" pitchFamily="18" charset="0"/>
+              <a:cs typeface="Times New Roman" panose="02020603050405020304" pitchFamily="18" charset="0"/>
+            </a:endParaRPr>
+          </a:p>
+          <a:p>
+            <a:pPr marL="0" indent="0">
+              <a:buNone/>
+            </a:pPr>
+            <a:r>
+              <a:rPr lang="pt-BR" sz="2200" b="1" dirty="0">
+                <a:latin typeface="Times New Roman" panose="02020603050405020304" pitchFamily="18" charset="0"/>
+                <a:cs typeface="Times New Roman" panose="02020603050405020304" pitchFamily="18" charset="0"/>
+              </a:rPr>
+              <a:t>Toda empresa precisa de Governança de TI?</a:t>
+            </a:r>
+          </a:p>
+          <a:p>
+            <a:pPr marL="0" indent="0">
+              <a:buNone/>
+            </a:pPr>
+            <a:endParaRPr lang="pt-BR" sz="2200" dirty="0">
+              <a:latin typeface="Times New Roman" panose="02020603050405020304" pitchFamily="18" charset="0"/>
+              <a:cs typeface="Times New Roman" panose="02020603050405020304" pitchFamily="18" charset="0"/>
+            </a:endParaRPr>
+          </a:p>
+          <a:p>
+            <a:pPr marL="0" indent="0">
+              <a:buNone/>
+            </a:pPr>
+            <a:endParaRPr lang="pt-BR" sz="2200" dirty="0">
+              <a:latin typeface="Times New Roman" panose="02020603050405020304" pitchFamily="18" charset="0"/>
+              <a:cs typeface="Times New Roman" panose="02020603050405020304" pitchFamily="18" charset="0"/>
+            </a:endParaRPr>
+          </a:p>
+        </p:txBody>
+      </p:sp>
+    </p:spTree>
+    <p:extLst>
+      <p:ext uri="{BB962C8B-B14F-4D97-AF65-F5344CB8AC3E}">
+        <p14:creationId xmlns:p14="http://schemas.microsoft.com/office/powerpoint/2010/main" val="3365807921"/>
+      </p:ext>
+    </p:extLst>
+  </p:cSld>
+  <p:clrMapOvr>
+    <a:masterClrMapping/>
+  </p:clrMapOvr>
+  <p:transition spd="med"/>
+</p:sld>
+</file>
+
+<file path=ppt/slides/slide14.xml><?xml version="1.0" encoding="utf-8"?>
+<p:sld xmlns:a="http://schemas.openxmlformats.org/drawingml/2006/main" xmlns:r="http://schemas.openxmlformats.org/officeDocument/2006/relationships" xmlns:p="http://schemas.openxmlformats.org/presentationml/2006/main">
+  <p:cSld>
+    <p:spTree>
+      <p:nvGrpSpPr>
+        <p:cNvPr id="1" name=""/>
+        <p:cNvGrpSpPr/>
+        <p:nvPr/>
+      </p:nvGrpSpPr>
+      <p:grpSpPr>
+        <a:xfrm>
+          <a:off x="0" y="0"/>
+          <a:ext cx="0" cy="0"/>
+          <a:chOff x="0" y="0"/>
+          <a:chExt cx="0" cy="0"/>
+        </a:xfrm>
+      </p:grpSpPr>
+      <p:sp>
+        <p:nvSpPr>
+          <p:cNvPr id="6" name="Title 1"/>
+          <p:cNvSpPr>
+            <a:spLocks noGrp="1"/>
+          </p:cNvSpPr>
+          <p:nvPr>
+            <p:ph type="title"/>
+          </p:nvPr>
+        </p:nvSpPr>
+        <p:spPr>
+          <a:xfrm>
+            <a:off x="457200" y="205980"/>
+            <a:ext cx="8229600" cy="857251"/>
+          </a:xfrm>
+        </p:spPr>
+        <p:txBody>
+          <a:bodyPr>
+            <a:normAutofit/>
+          </a:bodyPr>
+          <a:lstStyle/>
+          <a:p>
+            <a:r>
+              <a:rPr lang="en-US" b="1" dirty="0" err="1">
+                <a:solidFill>
+                  <a:srgbClr val="0070C0"/>
+                </a:solidFill>
+              </a:rPr>
+              <a:t>Referências</a:t>
+            </a:r>
+            <a:r>
+              <a:rPr lang="en-US" b="1" dirty="0">
+                <a:solidFill>
+                  <a:srgbClr val="0070C0"/>
+                </a:solidFill>
+              </a:rPr>
+              <a:t> </a:t>
+            </a:r>
+            <a:r>
+              <a:rPr lang="en-US" b="1" dirty="0" err="1">
+                <a:solidFill>
+                  <a:srgbClr val="0070C0"/>
+                </a:solidFill>
+              </a:rPr>
+              <a:t>Bibliográficas</a:t>
+            </a:r>
+            <a:endParaRPr lang="en-US" b="1" dirty="0">
+              <a:solidFill>
+                <a:srgbClr val="0070C0"/>
+              </a:solidFill>
+            </a:endParaRPr>
+          </a:p>
+        </p:txBody>
+      </p:sp>
+      <p:sp>
+        <p:nvSpPr>
+          <p:cNvPr id="8" name="Text Placeholder 2"/>
+          <p:cNvSpPr>
+            <a:spLocks noGrp="1"/>
+          </p:cNvSpPr>
+          <p:nvPr>
+            <p:ph type="body" sz="half" idx="1"/>
+          </p:nvPr>
+        </p:nvSpPr>
+        <p:spPr>
+          <a:xfrm>
+            <a:off x="139472" y="1063230"/>
+            <a:ext cx="8865056" cy="3874289"/>
+          </a:xfrm>
+        </p:spPr>
+        <p:txBody>
+          <a:bodyPr>
+            <a:noAutofit/>
+          </a:bodyPr>
+          <a:lstStyle/>
+          <a:p>
+            <a:pPr marL="0" indent="0">
+              <a:buNone/>
+            </a:pPr>
+            <a:r>
+              <a:rPr lang="pt-BR" sz="1600" dirty="0">
+                <a:latin typeface="Times New Roman" panose="02020603050405020304" pitchFamily="18" charset="0"/>
+                <a:cs typeface="Times New Roman" panose="02020603050405020304" pitchFamily="18" charset="0"/>
+              </a:rPr>
+              <a:t>[1] </a:t>
+            </a:r>
+            <a:r>
+              <a:rPr lang="pt-BR" sz="1600" b="1" dirty="0">
+                <a:latin typeface="Times New Roman" panose="02020603050405020304" pitchFamily="18" charset="0"/>
+                <a:cs typeface="Times New Roman" panose="02020603050405020304" pitchFamily="18" charset="0"/>
+              </a:rPr>
+              <a:t>ISACA. COBIT 2019 </a:t>
+            </a:r>
+          </a:p>
+          <a:p>
+            <a:pPr marL="0" indent="0">
+              <a:buNone/>
+            </a:pPr>
+            <a:r>
+              <a:rPr lang="pt-BR" sz="1600" dirty="0">
+                <a:latin typeface="Times New Roman" panose="02020603050405020304" pitchFamily="18" charset="0"/>
+                <a:cs typeface="Times New Roman" panose="02020603050405020304" pitchFamily="18" charset="0"/>
+              </a:rPr>
+              <a:t>Framework: Governance </a:t>
+            </a:r>
+            <a:r>
+              <a:rPr lang="pt-BR" sz="1600" dirty="0" err="1">
+                <a:latin typeface="Times New Roman" panose="02020603050405020304" pitchFamily="18" charset="0"/>
+                <a:cs typeface="Times New Roman" panose="02020603050405020304" pitchFamily="18" charset="0"/>
+              </a:rPr>
+              <a:t>and</a:t>
+            </a:r>
+            <a:r>
+              <a:rPr lang="pt-BR" sz="1600" dirty="0">
+                <a:latin typeface="Times New Roman" panose="02020603050405020304" pitchFamily="18" charset="0"/>
+                <a:cs typeface="Times New Roman" panose="02020603050405020304" pitchFamily="18" charset="0"/>
+              </a:rPr>
+              <a:t> Management </a:t>
+            </a:r>
+            <a:r>
+              <a:rPr lang="pt-BR" sz="1600" dirty="0" err="1">
+                <a:latin typeface="Times New Roman" panose="02020603050405020304" pitchFamily="18" charset="0"/>
+                <a:cs typeface="Times New Roman" panose="02020603050405020304" pitchFamily="18" charset="0"/>
+              </a:rPr>
+              <a:t>Objectives</a:t>
+            </a:r>
+            <a:r>
+              <a:rPr lang="pt-BR" sz="1600" dirty="0">
+                <a:latin typeface="Times New Roman" panose="02020603050405020304" pitchFamily="18" charset="0"/>
+                <a:cs typeface="Times New Roman" panose="02020603050405020304" pitchFamily="18" charset="0"/>
+              </a:rPr>
+              <a:t>. Rolling Meadows: ISACA, 2019.</a:t>
+            </a:r>
+          </a:p>
+          <a:p>
+            <a:pPr marL="0" indent="0" algn="just">
+              <a:buNone/>
+            </a:pPr>
+            <a:endParaRPr lang="pt-BR" sz="1600" dirty="0">
+              <a:latin typeface="Times New Roman" panose="02020603050405020304" pitchFamily="18" charset="0"/>
+              <a:cs typeface="Times New Roman" panose="02020603050405020304" pitchFamily="18" charset="0"/>
+            </a:endParaRPr>
+          </a:p>
+          <a:p>
+            <a:pPr marL="0" indent="0">
+              <a:buNone/>
+            </a:pPr>
+            <a:r>
+              <a:rPr lang="pt-BR" sz="1600" dirty="0">
+                <a:latin typeface="Times New Roman" panose="02020603050405020304" pitchFamily="18" charset="0"/>
+                <a:cs typeface="Times New Roman" panose="02020603050405020304" pitchFamily="18" charset="0"/>
+              </a:rPr>
+              <a:t>[2] </a:t>
+            </a:r>
+            <a:r>
+              <a:rPr lang="pt-BR" sz="1600" b="1" dirty="0">
+                <a:latin typeface="Times New Roman" panose="02020603050405020304" pitchFamily="18" charset="0"/>
+                <a:cs typeface="Times New Roman" panose="02020603050405020304" pitchFamily="18" charset="0"/>
+              </a:rPr>
+              <a:t>AXELOS</a:t>
+            </a:r>
+          </a:p>
+          <a:p>
+            <a:pPr marL="0" indent="0">
+              <a:buNone/>
+            </a:pPr>
+            <a:r>
+              <a:rPr lang="pt-BR" sz="1600" dirty="0">
+                <a:latin typeface="Times New Roman" panose="02020603050405020304" pitchFamily="18" charset="0"/>
+                <a:cs typeface="Times New Roman" panose="02020603050405020304" pitchFamily="18" charset="0"/>
+              </a:rPr>
+              <a:t>ITIL Foundation: ITIL 4 </a:t>
+            </a:r>
+            <a:r>
+              <a:rPr lang="pt-BR" sz="1600" dirty="0" err="1">
+                <a:latin typeface="Times New Roman" panose="02020603050405020304" pitchFamily="18" charset="0"/>
+                <a:cs typeface="Times New Roman" panose="02020603050405020304" pitchFamily="18" charset="0"/>
+              </a:rPr>
+              <a:t>Edition</a:t>
+            </a:r>
+            <a:r>
+              <a:rPr lang="pt-BR" sz="1600" dirty="0">
+                <a:latin typeface="Times New Roman" panose="02020603050405020304" pitchFamily="18" charset="0"/>
+                <a:cs typeface="Times New Roman" panose="02020603050405020304" pitchFamily="18" charset="0"/>
+              </a:rPr>
+              <a:t>. London: TSO, 2019.</a:t>
+            </a:r>
+          </a:p>
+          <a:p>
+            <a:pPr marL="0" indent="0">
+              <a:buNone/>
+            </a:pPr>
+            <a:endParaRPr lang="pt-BR" sz="1600" b="1" dirty="0">
+              <a:latin typeface="Times New Roman" panose="02020603050405020304" pitchFamily="18" charset="0"/>
+              <a:cs typeface="Times New Roman" panose="02020603050405020304" pitchFamily="18" charset="0"/>
+            </a:endParaRPr>
+          </a:p>
+          <a:p>
+            <a:pPr marL="0" indent="0">
+              <a:buNone/>
+            </a:pPr>
+            <a:r>
+              <a:rPr lang="pt-BR" sz="1600" dirty="0">
+                <a:latin typeface="Times New Roman" panose="02020603050405020304" pitchFamily="18" charset="0"/>
+                <a:cs typeface="Times New Roman" panose="02020603050405020304" pitchFamily="18" charset="0"/>
+              </a:rPr>
+              <a:t>[3] </a:t>
+            </a:r>
+            <a:r>
+              <a:rPr lang="pt-BR" sz="1600" b="1" dirty="0">
+                <a:latin typeface="Times New Roman" panose="02020603050405020304" pitchFamily="18" charset="0"/>
+                <a:cs typeface="Times New Roman" panose="02020603050405020304" pitchFamily="18" charset="0"/>
+              </a:rPr>
+              <a:t>WEILL, P.; ROSS, J. W. </a:t>
+            </a:r>
+          </a:p>
+          <a:p>
+            <a:pPr marL="0" indent="0">
+              <a:buNone/>
+            </a:pPr>
+            <a:r>
+              <a:rPr lang="pt-BR" sz="1600" dirty="0">
+                <a:latin typeface="Times New Roman" panose="02020603050405020304" pitchFamily="18" charset="0"/>
+                <a:cs typeface="Times New Roman" panose="02020603050405020304" pitchFamily="18" charset="0"/>
+              </a:rPr>
+              <a:t>IT Governance: </a:t>
+            </a:r>
+            <a:r>
+              <a:rPr lang="pt-BR" sz="1600" dirty="0" err="1">
+                <a:latin typeface="Times New Roman" panose="02020603050405020304" pitchFamily="18" charset="0"/>
+                <a:cs typeface="Times New Roman" panose="02020603050405020304" pitchFamily="18" charset="0"/>
+              </a:rPr>
+              <a:t>How</a:t>
+            </a:r>
+            <a:r>
+              <a:rPr lang="pt-BR" sz="1600" dirty="0">
+                <a:latin typeface="Times New Roman" panose="02020603050405020304" pitchFamily="18" charset="0"/>
+                <a:cs typeface="Times New Roman" panose="02020603050405020304" pitchFamily="18" charset="0"/>
+              </a:rPr>
+              <a:t> Top Performers </a:t>
+            </a:r>
+            <a:r>
+              <a:rPr lang="pt-BR" sz="1600" dirty="0" err="1">
+                <a:latin typeface="Times New Roman" panose="02020603050405020304" pitchFamily="18" charset="0"/>
+                <a:cs typeface="Times New Roman" panose="02020603050405020304" pitchFamily="18" charset="0"/>
+              </a:rPr>
+              <a:t>Manage</a:t>
+            </a:r>
+            <a:r>
+              <a:rPr lang="pt-BR" sz="1600" dirty="0">
+                <a:latin typeface="Times New Roman" panose="02020603050405020304" pitchFamily="18" charset="0"/>
+                <a:cs typeface="Times New Roman" panose="02020603050405020304" pitchFamily="18" charset="0"/>
+              </a:rPr>
+              <a:t> IT Decision </a:t>
+            </a:r>
+            <a:r>
+              <a:rPr lang="pt-BR" sz="1600" dirty="0" err="1">
+                <a:latin typeface="Times New Roman" panose="02020603050405020304" pitchFamily="18" charset="0"/>
+                <a:cs typeface="Times New Roman" panose="02020603050405020304" pitchFamily="18" charset="0"/>
+              </a:rPr>
+              <a:t>Rights</a:t>
+            </a:r>
+            <a:r>
+              <a:rPr lang="pt-BR" sz="1600" dirty="0">
+                <a:latin typeface="Times New Roman" panose="02020603050405020304" pitchFamily="18" charset="0"/>
+                <a:cs typeface="Times New Roman" panose="02020603050405020304" pitchFamily="18" charset="0"/>
+              </a:rPr>
+              <a:t> for Superior </a:t>
+            </a:r>
+            <a:r>
+              <a:rPr lang="pt-BR" sz="1600" dirty="0" err="1">
+                <a:latin typeface="Times New Roman" panose="02020603050405020304" pitchFamily="18" charset="0"/>
+                <a:cs typeface="Times New Roman" panose="02020603050405020304" pitchFamily="18" charset="0"/>
+              </a:rPr>
+              <a:t>Results</a:t>
+            </a:r>
+            <a:r>
+              <a:rPr lang="pt-BR" sz="1600" dirty="0">
+                <a:latin typeface="Times New Roman" panose="02020603050405020304" pitchFamily="18" charset="0"/>
+                <a:cs typeface="Times New Roman" panose="02020603050405020304" pitchFamily="18" charset="0"/>
+              </a:rPr>
+              <a:t>. Boston: Harvard Business </a:t>
+            </a:r>
+            <a:r>
+              <a:rPr lang="pt-BR" sz="1600" dirty="0" err="1">
+                <a:latin typeface="Times New Roman" panose="02020603050405020304" pitchFamily="18" charset="0"/>
+                <a:cs typeface="Times New Roman" panose="02020603050405020304" pitchFamily="18" charset="0"/>
+              </a:rPr>
+              <a:t>School</a:t>
+            </a:r>
+            <a:r>
+              <a:rPr lang="pt-BR" sz="1600" dirty="0">
+                <a:latin typeface="Times New Roman" panose="02020603050405020304" pitchFamily="18" charset="0"/>
+                <a:cs typeface="Times New Roman" panose="02020603050405020304" pitchFamily="18" charset="0"/>
+              </a:rPr>
+              <a:t> Press, 2004.</a:t>
+            </a:r>
+          </a:p>
+          <a:p>
+            <a:pPr marL="0" indent="0">
+              <a:buNone/>
+            </a:pPr>
+            <a:endParaRPr lang="pt-BR" sz="1600" b="1" dirty="0">
+              <a:latin typeface="Times New Roman" panose="02020603050405020304" pitchFamily="18" charset="0"/>
+              <a:cs typeface="Times New Roman" panose="02020603050405020304" pitchFamily="18" charset="0"/>
+            </a:endParaRPr>
+          </a:p>
+          <a:p>
+            <a:pPr marL="0" indent="0">
+              <a:buNone/>
+            </a:pPr>
+            <a:r>
+              <a:rPr lang="pt-BR" sz="1600" dirty="0">
+                <a:latin typeface="Times New Roman" panose="02020603050405020304" pitchFamily="18" charset="0"/>
+                <a:cs typeface="Times New Roman" panose="02020603050405020304" pitchFamily="18" charset="0"/>
+              </a:rPr>
+              <a:t>[4] </a:t>
+            </a:r>
+            <a:r>
+              <a:rPr lang="pt-BR" sz="1600" b="1" dirty="0">
+                <a:latin typeface="Times New Roman" panose="02020603050405020304" pitchFamily="18" charset="0"/>
+                <a:cs typeface="Times New Roman" panose="02020603050405020304" pitchFamily="18" charset="0"/>
+              </a:rPr>
+              <a:t>ASSOCIAÇÃO BRASILEIRA DE NORMAS TÉCNICAS. NBR ISO/IEC 38500: </a:t>
+            </a:r>
+          </a:p>
+          <a:p>
+            <a:pPr marL="0" indent="0">
+              <a:buNone/>
+            </a:pPr>
+            <a:r>
+              <a:rPr lang="pt-BR" sz="1600" dirty="0">
+                <a:latin typeface="Times New Roman" panose="02020603050405020304" pitchFamily="18" charset="0"/>
+                <a:cs typeface="Times New Roman" panose="02020603050405020304" pitchFamily="18" charset="0"/>
+              </a:rPr>
+              <a:t>Governança Corporativa de TI. Rio de Janeiro: ABNT, 2009.</a:t>
+            </a:r>
+          </a:p>
+        </p:txBody>
+      </p:sp>
+    </p:spTree>
+    <p:extLst>
+      <p:ext uri="{BB962C8B-B14F-4D97-AF65-F5344CB8AC3E}">
+        <p14:creationId xmlns:p14="http://schemas.microsoft.com/office/powerpoint/2010/main" val="1115311843"/>
+      </p:ext>
+    </p:extLst>
+  </p:cSld>
+  <p:clrMapOvr>
+    <a:masterClrMapping/>
+  </p:clrMapOvr>
+  <p:transition spd="med"/>
+</p:sld>
+</file>
+
+<file path=ppt/slides/slide15.xml><?xml version="1.0" encoding="utf-8"?>
+<p:sld xmlns:a="http://schemas.openxmlformats.org/drawingml/2006/main" xmlns:r="http://schemas.openxmlformats.org/officeDocument/2006/relationships" xmlns:p="http://schemas.openxmlformats.org/presentationml/2006/main">
+  <p:cSld>
+    <p:spTree>
+      <p:nvGrpSpPr>
+        <p:cNvPr id="1" name=""/>
+        <p:cNvGrpSpPr/>
+        <p:nvPr/>
+      </p:nvGrpSpPr>
+      <p:grpSpPr>
+        <a:xfrm>
+          <a:off x="0" y="0"/>
+          <a:ext cx="0" cy="0"/>
+          <a:chOff x="0" y="0"/>
+          <a:chExt cx="0" cy="0"/>
+        </a:xfrm>
+      </p:grpSpPr>
+      <p:pic>
+        <p:nvPicPr>
+          <p:cNvPr id="112" name="Picture 6" descr="Picture 6"/>
+          <p:cNvPicPr>
+            <a:picLocks noChangeAspect="1"/>
+          </p:cNvPicPr>
+          <p:nvPr/>
+        </p:nvPicPr>
+        <p:blipFill>
+          <a:blip r:embed="rId2"/>
+          <a:stretch>
+            <a:fillRect/>
+          </a:stretch>
+        </p:blipFill>
+        <p:spPr>
+          <a:xfrm>
+            <a:off x="0" y="0"/>
+            <a:ext cx="9144000" cy="5143500"/>
+          </a:xfrm>
+          <a:prstGeom prst="rect">
+            <a:avLst/>
+          </a:prstGeom>
+          <a:ln w="12700">
+            <a:miter lim="400000"/>
+            <a:headEnd/>
+            <a:tailEnd/>
+          </a:ln>
+        </p:spPr>
+      </p:pic>
+      <p:pic>
+        <p:nvPicPr>
+          <p:cNvPr id="114" name="Picture 5" descr="Picture 5"/>
+          <p:cNvPicPr>
+            <a:picLocks noChangeAspect="1"/>
+          </p:cNvPicPr>
+          <p:nvPr/>
+        </p:nvPicPr>
+        <p:blipFill>
+          <a:blip r:embed="rId3"/>
+          <a:stretch>
+            <a:fillRect/>
+          </a:stretch>
+        </p:blipFill>
+        <p:spPr>
+          <a:xfrm>
+            <a:off x="469900" y="0"/>
+            <a:ext cx="4391984" cy="171450"/>
+          </a:xfrm>
+          <a:prstGeom prst="rect">
+            <a:avLst/>
+          </a:prstGeom>
+          <a:ln w="12700">
+            <a:miter lim="400000"/>
+            <a:headEnd/>
+            <a:tailEnd/>
+          </a:ln>
+        </p:spPr>
+      </p:pic>
+      <p:sp>
+        <p:nvSpPr>
+          <p:cNvPr id="3" name="Título 2"/>
+          <p:cNvSpPr>
+            <a:spLocks noGrp="1"/>
+          </p:cNvSpPr>
+          <p:nvPr>
+            <p:ph type="title"/>
+          </p:nvPr>
+        </p:nvSpPr>
+        <p:spPr>
+          <a:xfrm>
+            <a:off x="285751" y="2386770"/>
+            <a:ext cx="8615364" cy="1102519"/>
+          </a:xfrm>
+        </p:spPr>
+        <p:txBody>
+          <a:bodyPr>
+            <a:noAutofit/>
+          </a:bodyPr>
+          <a:lstStyle/>
+          <a:p>
+            <a:r>
+              <a:rPr lang="pt-BR" sz="4800" b="1" dirty="0">
+                <a:solidFill>
+                  <a:schemeClr val="bg1"/>
+                </a:solidFill>
+              </a:rPr>
+              <a:t>GESTÃO DE INFORMAÇÃO</a:t>
+            </a:r>
+          </a:p>
+        </p:txBody>
+      </p:sp>
+      <p:sp>
+        <p:nvSpPr>
+          <p:cNvPr id="6" name="Título 2"/>
+          <p:cNvSpPr txBox="1"/>
+          <p:nvPr/>
+        </p:nvSpPr>
+        <p:spPr>
+          <a:xfrm>
+            <a:off x="975683" y="3866663"/>
+            <a:ext cx="7772400" cy="1102519"/>
+          </a:xfrm>
+          <a:prstGeom prst="rect">
+            <a:avLst/>
+          </a:prstGeom>
+          <a:ln w="12700">
+            <a:miter lim="400000"/>
+          </a:ln>
+        </p:spPr>
+        <p:txBody>
+          <a:bodyPr lIns="45718" tIns="45718" rIns="45718" bIns="45718" anchor="ctr">
+            <a:noAutofit/>
+          </a:bodyPr>
+          <a:lstStyle>
+            <a:lvl1pPr marL="0" marR="0" indent="0" algn="ctr" defTabSz="457200" rtl="0" latinLnBrk="0">
+              <a:lnSpc>
+                <a:spcPct val="100000"/>
+              </a:lnSpc>
+              <a:spcBef>
+                <a:spcPts val="0"/>
+              </a:spcBef>
+              <a:spcAft>
+                <a:spcPts val="0"/>
+              </a:spcAft>
+              <a:buClrTx/>
+              <a:buSzTx/>
+              <a:buFontTx/>
+              <a:buNone/>
+              <a:defRPr sz="4400" b="0" i="0" u="none" strike="noStrike" cap="none" spc="0" baseline="0">
+                <a:ln>
+                  <a:noFill/>
+                </a:ln>
+                <a:solidFill>
+                  <a:srgbClr val="000000"/>
+                </a:solidFill>
+                <a:uFillTx/>
+                <a:latin typeface="+mj-lt"/>
+                <a:ea typeface="+mj-ea"/>
+                <a:cs typeface="+mj-cs"/>
+                <a:sym typeface="Calibri"/>
+              </a:defRPr>
+            </a:lvl1pPr>
+            <a:lvl2pPr marL="0" marR="0" indent="0" algn="ctr" defTabSz="457200" rtl="0" latinLnBrk="0">
+              <a:lnSpc>
+                <a:spcPct val="100000"/>
+              </a:lnSpc>
+              <a:spcBef>
+                <a:spcPts val="0"/>
+              </a:spcBef>
+              <a:spcAft>
+                <a:spcPts val="0"/>
+              </a:spcAft>
+              <a:buClrTx/>
+              <a:buSzTx/>
+              <a:buFontTx/>
+              <a:buNone/>
+              <a:defRPr sz="4400" b="0" i="0" u="none" strike="noStrike" cap="none" spc="0" baseline="0">
+                <a:ln>
+                  <a:noFill/>
+                </a:ln>
+                <a:solidFill>
+                  <a:srgbClr val="000000"/>
+                </a:solidFill>
+                <a:uFillTx/>
+                <a:latin typeface="+mj-lt"/>
+                <a:ea typeface="+mj-ea"/>
+                <a:cs typeface="+mj-cs"/>
+                <a:sym typeface="Calibri"/>
+              </a:defRPr>
+            </a:lvl2pPr>
+            <a:lvl3pPr marL="0" marR="0" indent="0" algn="ctr" defTabSz="457200" rtl="0" latinLnBrk="0">
+              <a:lnSpc>
+                <a:spcPct val="100000"/>
+              </a:lnSpc>
+              <a:spcBef>
+                <a:spcPts val="0"/>
+              </a:spcBef>
+              <a:spcAft>
+                <a:spcPts val="0"/>
+              </a:spcAft>
+              <a:buClrTx/>
+              <a:buSzTx/>
+              <a:buFontTx/>
+              <a:buNone/>
+              <a:defRPr sz="4400" b="0" i="0" u="none" strike="noStrike" cap="none" spc="0" baseline="0">
+                <a:ln>
+                  <a:noFill/>
+                </a:ln>
+                <a:solidFill>
+                  <a:srgbClr val="000000"/>
+                </a:solidFill>
+                <a:uFillTx/>
+                <a:latin typeface="+mj-lt"/>
+                <a:ea typeface="+mj-ea"/>
+                <a:cs typeface="+mj-cs"/>
+                <a:sym typeface="Calibri"/>
+              </a:defRPr>
+            </a:lvl3pPr>
+            <a:lvl4pPr marL="0" marR="0" indent="0" algn="ctr" defTabSz="457200" rtl="0" latinLnBrk="0">
+              <a:lnSpc>
+                <a:spcPct val="100000"/>
+              </a:lnSpc>
+              <a:spcBef>
+                <a:spcPts val="0"/>
+              </a:spcBef>
+              <a:spcAft>
+                <a:spcPts val="0"/>
+              </a:spcAft>
+              <a:buClrTx/>
+              <a:buSzTx/>
+              <a:buFontTx/>
+              <a:buNone/>
+              <a:defRPr sz="4400" b="0" i="0" u="none" strike="noStrike" cap="none" spc="0" baseline="0">
+                <a:ln>
+                  <a:noFill/>
+                </a:ln>
+                <a:solidFill>
+                  <a:srgbClr val="000000"/>
+                </a:solidFill>
+                <a:uFillTx/>
+                <a:latin typeface="+mj-lt"/>
+                <a:ea typeface="+mj-ea"/>
+                <a:cs typeface="+mj-cs"/>
+                <a:sym typeface="Calibri"/>
+              </a:defRPr>
+            </a:lvl4pPr>
+            <a:lvl5pPr marL="0" marR="0" indent="0" algn="ctr" defTabSz="457200" rtl="0" latinLnBrk="0">
+              <a:lnSpc>
+                <a:spcPct val="100000"/>
+              </a:lnSpc>
+              <a:spcBef>
+                <a:spcPts val="0"/>
+              </a:spcBef>
+              <a:spcAft>
+                <a:spcPts val="0"/>
+              </a:spcAft>
+              <a:buClrTx/>
+              <a:buSzTx/>
+              <a:buFontTx/>
+              <a:buNone/>
+              <a:defRPr sz="4400" b="0" i="0" u="none" strike="noStrike" cap="none" spc="0" baseline="0">
+                <a:ln>
+                  <a:noFill/>
+                </a:ln>
+                <a:solidFill>
+                  <a:srgbClr val="000000"/>
+                </a:solidFill>
+                <a:uFillTx/>
+                <a:latin typeface="+mj-lt"/>
+                <a:ea typeface="+mj-ea"/>
+                <a:cs typeface="+mj-cs"/>
+                <a:sym typeface="Calibri"/>
+              </a:defRPr>
+            </a:lvl5pPr>
+            <a:lvl6pPr marL="0" marR="0" indent="0" algn="ctr" defTabSz="457200" rtl="0" latinLnBrk="0">
+              <a:lnSpc>
+                <a:spcPct val="100000"/>
+              </a:lnSpc>
+              <a:spcBef>
+                <a:spcPts val="0"/>
+              </a:spcBef>
+              <a:spcAft>
+                <a:spcPts val="0"/>
+              </a:spcAft>
+              <a:buClrTx/>
+              <a:buSzTx/>
+              <a:buFontTx/>
+              <a:buNone/>
+              <a:defRPr sz="4400" b="0" i="0" u="none" strike="noStrike" cap="none" spc="0" baseline="0">
+                <a:ln>
+                  <a:noFill/>
+                </a:ln>
+                <a:solidFill>
+                  <a:srgbClr val="000000"/>
+                </a:solidFill>
+                <a:uFillTx/>
+                <a:latin typeface="+mj-lt"/>
+                <a:ea typeface="+mj-ea"/>
+                <a:cs typeface="+mj-cs"/>
+                <a:sym typeface="Calibri"/>
+              </a:defRPr>
+            </a:lvl6pPr>
+            <a:lvl7pPr marL="0" marR="0" indent="0" algn="ctr" defTabSz="457200" rtl="0" latinLnBrk="0">
+              <a:lnSpc>
+                <a:spcPct val="100000"/>
+              </a:lnSpc>
+              <a:spcBef>
+                <a:spcPts val="0"/>
+              </a:spcBef>
+              <a:spcAft>
+                <a:spcPts val="0"/>
+              </a:spcAft>
+              <a:buClrTx/>
+              <a:buSzTx/>
+              <a:buFontTx/>
+              <a:buNone/>
+              <a:defRPr sz="4400" b="0" i="0" u="none" strike="noStrike" cap="none" spc="0" baseline="0">
+                <a:ln>
+                  <a:noFill/>
+                </a:ln>
+                <a:solidFill>
+                  <a:srgbClr val="000000"/>
+                </a:solidFill>
+                <a:uFillTx/>
+                <a:latin typeface="+mj-lt"/>
+                <a:ea typeface="+mj-ea"/>
+                <a:cs typeface="+mj-cs"/>
+                <a:sym typeface="Calibri"/>
+              </a:defRPr>
+            </a:lvl7pPr>
+            <a:lvl8pPr marL="0" marR="0" indent="0" algn="ctr" defTabSz="457200" rtl="0" latinLnBrk="0">
+              <a:lnSpc>
+                <a:spcPct val="100000"/>
+              </a:lnSpc>
+              <a:spcBef>
+                <a:spcPts val="0"/>
+              </a:spcBef>
+              <a:spcAft>
+                <a:spcPts val="0"/>
+              </a:spcAft>
+              <a:buClrTx/>
+              <a:buSzTx/>
+              <a:buFontTx/>
+              <a:buNone/>
+              <a:defRPr sz="4400" b="0" i="0" u="none" strike="noStrike" cap="none" spc="0" baseline="0">
+                <a:ln>
+                  <a:noFill/>
+                </a:ln>
+                <a:solidFill>
+                  <a:srgbClr val="000000"/>
+                </a:solidFill>
+                <a:uFillTx/>
+                <a:latin typeface="+mj-lt"/>
+                <a:ea typeface="+mj-ea"/>
+                <a:cs typeface="+mj-cs"/>
+                <a:sym typeface="Calibri"/>
+              </a:defRPr>
+            </a:lvl8pPr>
+            <a:lvl9pPr marL="0" marR="0" indent="0" algn="ctr" defTabSz="457200" rtl="0" latinLnBrk="0">
+              <a:lnSpc>
+                <a:spcPct val="100000"/>
+              </a:lnSpc>
+              <a:spcBef>
+                <a:spcPts val="0"/>
+              </a:spcBef>
+              <a:spcAft>
+                <a:spcPts val="0"/>
+              </a:spcAft>
+              <a:buClrTx/>
+              <a:buSzTx/>
+              <a:buFontTx/>
+              <a:buNone/>
+              <a:defRPr sz="4400" b="0" i="0" u="none" strike="noStrike" cap="none" spc="0" baseline="0">
+                <a:ln>
+                  <a:noFill/>
+                </a:ln>
+                <a:solidFill>
+                  <a:srgbClr val="000000"/>
+                </a:solidFill>
+                <a:uFillTx/>
+                <a:latin typeface="+mj-lt"/>
+                <a:ea typeface="+mj-ea"/>
+                <a:cs typeface="+mj-cs"/>
+                <a:sym typeface="Calibri"/>
+              </a:defRPr>
+            </a:lvl9pPr>
+          </a:lstStyle>
+          <a:p>
+            <a:pPr algn="r" hangingPunct="1"/>
+            <a:r>
+              <a:rPr lang="pt-BR" sz="2000" b="1" dirty="0">
+                <a:solidFill>
+                  <a:schemeClr val="bg1"/>
+                </a:solidFill>
+              </a:rPr>
+              <a:t>Professor </a:t>
+            </a:r>
+            <a:r>
+              <a:rPr lang="pt-BR" sz="2000" b="1">
+                <a:solidFill>
+                  <a:schemeClr val="bg1"/>
+                </a:solidFill>
+              </a:rPr>
+              <a:t>M.Sc</a:t>
+            </a:r>
+            <a:r>
+              <a:rPr lang="pt-BR" sz="2000" b="1" dirty="0">
+                <a:solidFill>
+                  <a:schemeClr val="bg1"/>
+                </a:solidFill>
+              </a:rPr>
+              <a:t>. Heleno Cardoso</a:t>
+            </a:r>
+          </a:p>
+        </p:txBody>
+      </p:sp>
+      <p:pic>
+        <p:nvPicPr>
+          <p:cNvPr id="2" name="Google Shape;62;p1" descr="Imagem">
+            <a:extLst>
+              <a:ext uri="{FF2B5EF4-FFF2-40B4-BE49-F238E27FC236}">
+                <a16:creationId xmlns:a16="http://schemas.microsoft.com/office/drawing/2014/main" id="{9C895622-2963-024D-634E-EA58F5381D06}"/>
+              </a:ext>
+            </a:extLst>
+          </p:cNvPr>
+          <p:cNvPicPr preferRelativeResize="0"/>
+          <p:nvPr/>
+        </p:nvPicPr>
+        <p:blipFill rotWithShape="1">
+          <a:blip r:embed="rId4">
+            <a:alphaModFix/>
+          </a:blip>
+          <a:srcRect/>
+          <a:stretch/>
+        </p:blipFill>
+        <p:spPr>
+          <a:xfrm>
+            <a:off x="469898" y="343798"/>
+            <a:ext cx="2858518" cy="1338697"/>
+          </a:xfrm>
+          <a:prstGeom prst="rect">
+            <a:avLst/>
+          </a:prstGeom>
+          <a:noFill/>
+          <a:ln>
+            <a:noFill/>
+          </a:ln>
+        </p:spPr>
+      </p:pic>
+    </p:spTree>
+  </p:cSld>
+  <p:clrMapOvr>
+    <a:masterClrMapping/>
+  </p:clrMapOvr>
+  <p:transition spd="med"/>
+</p:sld>
+</file>
+
 <file path=ppt/slides/slide2.xml><?xml version="1.0" encoding="utf-8"?>
 <p:sld xmlns:a="http://schemas.openxmlformats.org/drawingml/2006/main" xmlns:r="http://schemas.openxmlformats.org/officeDocument/2006/relationships" xmlns:p="http://schemas.openxmlformats.org/presentationml/2006/main">
   <p:cSld>
@@ -4405,105 +6761,42 @@
           </a:bodyPr>
           <a:lstStyle/>
           <a:p>
-            <a:r>
-              <a:rPr lang="pt-BR" sz="2400" dirty="0">
-                <a:latin typeface="Times New Roman" panose="02020603050405020304" pitchFamily="18" charset="0"/>
-                <a:cs typeface="Times New Roman" panose="02020603050405020304" pitchFamily="18" charset="0"/>
-              </a:rPr>
-              <a:t>Compreender o conceito de BI nas organizações</a:t>
-            </a:r>
-          </a:p>
-          <a:p>
+            <a:pPr marL="0" indent="0" algn="just">
+              <a:buNone/>
+            </a:pPr>
             <a:endParaRPr lang="pt-BR" sz="2400" dirty="0">
               <a:latin typeface="Times New Roman" panose="02020603050405020304" pitchFamily="18" charset="0"/>
               <a:cs typeface="Times New Roman" panose="02020603050405020304" pitchFamily="18" charset="0"/>
             </a:endParaRPr>
           </a:p>
           <a:p>
-            <a:r>
-              <a:rPr lang="pt-BR" sz="2400" dirty="0">
-                <a:latin typeface="Times New Roman" panose="02020603050405020304" pitchFamily="18" charset="0"/>
-                <a:cs typeface="Times New Roman" panose="02020603050405020304" pitchFamily="18" charset="0"/>
-              </a:rPr>
-              <a:t>Relacionar BI com </a:t>
-            </a:r>
-            <a:r>
-              <a:rPr lang="pt-BR" sz="2400" b="1" dirty="0">
-                <a:solidFill>
-                  <a:srgbClr val="FF0000"/>
-                </a:solidFill>
-                <a:latin typeface="Times New Roman" panose="02020603050405020304" pitchFamily="18" charset="0"/>
-                <a:cs typeface="Times New Roman" panose="02020603050405020304" pitchFamily="18" charset="0"/>
-              </a:rPr>
-              <a:t>tomada de decisão gerencial</a:t>
-            </a:r>
-          </a:p>
-          <a:p>
+            <a:pPr marL="0" indent="0" algn="just">
+              <a:buNone/>
+            </a:pPr>
             <a:endParaRPr lang="pt-BR" sz="2400" dirty="0">
               <a:latin typeface="Times New Roman" panose="02020603050405020304" pitchFamily="18" charset="0"/>
               <a:cs typeface="Times New Roman" panose="02020603050405020304" pitchFamily="18" charset="0"/>
             </a:endParaRPr>
           </a:p>
           <a:p>
-            <a:r>
-              <a:rPr lang="pt-BR" sz="2400" dirty="0">
-                <a:latin typeface="Times New Roman" panose="02020603050405020304" pitchFamily="18" charset="0"/>
-                <a:cs typeface="Times New Roman" panose="02020603050405020304" pitchFamily="18" charset="0"/>
-              </a:rPr>
-              <a:t>Aplicar conceitos em situações reais</a:t>
-            </a:r>
-          </a:p>
-          <a:p>
+            <a:pPr marL="0" indent="0" algn="just">
+              <a:buNone/>
+            </a:pPr>
             <a:endParaRPr lang="pt-BR" sz="2400" dirty="0">
               <a:latin typeface="Times New Roman" panose="02020603050405020304" pitchFamily="18" charset="0"/>
               <a:cs typeface="Times New Roman" panose="02020603050405020304" pitchFamily="18" charset="0"/>
             </a:endParaRPr>
           </a:p>
           <a:p>
+            <a:pPr marL="0" indent="0" algn="just">
+              <a:buNone/>
+            </a:pPr>
             <a:r>
               <a:rPr lang="pt-BR" sz="2400" dirty="0">
                 <a:latin typeface="Times New Roman" panose="02020603050405020304" pitchFamily="18" charset="0"/>
                 <a:cs typeface="Times New Roman" panose="02020603050405020304" pitchFamily="18" charset="0"/>
               </a:rPr>
-              <a:t>Desenvolver visão </a:t>
-            </a:r>
-            <a:r>
-              <a:rPr lang="pt-BR" sz="2400" b="1" dirty="0">
-                <a:latin typeface="Times New Roman" panose="02020603050405020304" pitchFamily="18" charset="0"/>
-                <a:cs typeface="Times New Roman" panose="02020603050405020304" pitchFamily="18" charset="0"/>
-              </a:rPr>
-              <a:t>data-</a:t>
-            </a:r>
-            <a:r>
-              <a:rPr lang="pt-BR" sz="2400" b="1" dirty="0" err="1">
-                <a:latin typeface="Times New Roman" panose="02020603050405020304" pitchFamily="18" charset="0"/>
-                <a:cs typeface="Times New Roman" panose="02020603050405020304" pitchFamily="18" charset="0"/>
-              </a:rPr>
-              <a:t>driven</a:t>
-            </a:r>
-            <a:r>
-              <a:rPr lang="pt-BR" sz="2400" dirty="0">
-                <a:latin typeface="Times New Roman" panose="02020603050405020304" pitchFamily="18" charset="0"/>
-                <a:cs typeface="Times New Roman" panose="02020603050405020304" pitchFamily="18" charset="0"/>
-              </a:rPr>
-              <a:t> (</a:t>
-            </a:r>
-            <a:r>
-              <a:rPr lang="pt-BR" sz="2400" b="1" dirty="0">
-                <a:solidFill>
-                  <a:srgbClr val="FF0000"/>
-                </a:solidFill>
-                <a:latin typeface="Times New Roman" panose="02020603050405020304" pitchFamily="18" charset="0"/>
-                <a:cs typeface="Times New Roman" panose="02020603050405020304" pitchFamily="18" charset="0"/>
-              </a:rPr>
-              <a:t>orientada a dados</a:t>
-            </a:r>
-            <a:r>
-              <a:rPr lang="pt-BR" sz="2400" dirty="0">
-                <a:latin typeface="Times New Roman" panose="02020603050405020304" pitchFamily="18" charset="0"/>
-                <a:cs typeface="Times New Roman" panose="02020603050405020304" pitchFamily="18" charset="0"/>
-              </a:rPr>
-              <a:t>)</a:t>
+              <a:t>Compreender como a Governança de TI conecta estratégia organizacional e tecnologia, aplicando conceitos teóricos em cenários reais.</a:t>
             </a:r>
             <a:endParaRPr lang="pt-BR" sz="2400" dirty="0">
               <a:solidFill>
@@ -4530,6 +6823,1852 @@
 </file>
 
 <file path=ppt/slides/slide4.xml><?xml version="1.0" encoding="utf-8"?>
+<p:sld xmlns:a="http://schemas.openxmlformats.org/drawingml/2006/main" xmlns:r="http://schemas.openxmlformats.org/officeDocument/2006/relationships" xmlns:p="http://schemas.openxmlformats.org/presentationml/2006/main">
+  <p:cSld>
+    <p:spTree>
+      <p:nvGrpSpPr>
+        <p:cNvPr id="1" name="">
+          <a:extLst>
+            <a:ext uri="{FF2B5EF4-FFF2-40B4-BE49-F238E27FC236}">
+              <a16:creationId xmlns:a16="http://schemas.microsoft.com/office/drawing/2014/main" id="{401DB093-8CE1-0BD5-0FCD-58E372EEB5D0}"/>
+            </a:ext>
+          </a:extLst>
+        </p:cNvPr>
+        <p:cNvGrpSpPr/>
+        <p:nvPr/>
+      </p:nvGrpSpPr>
+      <p:grpSpPr>
+        <a:xfrm>
+          <a:off x="0" y="0"/>
+          <a:ext cx="0" cy="0"/>
+          <a:chOff x="0" y="0"/>
+          <a:chExt cx="0" cy="0"/>
+        </a:xfrm>
+      </p:grpSpPr>
+      <p:sp>
+        <p:nvSpPr>
+          <p:cNvPr id="6" name="Title 1">
+            <a:extLst>
+              <a:ext uri="{FF2B5EF4-FFF2-40B4-BE49-F238E27FC236}">
+                <a16:creationId xmlns:a16="http://schemas.microsoft.com/office/drawing/2014/main" id="{C536988F-7735-F2CA-C4BC-C9EB37E9F664}"/>
+              </a:ext>
+            </a:extLst>
+          </p:cNvPr>
+          <p:cNvSpPr>
+            <a:spLocks noGrp="1"/>
+          </p:cNvSpPr>
+          <p:nvPr>
+            <p:ph type="title"/>
+          </p:nvPr>
+        </p:nvSpPr>
+        <p:spPr>
+          <a:xfrm>
+            <a:off x="457200" y="205980"/>
+            <a:ext cx="8229600" cy="857251"/>
+          </a:xfrm>
+        </p:spPr>
+        <p:txBody>
+          <a:bodyPr>
+            <a:normAutofit/>
+          </a:bodyPr>
+          <a:lstStyle/>
+          <a:p>
+            <a:r>
+              <a:rPr lang="en-US" b="1" dirty="0" err="1">
+                <a:solidFill>
+                  <a:srgbClr val="0070C0"/>
+                </a:solidFill>
+              </a:rPr>
+              <a:t>Conceito</a:t>
+            </a:r>
+            <a:r>
+              <a:rPr lang="en-US" b="1" dirty="0">
+                <a:solidFill>
+                  <a:srgbClr val="0070C0"/>
+                </a:solidFill>
+              </a:rPr>
+              <a:t> de </a:t>
+            </a:r>
+            <a:r>
+              <a:rPr lang="en-US" b="1" dirty="0" err="1">
+                <a:solidFill>
+                  <a:srgbClr val="0070C0"/>
+                </a:solidFill>
+              </a:rPr>
+              <a:t>Governança</a:t>
+            </a:r>
+            <a:r>
+              <a:rPr lang="en-US" b="1" dirty="0">
+                <a:solidFill>
+                  <a:srgbClr val="0070C0"/>
+                </a:solidFill>
+              </a:rPr>
+              <a:t> de TI</a:t>
+            </a:r>
+          </a:p>
+        </p:txBody>
+      </p:sp>
+      <p:sp>
+        <p:nvSpPr>
+          <p:cNvPr id="8" name="Text Placeholder 2">
+            <a:extLst>
+              <a:ext uri="{FF2B5EF4-FFF2-40B4-BE49-F238E27FC236}">
+                <a16:creationId xmlns:a16="http://schemas.microsoft.com/office/drawing/2014/main" id="{36A8EB18-C719-730F-0DF7-99E2326FBFAC}"/>
+              </a:ext>
+            </a:extLst>
+          </p:cNvPr>
+          <p:cNvSpPr>
+            <a:spLocks noGrp="1"/>
+          </p:cNvSpPr>
+          <p:nvPr>
+            <p:ph type="body" sz="half" idx="1"/>
+          </p:nvPr>
+        </p:nvSpPr>
+        <p:spPr>
+          <a:xfrm>
+            <a:off x="142865" y="1035050"/>
+            <a:ext cx="8865056" cy="3994150"/>
+          </a:xfrm>
+        </p:spPr>
+        <p:txBody>
+          <a:bodyPr>
+            <a:noAutofit/>
+          </a:bodyPr>
+          <a:lstStyle/>
+          <a:p>
+            <a:pPr algn="just"/>
+            <a:r>
+              <a:rPr lang="pt-BR" sz="2000" dirty="0">
+                <a:latin typeface="Times New Roman" panose="02020603050405020304" pitchFamily="18" charset="0"/>
+                <a:cs typeface="Times New Roman" panose="02020603050405020304" pitchFamily="18" charset="0"/>
+              </a:rPr>
+              <a:t>Conjunto de práticas que </a:t>
+            </a:r>
+            <a:r>
+              <a:rPr lang="pt-BR" sz="2000" b="1" dirty="0">
+                <a:latin typeface="Times New Roman" panose="02020603050405020304" pitchFamily="18" charset="0"/>
+                <a:cs typeface="Times New Roman" panose="02020603050405020304" pitchFamily="18" charset="0"/>
+              </a:rPr>
+              <a:t>garantem alinhamento entre TI e negócio</a:t>
+            </a:r>
+            <a:r>
+              <a:rPr lang="pt-BR" sz="2000" dirty="0">
+                <a:latin typeface="Times New Roman" panose="02020603050405020304" pitchFamily="18" charset="0"/>
+                <a:cs typeface="Times New Roman" panose="02020603050405020304" pitchFamily="18" charset="0"/>
+              </a:rPr>
+              <a:t>.</a:t>
+            </a:r>
+          </a:p>
+          <a:p>
+            <a:pPr algn="just"/>
+            <a:r>
+              <a:rPr lang="pt-BR" sz="2000" b="1" dirty="0">
+                <a:solidFill>
+                  <a:srgbClr val="FF0000"/>
+                </a:solidFill>
+                <a:latin typeface="Times New Roman" panose="02020603050405020304" pitchFamily="18" charset="0"/>
+                <a:cs typeface="Times New Roman" panose="02020603050405020304" pitchFamily="18" charset="0"/>
+              </a:rPr>
+              <a:t>Foco em</a:t>
+            </a:r>
+            <a:endParaRPr lang="pt-BR" sz="2000" dirty="0">
+              <a:latin typeface="Times New Roman" panose="02020603050405020304" pitchFamily="18" charset="0"/>
+              <a:cs typeface="Times New Roman" panose="02020603050405020304" pitchFamily="18" charset="0"/>
+            </a:endParaRPr>
+          </a:p>
+          <a:p>
+            <a:pPr lvl="1" algn="just">
+              <a:buFont typeface="Wingdings" panose="05000000000000000000" pitchFamily="2" charset="2"/>
+              <a:buChar char="§"/>
+            </a:pPr>
+            <a:r>
+              <a:rPr lang="pt-BR" sz="2000" dirty="0">
+                <a:latin typeface="Times New Roman" panose="02020603050405020304" pitchFamily="18" charset="0"/>
+                <a:cs typeface="Times New Roman" panose="02020603050405020304" pitchFamily="18" charset="0"/>
+              </a:rPr>
+              <a:t>Geração de valor</a:t>
+            </a:r>
+          </a:p>
+          <a:p>
+            <a:pPr lvl="1" algn="just">
+              <a:buFont typeface="Wingdings" panose="05000000000000000000" pitchFamily="2" charset="2"/>
+              <a:buChar char="§"/>
+            </a:pPr>
+            <a:r>
+              <a:rPr lang="pt-BR" sz="2000" dirty="0">
+                <a:latin typeface="Times New Roman" panose="02020603050405020304" pitchFamily="18" charset="0"/>
+                <a:cs typeface="Times New Roman" panose="02020603050405020304" pitchFamily="18" charset="0"/>
+              </a:rPr>
+              <a:t>Gestão de riscos</a:t>
+            </a:r>
+          </a:p>
+          <a:p>
+            <a:pPr lvl="1" algn="just">
+              <a:buFont typeface="Wingdings" panose="05000000000000000000" pitchFamily="2" charset="2"/>
+              <a:buChar char="§"/>
+            </a:pPr>
+            <a:r>
+              <a:rPr lang="pt-BR" sz="2000" dirty="0">
+                <a:latin typeface="Times New Roman" panose="02020603050405020304" pitchFamily="18" charset="0"/>
+                <a:cs typeface="Times New Roman" panose="02020603050405020304" pitchFamily="18" charset="0"/>
+              </a:rPr>
+              <a:t>Uso eficiente de recursos</a:t>
+            </a:r>
+          </a:p>
+          <a:p>
+            <a:pPr algn="just"/>
+            <a:r>
+              <a:rPr lang="pt-BR" sz="2000" dirty="0">
+                <a:latin typeface="Times New Roman" panose="02020603050405020304" pitchFamily="18" charset="0"/>
+                <a:cs typeface="Times New Roman" panose="02020603050405020304" pitchFamily="18" charset="0"/>
+              </a:rPr>
+              <a:t>Envolve decisões estratégicas sobre tecnologia</a:t>
+            </a:r>
+          </a:p>
+          <a:p>
+            <a:pPr marL="0" indent="0" algn="just">
+              <a:buNone/>
+            </a:pPr>
+            <a:endParaRPr lang="pt-BR" sz="2000" dirty="0">
+              <a:latin typeface="Times New Roman" panose="02020603050405020304" pitchFamily="18" charset="0"/>
+              <a:cs typeface="Times New Roman" panose="02020603050405020304" pitchFamily="18" charset="0"/>
+            </a:endParaRPr>
+          </a:p>
+          <a:p>
+            <a:pPr marL="0" indent="0" algn="just">
+              <a:buNone/>
+            </a:pPr>
+            <a:r>
+              <a:rPr lang="pt-BR" sz="2000" b="1" dirty="0">
+                <a:solidFill>
+                  <a:srgbClr val="FF0000"/>
+                </a:solidFill>
+                <a:latin typeface="Times New Roman" panose="02020603050405020304" pitchFamily="18" charset="0"/>
+                <a:cs typeface="Times New Roman" panose="02020603050405020304" pitchFamily="18" charset="0"/>
+              </a:rPr>
+              <a:t>Na prática</a:t>
+            </a:r>
+            <a:endParaRPr lang="pt-BR" sz="2000" dirty="0">
+              <a:solidFill>
+                <a:srgbClr val="FF0000"/>
+              </a:solidFill>
+              <a:latin typeface="Times New Roman" panose="02020603050405020304" pitchFamily="18" charset="0"/>
+              <a:cs typeface="Times New Roman" panose="02020603050405020304" pitchFamily="18" charset="0"/>
+            </a:endParaRPr>
+          </a:p>
+          <a:p>
+            <a:pPr marL="0" indent="0" algn="just">
+              <a:buNone/>
+            </a:pPr>
+            <a:r>
+              <a:rPr lang="pt-BR" sz="2000" dirty="0">
+                <a:latin typeface="Times New Roman" panose="02020603050405020304" pitchFamily="18" charset="0"/>
+                <a:cs typeface="Times New Roman" panose="02020603050405020304" pitchFamily="18" charset="0"/>
+              </a:rPr>
+              <a:t>	Empresas utilizam Governança de TI para decidir investimentos, priorizar projetos e controlar riscos digitais.</a:t>
+            </a:r>
+            <a:endParaRPr lang="pt-BR" sz="2000" dirty="0">
+              <a:solidFill>
+                <a:schemeClr val="tx1"/>
+              </a:solidFill>
+              <a:latin typeface="Times New Roman" panose="02020603050405020304" pitchFamily="18" charset="0"/>
+              <a:cs typeface="Times New Roman" panose="02020603050405020304" pitchFamily="18" charset="0"/>
+            </a:endParaRPr>
+          </a:p>
+        </p:txBody>
+      </p:sp>
+    </p:spTree>
+    <p:extLst>
+      <p:ext uri="{BB962C8B-B14F-4D97-AF65-F5344CB8AC3E}">
+        <p14:creationId xmlns:p14="http://schemas.microsoft.com/office/powerpoint/2010/main" val="130687583"/>
+      </p:ext>
+    </p:extLst>
+  </p:cSld>
+  <p:clrMapOvr>
+    <a:masterClrMapping/>
+  </p:clrMapOvr>
+  <p:transition spd="med"/>
+</p:sld>
+</file>
+
+<file path=ppt/slides/slide5.xml><?xml version="1.0" encoding="utf-8"?>
+<p:sld xmlns:a="http://schemas.openxmlformats.org/drawingml/2006/main" xmlns:r="http://schemas.openxmlformats.org/officeDocument/2006/relationships" xmlns:p="http://schemas.openxmlformats.org/presentationml/2006/main">
+  <p:cSld>
+    <p:spTree>
+      <p:nvGrpSpPr>
+        <p:cNvPr id="1" name="">
+          <a:extLst>
+            <a:ext uri="{FF2B5EF4-FFF2-40B4-BE49-F238E27FC236}">
+              <a16:creationId xmlns:a16="http://schemas.microsoft.com/office/drawing/2014/main" id="{34D1295A-B5FD-6FA8-576D-33A30D08F376}"/>
+            </a:ext>
+          </a:extLst>
+        </p:cNvPr>
+        <p:cNvGrpSpPr/>
+        <p:nvPr/>
+      </p:nvGrpSpPr>
+      <p:grpSpPr>
+        <a:xfrm>
+          <a:off x="0" y="0"/>
+          <a:ext cx="0" cy="0"/>
+          <a:chOff x="0" y="0"/>
+          <a:chExt cx="0" cy="0"/>
+        </a:xfrm>
+      </p:grpSpPr>
+      <p:sp>
+        <p:nvSpPr>
+          <p:cNvPr id="6" name="Title 1">
+            <a:extLst>
+              <a:ext uri="{FF2B5EF4-FFF2-40B4-BE49-F238E27FC236}">
+                <a16:creationId xmlns:a16="http://schemas.microsoft.com/office/drawing/2014/main" id="{F820956E-6311-B90E-6F95-93D4CCEECBDD}"/>
+              </a:ext>
+            </a:extLst>
+          </p:cNvPr>
+          <p:cNvSpPr>
+            <a:spLocks noGrp="1"/>
+          </p:cNvSpPr>
+          <p:nvPr>
+            <p:ph type="title"/>
+          </p:nvPr>
+        </p:nvSpPr>
+        <p:spPr>
+          <a:xfrm>
+            <a:off x="457200" y="205980"/>
+            <a:ext cx="8229600" cy="857251"/>
+          </a:xfrm>
+        </p:spPr>
+        <p:txBody>
+          <a:bodyPr>
+            <a:normAutofit/>
+          </a:bodyPr>
+          <a:lstStyle/>
+          <a:p>
+            <a:r>
+              <a:rPr lang="en-US" b="1" dirty="0" err="1">
+                <a:solidFill>
+                  <a:srgbClr val="0070C0"/>
+                </a:solidFill>
+              </a:rPr>
+              <a:t>Governança</a:t>
+            </a:r>
+            <a:r>
+              <a:rPr lang="en-US" b="1" dirty="0">
+                <a:solidFill>
+                  <a:srgbClr val="0070C0"/>
+                </a:solidFill>
+              </a:rPr>
+              <a:t> vs </a:t>
+            </a:r>
+            <a:r>
+              <a:rPr lang="en-US" b="1" dirty="0" err="1">
+                <a:solidFill>
+                  <a:srgbClr val="0070C0"/>
+                </a:solidFill>
+              </a:rPr>
+              <a:t>Gestão</a:t>
+            </a:r>
+            <a:r>
+              <a:rPr lang="en-US" b="1" dirty="0">
+                <a:solidFill>
+                  <a:srgbClr val="0070C0"/>
+                </a:solidFill>
+              </a:rPr>
+              <a:t> de TI</a:t>
+            </a:r>
+          </a:p>
+        </p:txBody>
+      </p:sp>
+      <p:sp>
+        <p:nvSpPr>
+          <p:cNvPr id="8" name="Text Placeholder 2">
+            <a:extLst>
+              <a:ext uri="{FF2B5EF4-FFF2-40B4-BE49-F238E27FC236}">
+                <a16:creationId xmlns:a16="http://schemas.microsoft.com/office/drawing/2014/main" id="{7D87D7F3-524C-2AEE-BC17-E137FDC50ABA}"/>
+              </a:ext>
+            </a:extLst>
+          </p:cNvPr>
+          <p:cNvSpPr>
+            <a:spLocks noGrp="1"/>
+          </p:cNvSpPr>
+          <p:nvPr>
+            <p:ph type="body" sz="half" idx="1"/>
+          </p:nvPr>
+        </p:nvSpPr>
+        <p:spPr>
+          <a:xfrm>
+            <a:off x="142865" y="1035050"/>
+            <a:ext cx="8865056" cy="3994150"/>
+          </a:xfrm>
+        </p:spPr>
+        <p:txBody>
+          <a:bodyPr>
+            <a:noAutofit/>
+          </a:bodyPr>
+          <a:lstStyle/>
+          <a:p>
+            <a:pPr marL="0" indent="0" algn="just">
+              <a:buNone/>
+            </a:pPr>
+            <a:r>
+              <a:rPr lang="pt-BR" sz="2000" b="1" dirty="0">
+                <a:latin typeface="Times New Roman" panose="02020603050405020304" pitchFamily="18" charset="0"/>
+                <a:cs typeface="Times New Roman" panose="02020603050405020304" pitchFamily="18" charset="0"/>
+              </a:rPr>
+              <a:t>Governança de TI</a:t>
+            </a:r>
+          </a:p>
+          <a:p>
+            <a:pPr algn="just"/>
+            <a:r>
+              <a:rPr lang="pt-BR" sz="2000" dirty="0">
+                <a:latin typeface="Times New Roman" panose="02020603050405020304" pitchFamily="18" charset="0"/>
+                <a:cs typeface="Times New Roman" panose="02020603050405020304" pitchFamily="18" charset="0"/>
+              </a:rPr>
+              <a:t>Define direção e controle</a:t>
+            </a:r>
+          </a:p>
+          <a:p>
+            <a:pPr algn="just"/>
+            <a:r>
+              <a:rPr lang="pt-BR" sz="2000" dirty="0">
+                <a:latin typeface="Times New Roman" panose="02020603050405020304" pitchFamily="18" charset="0"/>
+                <a:cs typeface="Times New Roman" panose="02020603050405020304" pitchFamily="18" charset="0"/>
+              </a:rPr>
+              <a:t>Foco estratégico</a:t>
+            </a:r>
+          </a:p>
+          <a:p>
+            <a:pPr algn="just"/>
+            <a:r>
+              <a:rPr lang="pt-BR" sz="2000" dirty="0">
+                <a:latin typeface="Times New Roman" panose="02020603050405020304" pitchFamily="18" charset="0"/>
+                <a:cs typeface="Times New Roman" panose="02020603050405020304" pitchFamily="18" charset="0"/>
+              </a:rPr>
+              <a:t>Alta administração	</a:t>
+            </a:r>
+          </a:p>
+          <a:p>
+            <a:pPr algn="just"/>
+            <a:endParaRPr lang="pt-BR" sz="2000" dirty="0">
+              <a:solidFill>
+                <a:schemeClr val="tx1"/>
+              </a:solidFill>
+              <a:latin typeface="Times New Roman" panose="02020603050405020304" pitchFamily="18" charset="0"/>
+              <a:cs typeface="Times New Roman" panose="02020603050405020304" pitchFamily="18" charset="0"/>
+            </a:endParaRPr>
+          </a:p>
+          <a:p>
+            <a:pPr algn="just"/>
+            <a:endParaRPr lang="pt-BR" sz="2000" dirty="0">
+              <a:solidFill>
+                <a:schemeClr val="tx1"/>
+              </a:solidFill>
+              <a:latin typeface="Times New Roman" panose="02020603050405020304" pitchFamily="18" charset="0"/>
+              <a:cs typeface="Times New Roman" panose="02020603050405020304" pitchFamily="18" charset="0"/>
+            </a:endParaRPr>
+          </a:p>
+          <a:p>
+            <a:pPr marL="0" indent="0" algn="just">
+              <a:buNone/>
+            </a:pPr>
+            <a:r>
+              <a:rPr lang="pt-BR" sz="2000" b="1" dirty="0">
+                <a:solidFill>
+                  <a:srgbClr val="FF0000"/>
+                </a:solidFill>
+                <a:latin typeface="Times New Roman" panose="02020603050405020304" pitchFamily="18" charset="0"/>
+                <a:cs typeface="Times New Roman" panose="02020603050405020304" pitchFamily="18" charset="0"/>
+              </a:rPr>
+              <a:t>Exemplo</a:t>
+            </a:r>
+            <a:endParaRPr lang="pt-BR" sz="2000" dirty="0">
+              <a:solidFill>
+                <a:schemeClr val="tx1"/>
+              </a:solidFill>
+              <a:latin typeface="Times New Roman" panose="02020603050405020304" pitchFamily="18" charset="0"/>
+              <a:cs typeface="Times New Roman" panose="02020603050405020304" pitchFamily="18" charset="0"/>
+            </a:endParaRPr>
+          </a:p>
+          <a:p>
+            <a:pPr algn="just"/>
+            <a:r>
+              <a:rPr lang="pt-BR" sz="2000" b="1" dirty="0">
+                <a:solidFill>
+                  <a:schemeClr val="tx1"/>
+                </a:solidFill>
+                <a:latin typeface="Times New Roman" panose="02020603050405020304" pitchFamily="18" charset="0"/>
+                <a:cs typeface="Times New Roman" panose="02020603050405020304" pitchFamily="18" charset="0"/>
+              </a:rPr>
+              <a:t>Governança</a:t>
+            </a:r>
+            <a:r>
+              <a:rPr lang="pt-BR" sz="2000" dirty="0">
+                <a:solidFill>
+                  <a:schemeClr val="tx1"/>
+                </a:solidFill>
+                <a:latin typeface="Times New Roman" panose="02020603050405020304" pitchFamily="18" charset="0"/>
+                <a:cs typeface="Times New Roman" panose="02020603050405020304" pitchFamily="18" charset="0"/>
+              </a:rPr>
+              <a:t> decide "implantar ERP"</a:t>
+            </a:r>
+          </a:p>
+          <a:p>
+            <a:pPr algn="just"/>
+            <a:r>
+              <a:rPr lang="pt-BR" sz="2000" b="1" dirty="0">
+                <a:solidFill>
+                  <a:srgbClr val="FF0000"/>
+                </a:solidFill>
+                <a:latin typeface="Times New Roman" panose="02020603050405020304" pitchFamily="18" charset="0"/>
+                <a:cs typeface="Times New Roman" panose="02020603050405020304" pitchFamily="18" charset="0"/>
+              </a:rPr>
+              <a:t>Gestão</a:t>
+            </a:r>
+            <a:r>
+              <a:rPr lang="pt-BR" sz="2000" dirty="0">
+                <a:solidFill>
+                  <a:schemeClr val="tx1"/>
+                </a:solidFill>
+                <a:latin typeface="Times New Roman" panose="02020603050405020304" pitchFamily="18" charset="0"/>
+                <a:cs typeface="Times New Roman" panose="02020603050405020304" pitchFamily="18" charset="0"/>
+              </a:rPr>
+              <a:t> executa o projeto</a:t>
+            </a:r>
+          </a:p>
+        </p:txBody>
+      </p:sp>
+      <p:sp>
+        <p:nvSpPr>
+          <p:cNvPr id="2" name="Text Placeholder 2">
+            <a:extLst>
+              <a:ext uri="{FF2B5EF4-FFF2-40B4-BE49-F238E27FC236}">
+                <a16:creationId xmlns:a16="http://schemas.microsoft.com/office/drawing/2014/main" id="{707260BD-EAF4-BBDC-5A68-140D0091E304}"/>
+              </a:ext>
+            </a:extLst>
+          </p:cNvPr>
+          <p:cNvSpPr txBox="1">
+            <a:spLocks/>
+          </p:cNvSpPr>
+          <p:nvPr/>
+        </p:nvSpPr>
+        <p:spPr>
+          <a:xfrm>
+            <a:off x="4410635" y="1086897"/>
+            <a:ext cx="3469341" cy="1485766"/>
+          </a:xfrm>
+          <a:prstGeom prst="rect">
+            <a:avLst/>
+          </a:prstGeom>
+          <a:ln w="12700">
+            <a:miter lim="400000"/>
+          </a:ln>
+        </p:spPr>
+        <p:txBody>
+          <a:bodyPr lIns="45718" tIns="45718" rIns="45718" bIns="45718">
+            <a:noAutofit/>
+          </a:bodyPr>
+          <a:lstStyle>
+            <a:lvl1pPr marL="342900" marR="0" indent="-342900" algn="l" defTabSz="457200" rtl="0" latinLnBrk="0">
+              <a:lnSpc>
+                <a:spcPct val="100000"/>
+              </a:lnSpc>
+              <a:spcBef>
+                <a:spcPts val="600"/>
+              </a:spcBef>
+              <a:spcAft>
+                <a:spcPts val="0"/>
+              </a:spcAft>
+              <a:buClrTx/>
+              <a:buSzPct val="100000"/>
+              <a:buFont typeface="Arial" panose="020B0604020202020204"/>
+              <a:buChar char="•"/>
+              <a:defRPr sz="2800" b="0" i="0" u="none" strike="noStrike" cap="none" spc="0" baseline="0">
+                <a:ln>
+                  <a:noFill/>
+                </a:ln>
+                <a:solidFill>
+                  <a:srgbClr val="000000"/>
+                </a:solidFill>
+                <a:uFillTx/>
+                <a:latin typeface="+mj-lt"/>
+                <a:ea typeface="+mj-ea"/>
+                <a:cs typeface="+mj-cs"/>
+                <a:sym typeface="Calibri"/>
+              </a:defRPr>
+            </a:lvl1pPr>
+            <a:lvl2pPr marL="790575" marR="0" indent="-333375" algn="l" defTabSz="457200" rtl="0" latinLnBrk="0">
+              <a:lnSpc>
+                <a:spcPct val="100000"/>
+              </a:lnSpc>
+              <a:spcBef>
+                <a:spcPts val="600"/>
+              </a:spcBef>
+              <a:spcAft>
+                <a:spcPts val="0"/>
+              </a:spcAft>
+              <a:buClrTx/>
+              <a:buSzPct val="100000"/>
+              <a:buFont typeface="Arial" panose="020B0604020202020204"/>
+              <a:buChar char="–"/>
+              <a:defRPr sz="2800" b="0" i="0" u="none" strike="noStrike" cap="none" spc="0" baseline="0">
+                <a:ln>
+                  <a:noFill/>
+                </a:ln>
+                <a:solidFill>
+                  <a:srgbClr val="000000"/>
+                </a:solidFill>
+                <a:uFillTx/>
+                <a:latin typeface="+mj-lt"/>
+                <a:ea typeface="+mj-ea"/>
+                <a:cs typeface="+mj-cs"/>
+                <a:sym typeface="Calibri"/>
+              </a:defRPr>
+            </a:lvl2pPr>
+            <a:lvl3pPr marL="1234440" marR="0" indent="-320040" algn="l" defTabSz="457200" rtl="0" latinLnBrk="0">
+              <a:lnSpc>
+                <a:spcPct val="100000"/>
+              </a:lnSpc>
+              <a:spcBef>
+                <a:spcPts val="600"/>
+              </a:spcBef>
+              <a:spcAft>
+                <a:spcPts val="0"/>
+              </a:spcAft>
+              <a:buClrTx/>
+              <a:buSzPct val="100000"/>
+              <a:buFont typeface="Arial" panose="020B0604020202020204"/>
+              <a:buChar char="•"/>
+              <a:defRPr sz="2800" b="0" i="0" u="none" strike="noStrike" cap="none" spc="0" baseline="0">
+                <a:ln>
+                  <a:noFill/>
+                </a:ln>
+                <a:solidFill>
+                  <a:srgbClr val="000000"/>
+                </a:solidFill>
+                <a:uFillTx/>
+                <a:latin typeface="+mj-lt"/>
+                <a:ea typeface="+mj-ea"/>
+                <a:cs typeface="+mj-cs"/>
+                <a:sym typeface="Calibri"/>
+              </a:defRPr>
+            </a:lvl3pPr>
+            <a:lvl4pPr marL="1727200" marR="0" indent="-355600" algn="l" defTabSz="457200" rtl="0" latinLnBrk="0">
+              <a:lnSpc>
+                <a:spcPct val="100000"/>
+              </a:lnSpc>
+              <a:spcBef>
+                <a:spcPts val="600"/>
+              </a:spcBef>
+              <a:spcAft>
+                <a:spcPts val="0"/>
+              </a:spcAft>
+              <a:buClrTx/>
+              <a:buSzPct val="100000"/>
+              <a:buFont typeface="Arial" panose="020B0604020202020204"/>
+              <a:buChar char="–"/>
+              <a:defRPr sz="2800" b="0" i="0" u="none" strike="noStrike" cap="none" spc="0" baseline="0">
+                <a:ln>
+                  <a:noFill/>
+                </a:ln>
+                <a:solidFill>
+                  <a:srgbClr val="000000"/>
+                </a:solidFill>
+                <a:uFillTx/>
+                <a:latin typeface="+mj-lt"/>
+                <a:ea typeface="+mj-ea"/>
+                <a:cs typeface="+mj-cs"/>
+                <a:sym typeface="Calibri"/>
+              </a:defRPr>
+            </a:lvl4pPr>
+            <a:lvl5pPr marL="2184400" marR="0" indent="-355600" algn="l" defTabSz="457200" rtl="0" latinLnBrk="0">
+              <a:lnSpc>
+                <a:spcPct val="100000"/>
+              </a:lnSpc>
+              <a:spcBef>
+                <a:spcPts val="600"/>
+              </a:spcBef>
+              <a:spcAft>
+                <a:spcPts val="0"/>
+              </a:spcAft>
+              <a:buClrTx/>
+              <a:buSzPct val="100000"/>
+              <a:buFont typeface="Arial" panose="020B0604020202020204"/>
+              <a:buChar char="»"/>
+              <a:defRPr sz="2800" b="0" i="0" u="none" strike="noStrike" cap="none" spc="0" baseline="0">
+                <a:ln>
+                  <a:noFill/>
+                </a:ln>
+                <a:solidFill>
+                  <a:srgbClr val="000000"/>
+                </a:solidFill>
+                <a:uFillTx/>
+                <a:latin typeface="+mj-lt"/>
+                <a:ea typeface="+mj-ea"/>
+                <a:cs typeface="+mj-cs"/>
+                <a:sym typeface="Calibri"/>
+              </a:defRPr>
+            </a:lvl5pPr>
+            <a:lvl6pPr marL="2651760" marR="0" indent="-365760" algn="l" defTabSz="457200" rtl="0" latinLnBrk="0">
+              <a:lnSpc>
+                <a:spcPct val="100000"/>
+              </a:lnSpc>
+              <a:spcBef>
+                <a:spcPts val="700"/>
+              </a:spcBef>
+              <a:spcAft>
+                <a:spcPts val="0"/>
+              </a:spcAft>
+              <a:buClrTx/>
+              <a:buSzPct val="100000"/>
+              <a:buFont typeface="Arial" panose="020B0604020202020204"/>
+              <a:buChar char="•"/>
+              <a:defRPr sz="3200" b="0" i="0" u="none" strike="noStrike" cap="none" spc="0" baseline="0">
+                <a:ln>
+                  <a:noFill/>
+                </a:ln>
+                <a:solidFill>
+                  <a:srgbClr val="000000"/>
+                </a:solidFill>
+                <a:uFillTx/>
+                <a:latin typeface="+mj-lt"/>
+                <a:ea typeface="+mj-ea"/>
+                <a:cs typeface="+mj-cs"/>
+                <a:sym typeface="Calibri"/>
+              </a:defRPr>
+            </a:lvl6pPr>
+            <a:lvl7pPr marL="3108960" marR="0" indent="-365760" algn="l" defTabSz="457200" rtl="0" latinLnBrk="0">
+              <a:lnSpc>
+                <a:spcPct val="100000"/>
+              </a:lnSpc>
+              <a:spcBef>
+                <a:spcPts val="700"/>
+              </a:spcBef>
+              <a:spcAft>
+                <a:spcPts val="0"/>
+              </a:spcAft>
+              <a:buClrTx/>
+              <a:buSzPct val="100000"/>
+              <a:buFont typeface="Arial" panose="020B0604020202020204"/>
+              <a:buChar char="•"/>
+              <a:defRPr sz="3200" b="0" i="0" u="none" strike="noStrike" cap="none" spc="0" baseline="0">
+                <a:ln>
+                  <a:noFill/>
+                </a:ln>
+                <a:solidFill>
+                  <a:srgbClr val="000000"/>
+                </a:solidFill>
+                <a:uFillTx/>
+                <a:latin typeface="+mj-lt"/>
+                <a:ea typeface="+mj-ea"/>
+                <a:cs typeface="+mj-cs"/>
+                <a:sym typeface="Calibri"/>
+              </a:defRPr>
+            </a:lvl7pPr>
+            <a:lvl8pPr marL="3566160" marR="0" indent="-365760" algn="l" defTabSz="457200" rtl="0" latinLnBrk="0">
+              <a:lnSpc>
+                <a:spcPct val="100000"/>
+              </a:lnSpc>
+              <a:spcBef>
+                <a:spcPts val="700"/>
+              </a:spcBef>
+              <a:spcAft>
+                <a:spcPts val="0"/>
+              </a:spcAft>
+              <a:buClrTx/>
+              <a:buSzPct val="100000"/>
+              <a:buFont typeface="Arial" panose="020B0604020202020204"/>
+              <a:buChar char="•"/>
+              <a:defRPr sz="3200" b="0" i="0" u="none" strike="noStrike" cap="none" spc="0" baseline="0">
+                <a:ln>
+                  <a:noFill/>
+                </a:ln>
+                <a:solidFill>
+                  <a:srgbClr val="000000"/>
+                </a:solidFill>
+                <a:uFillTx/>
+                <a:latin typeface="+mj-lt"/>
+                <a:ea typeface="+mj-ea"/>
+                <a:cs typeface="+mj-cs"/>
+                <a:sym typeface="Calibri"/>
+              </a:defRPr>
+            </a:lvl8pPr>
+            <a:lvl9pPr marL="4023360" marR="0" indent="-365760" algn="l" defTabSz="457200" rtl="0" latinLnBrk="0">
+              <a:lnSpc>
+                <a:spcPct val="100000"/>
+              </a:lnSpc>
+              <a:spcBef>
+                <a:spcPts val="700"/>
+              </a:spcBef>
+              <a:spcAft>
+                <a:spcPts val="0"/>
+              </a:spcAft>
+              <a:buClrTx/>
+              <a:buSzPct val="100000"/>
+              <a:buFont typeface="Arial" panose="020B0604020202020204"/>
+              <a:buChar char="•"/>
+              <a:defRPr sz="3200" b="0" i="0" u="none" strike="noStrike" cap="none" spc="0" baseline="0">
+                <a:ln>
+                  <a:noFill/>
+                </a:ln>
+                <a:solidFill>
+                  <a:srgbClr val="000000"/>
+                </a:solidFill>
+                <a:uFillTx/>
+                <a:latin typeface="+mj-lt"/>
+                <a:ea typeface="+mj-ea"/>
+                <a:cs typeface="+mj-cs"/>
+                <a:sym typeface="Calibri"/>
+              </a:defRPr>
+            </a:lvl9pPr>
+          </a:lstStyle>
+          <a:p>
+            <a:pPr marL="0" indent="0" algn="just">
+              <a:buNone/>
+            </a:pPr>
+            <a:r>
+              <a:rPr lang="pt-BR" sz="2000" b="1" dirty="0">
+                <a:solidFill>
+                  <a:srgbClr val="FF0000"/>
+                </a:solidFill>
+                <a:latin typeface="Times New Roman" panose="02020603050405020304" pitchFamily="18" charset="0"/>
+                <a:cs typeface="Times New Roman" panose="02020603050405020304" pitchFamily="18" charset="0"/>
+              </a:rPr>
+              <a:t>Gestão de TI</a:t>
+            </a:r>
+          </a:p>
+          <a:p>
+            <a:pPr algn="just"/>
+            <a:r>
+              <a:rPr lang="pt-BR" sz="2000" dirty="0">
+                <a:latin typeface="Times New Roman" panose="02020603050405020304" pitchFamily="18" charset="0"/>
+                <a:cs typeface="Times New Roman" panose="02020603050405020304" pitchFamily="18" charset="0"/>
+              </a:rPr>
+              <a:t>Executa operações</a:t>
+            </a:r>
+          </a:p>
+          <a:p>
+            <a:pPr algn="just"/>
+            <a:r>
+              <a:rPr lang="pt-BR" sz="2000" dirty="0">
+                <a:latin typeface="Times New Roman" panose="02020603050405020304" pitchFamily="18" charset="0"/>
+                <a:cs typeface="Times New Roman" panose="02020603050405020304" pitchFamily="18" charset="0"/>
+              </a:rPr>
+              <a:t>Foco </a:t>
+            </a:r>
+            <a:r>
+              <a:rPr lang="pt-BR" sz="2000" b="1" dirty="0">
+                <a:latin typeface="Times New Roman" panose="02020603050405020304" pitchFamily="18" charset="0"/>
+                <a:cs typeface="Times New Roman" panose="02020603050405020304" pitchFamily="18" charset="0"/>
+              </a:rPr>
+              <a:t>tático</a:t>
+            </a:r>
+            <a:r>
+              <a:rPr lang="pt-BR" sz="2000" dirty="0">
+                <a:latin typeface="Times New Roman" panose="02020603050405020304" pitchFamily="18" charset="0"/>
+                <a:cs typeface="Times New Roman" panose="02020603050405020304" pitchFamily="18" charset="0"/>
+              </a:rPr>
+              <a:t> ou </a:t>
+            </a:r>
+            <a:r>
+              <a:rPr lang="pt-BR" sz="2000" b="1" dirty="0">
+                <a:solidFill>
+                  <a:srgbClr val="FF0000"/>
+                </a:solidFill>
+                <a:latin typeface="Times New Roman" panose="02020603050405020304" pitchFamily="18" charset="0"/>
+                <a:cs typeface="Times New Roman" panose="02020603050405020304" pitchFamily="18" charset="0"/>
+              </a:rPr>
+              <a:t>operacional</a:t>
+            </a:r>
+          </a:p>
+          <a:p>
+            <a:pPr algn="just"/>
+            <a:r>
+              <a:rPr lang="pt-BR" sz="2000" dirty="0">
+                <a:latin typeface="Times New Roman" panose="02020603050405020304" pitchFamily="18" charset="0"/>
+                <a:cs typeface="Times New Roman" panose="02020603050405020304" pitchFamily="18" charset="0"/>
+              </a:rPr>
+              <a:t>Equipes técnicas</a:t>
+            </a:r>
+            <a:endParaRPr lang="pt-BR" sz="2000" dirty="0">
+              <a:solidFill>
+                <a:schemeClr val="tx1"/>
+              </a:solidFill>
+              <a:latin typeface="Times New Roman" panose="02020603050405020304" pitchFamily="18" charset="0"/>
+              <a:cs typeface="Times New Roman" panose="02020603050405020304" pitchFamily="18" charset="0"/>
+            </a:endParaRPr>
+          </a:p>
+        </p:txBody>
+      </p:sp>
+    </p:spTree>
+    <p:extLst>
+      <p:ext uri="{BB962C8B-B14F-4D97-AF65-F5344CB8AC3E}">
+        <p14:creationId xmlns:p14="http://schemas.microsoft.com/office/powerpoint/2010/main" val="589824849"/>
+      </p:ext>
+    </p:extLst>
+  </p:cSld>
+  <p:clrMapOvr>
+    <a:masterClrMapping/>
+  </p:clrMapOvr>
+  <p:transition spd="med"/>
+</p:sld>
+</file>
+
+<file path=ppt/slides/slide6.xml><?xml version="1.0" encoding="utf-8"?>
+<p:sld xmlns:a="http://schemas.openxmlformats.org/drawingml/2006/main" xmlns:r="http://schemas.openxmlformats.org/officeDocument/2006/relationships" xmlns:p="http://schemas.openxmlformats.org/presentationml/2006/main">
+  <p:cSld>
+    <p:spTree>
+      <p:nvGrpSpPr>
+        <p:cNvPr id="1" name="">
+          <a:extLst>
+            <a:ext uri="{FF2B5EF4-FFF2-40B4-BE49-F238E27FC236}">
+              <a16:creationId xmlns:a16="http://schemas.microsoft.com/office/drawing/2014/main" id="{A1BF68BA-1FB9-8796-A2E0-56F617BF9974}"/>
+            </a:ext>
+          </a:extLst>
+        </p:cNvPr>
+        <p:cNvGrpSpPr/>
+        <p:nvPr/>
+      </p:nvGrpSpPr>
+      <p:grpSpPr>
+        <a:xfrm>
+          <a:off x="0" y="0"/>
+          <a:ext cx="0" cy="0"/>
+          <a:chOff x="0" y="0"/>
+          <a:chExt cx="0" cy="0"/>
+        </a:xfrm>
+      </p:grpSpPr>
+      <p:sp>
+        <p:nvSpPr>
+          <p:cNvPr id="6" name="Title 1">
+            <a:extLst>
+              <a:ext uri="{FF2B5EF4-FFF2-40B4-BE49-F238E27FC236}">
+                <a16:creationId xmlns:a16="http://schemas.microsoft.com/office/drawing/2014/main" id="{069DEDE1-A8E3-C28A-B98B-58EE066FD9FA}"/>
+              </a:ext>
+            </a:extLst>
+          </p:cNvPr>
+          <p:cNvSpPr>
+            <a:spLocks noGrp="1"/>
+          </p:cNvSpPr>
+          <p:nvPr>
+            <p:ph type="title"/>
+          </p:nvPr>
+        </p:nvSpPr>
+        <p:spPr>
+          <a:xfrm>
+            <a:off x="457200" y="205980"/>
+            <a:ext cx="8229600" cy="857251"/>
+          </a:xfrm>
+        </p:spPr>
+        <p:txBody>
+          <a:bodyPr>
+            <a:normAutofit/>
+          </a:bodyPr>
+          <a:lstStyle/>
+          <a:p>
+            <a:r>
+              <a:rPr lang="en-US" b="1" dirty="0" err="1">
+                <a:solidFill>
+                  <a:srgbClr val="0070C0"/>
+                </a:solidFill>
+              </a:rPr>
+              <a:t>Modelos</a:t>
+            </a:r>
+            <a:r>
+              <a:rPr lang="en-US" b="1" dirty="0">
+                <a:solidFill>
+                  <a:srgbClr val="0070C0"/>
+                </a:solidFill>
+              </a:rPr>
+              <a:t> de </a:t>
+            </a:r>
+            <a:r>
+              <a:rPr lang="en-US" b="1" dirty="0" err="1">
+                <a:solidFill>
+                  <a:srgbClr val="0070C0"/>
+                </a:solidFill>
+              </a:rPr>
+              <a:t>Implementação</a:t>
+            </a:r>
+            <a:endParaRPr lang="en-US" b="1" dirty="0">
+              <a:solidFill>
+                <a:srgbClr val="0070C0"/>
+              </a:solidFill>
+            </a:endParaRPr>
+          </a:p>
+        </p:txBody>
+      </p:sp>
+      <p:sp>
+        <p:nvSpPr>
+          <p:cNvPr id="8" name="Text Placeholder 2">
+            <a:extLst>
+              <a:ext uri="{FF2B5EF4-FFF2-40B4-BE49-F238E27FC236}">
+                <a16:creationId xmlns:a16="http://schemas.microsoft.com/office/drawing/2014/main" id="{DA7EA268-FBDA-A76F-A667-42F078817E43}"/>
+              </a:ext>
+            </a:extLst>
+          </p:cNvPr>
+          <p:cNvSpPr>
+            <a:spLocks noGrp="1"/>
+          </p:cNvSpPr>
+          <p:nvPr>
+            <p:ph type="body" sz="half" idx="1"/>
+          </p:nvPr>
+        </p:nvSpPr>
+        <p:spPr>
+          <a:xfrm>
+            <a:off x="142865" y="1035050"/>
+            <a:ext cx="8865056" cy="3994150"/>
+          </a:xfrm>
+        </p:spPr>
+        <p:txBody>
+          <a:bodyPr>
+            <a:noAutofit/>
+          </a:bodyPr>
+          <a:lstStyle/>
+          <a:p>
+            <a:pPr marL="0" indent="0" algn="just">
+              <a:buNone/>
+            </a:pPr>
+            <a:r>
+              <a:rPr lang="pt-BR" sz="2000" b="1" dirty="0">
+                <a:latin typeface="Times New Roman" panose="02020603050405020304" pitchFamily="18" charset="0"/>
+                <a:cs typeface="Times New Roman" panose="02020603050405020304" pitchFamily="18" charset="0"/>
+              </a:rPr>
+              <a:t>Principais frameworks</a:t>
+            </a:r>
+            <a:endParaRPr lang="pt-BR" sz="2000" dirty="0">
+              <a:latin typeface="Times New Roman" panose="02020603050405020304" pitchFamily="18" charset="0"/>
+              <a:cs typeface="Times New Roman" panose="02020603050405020304" pitchFamily="18" charset="0"/>
+            </a:endParaRPr>
+          </a:p>
+          <a:p>
+            <a:pPr marL="0" indent="0" algn="just">
+              <a:buNone/>
+            </a:pPr>
+            <a:endParaRPr lang="pt-BR" sz="2000" dirty="0">
+              <a:latin typeface="Times New Roman" panose="02020603050405020304" pitchFamily="18" charset="0"/>
+              <a:cs typeface="Times New Roman" panose="02020603050405020304" pitchFamily="18" charset="0"/>
+            </a:endParaRPr>
+          </a:p>
+          <a:p>
+            <a:pPr algn="just"/>
+            <a:r>
+              <a:rPr lang="pt-BR" sz="2000" b="1" dirty="0">
+                <a:latin typeface="Times New Roman" panose="02020603050405020304" pitchFamily="18" charset="0"/>
+                <a:cs typeface="Times New Roman" panose="02020603050405020304" pitchFamily="18" charset="0"/>
+              </a:rPr>
+              <a:t>COBIT</a:t>
+            </a:r>
+            <a:r>
+              <a:rPr lang="pt-BR" sz="2000" dirty="0">
+                <a:latin typeface="Times New Roman" panose="02020603050405020304" pitchFamily="18" charset="0"/>
+                <a:cs typeface="Times New Roman" panose="02020603050405020304" pitchFamily="18" charset="0"/>
+              </a:rPr>
+              <a:t> (controle e governança)</a:t>
+            </a:r>
+          </a:p>
+          <a:p>
+            <a:pPr algn="just"/>
+            <a:r>
+              <a:rPr lang="pt-BR" sz="2000" b="1" dirty="0">
+                <a:latin typeface="Times New Roman" panose="02020603050405020304" pitchFamily="18" charset="0"/>
+                <a:cs typeface="Times New Roman" panose="02020603050405020304" pitchFamily="18" charset="0"/>
+              </a:rPr>
+              <a:t>ITIL</a:t>
+            </a:r>
+            <a:r>
+              <a:rPr lang="pt-BR" sz="2000" dirty="0">
+                <a:latin typeface="Times New Roman" panose="02020603050405020304" pitchFamily="18" charset="0"/>
+                <a:cs typeface="Times New Roman" panose="02020603050405020304" pitchFamily="18" charset="0"/>
+              </a:rPr>
+              <a:t> (gestão de serviços de </a:t>
+            </a:r>
+            <a:r>
+              <a:rPr lang="pt-BR" sz="2000" b="1" dirty="0">
+                <a:latin typeface="Times New Roman" panose="02020603050405020304" pitchFamily="18" charset="0"/>
+                <a:cs typeface="Times New Roman" panose="02020603050405020304" pitchFamily="18" charset="0"/>
+              </a:rPr>
+              <a:t>TI</a:t>
+            </a:r>
+            <a:r>
+              <a:rPr lang="pt-BR" sz="2000" dirty="0">
+                <a:latin typeface="Times New Roman" panose="02020603050405020304" pitchFamily="18" charset="0"/>
+                <a:cs typeface="Times New Roman" panose="02020603050405020304" pitchFamily="18" charset="0"/>
+              </a:rPr>
+              <a:t>)</a:t>
+            </a:r>
+          </a:p>
+          <a:p>
+            <a:pPr algn="just"/>
+            <a:r>
+              <a:rPr lang="pt-BR" sz="2000" b="1" dirty="0">
+                <a:solidFill>
+                  <a:srgbClr val="FF0000"/>
+                </a:solidFill>
+                <a:latin typeface="Times New Roman" panose="02020603050405020304" pitchFamily="18" charset="0"/>
+                <a:cs typeface="Times New Roman" panose="02020603050405020304" pitchFamily="18" charset="0"/>
+              </a:rPr>
+              <a:t>ISO/IEC 38500 </a:t>
+            </a:r>
+            <a:r>
+              <a:rPr lang="pt-BR" sz="2000" dirty="0">
+                <a:latin typeface="Times New Roman" panose="02020603050405020304" pitchFamily="18" charset="0"/>
+                <a:cs typeface="Times New Roman" panose="02020603050405020304" pitchFamily="18" charset="0"/>
+              </a:rPr>
+              <a:t>(governança corporativa de </a:t>
+            </a:r>
+            <a:r>
+              <a:rPr lang="pt-BR" sz="2000" b="1" dirty="0">
+                <a:latin typeface="Times New Roman" panose="02020603050405020304" pitchFamily="18" charset="0"/>
+                <a:cs typeface="Times New Roman" panose="02020603050405020304" pitchFamily="18" charset="0"/>
+              </a:rPr>
+              <a:t>TI</a:t>
+            </a:r>
+            <a:r>
+              <a:rPr lang="pt-BR" sz="2000" dirty="0">
+                <a:latin typeface="Times New Roman" panose="02020603050405020304" pitchFamily="18" charset="0"/>
+                <a:cs typeface="Times New Roman" panose="02020603050405020304" pitchFamily="18" charset="0"/>
+              </a:rPr>
+              <a:t>)</a:t>
+            </a:r>
+          </a:p>
+          <a:p>
+            <a:pPr marL="0" indent="0" algn="just">
+              <a:buNone/>
+            </a:pPr>
+            <a:endParaRPr lang="pt-BR" sz="2000" dirty="0">
+              <a:latin typeface="Times New Roman" panose="02020603050405020304" pitchFamily="18" charset="0"/>
+              <a:cs typeface="Times New Roman" panose="02020603050405020304" pitchFamily="18" charset="0"/>
+            </a:endParaRPr>
+          </a:p>
+          <a:p>
+            <a:pPr marL="0" indent="0" algn="just">
+              <a:buNone/>
+            </a:pPr>
+            <a:r>
+              <a:rPr lang="pt-BR" sz="2000" b="1" dirty="0">
+                <a:solidFill>
+                  <a:srgbClr val="FF0000"/>
+                </a:solidFill>
+                <a:latin typeface="Times New Roman" panose="02020603050405020304" pitchFamily="18" charset="0"/>
+                <a:cs typeface="Times New Roman" panose="02020603050405020304" pitchFamily="18" charset="0"/>
+              </a:rPr>
+              <a:t>Aplicação</a:t>
+            </a:r>
+            <a:endParaRPr lang="pt-BR" sz="2000" dirty="0">
+              <a:latin typeface="Times New Roman" panose="02020603050405020304" pitchFamily="18" charset="0"/>
+              <a:cs typeface="Times New Roman" panose="02020603050405020304" pitchFamily="18" charset="0"/>
+            </a:endParaRPr>
+          </a:p>
+          <a:p>
+            <a:pPr algn="just"/>
+            <a:r>
+              <a:rPr lang="pt-BR" sz="2000" dirty="0">
+                <a:latin typeface="Times New Roman" panose="02020603050405020304" pitchFamily="18" charset="0"/>
+                <a:cs typeface="Times New Roman" panose="02020603050405020304" pitchFamily="18" charset="0"/>
+              </a:rPr>
+              <a:t>Empresas usam </a:t>
+            </a:r>
+            <a:r>
+              <a:rPr lang="pt-BR" sz="2000" b="1" dirty="0">
+                <a:latin typeface="Times New Roman" panose="02020603050405020304" pitchFamily="18" charset="0"/>
+                <a:cs typeface="Times New Roman" panose="02020603050405020304" pitchFamily="18" charset="0"/>
+              </a:rPr>
+              <a:t>COBIT</a:t>
+            </a:r>
+            <a:r>
+              <a:rPr lang="pt-BR" sz="2000" dirty="0">
+                <a:latin typeface="Times New Roman" panose="02020603050405020304" pitchFamily="18" charset="0"/>
+                <a:cs typeface="Times New Roman" panose="02020603050405020304" pitchFamily="18" charset="0"/>
+              </a:rPr>
+              <a:t> para auditoria.</a:t>
+            </a:r>
+          </a:p>
+          <a:p>
+            <a:pPr algn="just"/>
+            <a:r>
+              <a:rPr lang="pt-BR" sz="2000" b="1" dirty="0">
+                <a:solidFill>
+                  <a:srgbClr val="FF0000"/>
+                </a:solidFill>
+                <a:latin typeface="Times New Roman" panose="02020603050405020304" pitchFamily="18" charset="0"/>
+                <a:cs typeface="Times New Roman" panose="02020603050405020304" pitchFamily="18" charset="0"/>
+              </a:rPr>
+              <a:t>ITIL</a:t>
+            </a:r>
+            <a:r>
+              <a:rPr lang="pt-BR" sz="2000" dirty="0">
+                <a:latin typeface="Times New Roman" panose="02020603050405020304" pitchFamily="18" charset="0"/>
+                <a:cs typeface="Times New Roman" panose="02020603050405020304" pitchFamily="18" charset="0"/>
+              </a:rPr>
+              <a:t> para suporte e atendimento ao usuário.</a:t>
+            </a:r>
+            <a:endParaRPr lang="pt-BR" sz="2000" dirty="0">
+              <a:solidFill>
+                <a:schemeClr val="tx1"/>
+              </a:solidFill>
+              <a:latin typeface="Times New Roman" panose="02020603050405020304" pitchFamily="18" charset="0"/>
+              <a:cs typeface="Times New Roman" panose="02020603050405020304" pitchFamily="18" charset="0"/>
+            </a:endParaRPr>
+          </a:p>
+        </p:txBody>
+      </p:sp>
+    </p:spTree>
+    <p:extLst>
+      <p:ext uri="{BB962C8B-B14F-4D97-AF65-F5344CB8AC3E}">
+        <p14:creationId xmlns:p14="http://schemas.microsoft.com/office/powerpoint/2010/main" val="773139397"/>
+      </p:ext>
+    </p:extLst>
+  </p:cSld>
+  <p:clrMapOvr>
+    <a:masterClrMapping/>
+  </p:clrMapOvr>
+  <p:transition spd="med"/>
+</p:sld>
+</file>
+
+<file path=ppt/slides/slide7.xml><?xml version="1.0" encoding="utf-8"?>
+<p:sld xmlns:a="http://schemas.openxmlformats.org/drawingml/2006/main" xmlns:r="http://schemas.openxmlformats.org/officeDocument/2006/relationships" xmlns:p="http://schemas.openxmlformats.org/presentationml/2006/main">
+  <p:cSld>
+    <p:spTree>
+      <p:nvGrpSpPr>
+        <p:cNvPr id="1" name="">
+          <a:extLst>
+            <a:ext uri="{FF2B5EF4-FFF2-40B4-BE49-F238E27FC236}">
+              <a16:creationId xmlns:a16="http://schemas.microsoft.com/office/drawing/2014/main" id="{AC22256A-B582-1BDF-EF24-F81BACF3373E}"/>
+            </a:ext>
+          </a:extLst>
+        </p:cNvPr>
+        <p:cNvGrpSpPr/>
+        <p:nvPr/>
+      </p:nvGrpSpPr>
+      <p:grpSpPr>
+        <a:xfrm>
+          <a:off x="0" y="0"/>
+          <a:ext cx="0" cy="0"/>
+          <a:chOff x="0" y="0"/>
+          <a:chExt cx="0" cy="0"/>
+        </a:xfrm>
+      </p:grpSpPr>
+      <p:sp>
+        <p:nvSpPr>
+          <p:cNvPr id="6" name="Title 1">
+            <a:extLst>
+              <a:ext uri="{FF2B5EF4-FFF2-40B4-BE49-F238E27FC236}">
+                <a16:creationId xmlns:a16="http://schemas.microsoft.com/office/drawing/2014/main" id="{7621A885-2924-B60A-76E7-C305364213C8}"/>
+              </a:ext>
+            </a:extLst>
+          </p:cNvPr>
+          <p:cNvSpPr>
+            <a:spLocks noGrp="1"/>
+          </p:cNvSpPr>
+          <p:nvPr>
+            <p:ph type="title"/>
+          </p:nvPr>
+        </p:nvSpPr>
+        <p:spPr>
+          <a:xfrm>
+            <a:off x="457200" y="205980"/>
+            <a:ext cx="8229600" cy="857251"/>
+          </a:xfrm>
+        </p:spPr>
+        <p:txBody>
+          <a:bodyPr>
+            <a:normAutofit/>
+          </a:bodyPr>
+          <a:lstStyle/>
+          <a:p>
+            <a:r>
+              <a:rPr lang="en-US" b="1" dirty="0" err="1">
+                <a:solidFill>
+                  <a:srgbClr val="0070C0"/>
+                </a:solidFill>
+              </a:rPr>
+              <a:t>Prática</a:t>
+            </a:r>
+            <a:r>
+              <a:rPr lang="en-US" b="1" dirty="0">
+                <a:solidFill>
+                  <a:srgbClr val="0070C0"/>
+                </a:solidFill>
+              </a:rPr>
+              <a:t> </a:t>
+            </a:r>
+            <a:r>
+              <a:rPr lang="en-US" b="1" dirty="0" err="1">
+                <a:solidFill>
+                  <a:srgbClr val="0070C0"/>
+                </a:solidFill>
+              </a:rPr>
+              <a:t>Nacionais</a:t>
+            </a:r>
+            <a:r>
+              <a:rPr lang="en-US" b="1" dirty="0">
+                <a:solidFill>
+                  <a:srgbClr val="0070C0"/>
+                </a:solidFill>
+              </a:rPr>
+              <a:t> e </a:t>
+            </a:r>
+            <a:r>
+              <a:rPr lang="en-US" b="1" dirty="0" err="1">
+                <a:solidFill>
+                  <a:srgbClr val="0070C0"/>
+                </a:solidFill>
+              </a:rPr>
+              <a:t>Internacionais</a:t>
+            </a:r>
+            <a:endParaRPr lang="en-US" b="1" dirty="0">
+              <a:solidFill>
+                <a:srgbClr val="0070C0"/>
+              </a:solidFill>
+            </a:endParaRPr>
+          </a:p>
+        </p:txBody>
+      </p:sp>
+      <p:sp>
+        <p:nvSpPr>
+          <p:cNvPr id="8" name="Text Placeholder 2">
+            <a:extLst>
+              <a:ext uri="{FF2B5EF4-FFF2-40B4-BE49-F238E27FC236}">
+                <a16:creationId xmlns:a16="http://schemas.microsoft.com/office/drawing/2014/main" id="{98BCEE85-AE41-272B-AB02-980E675ABD8A}"/>
+              </a:ext>
+            </a:extLst>
+          </p:cNvPr>
+          <p:cNvSpPr>
+            <a:spLocks noGrp="1"/>
+          </p:cNvSpPr>
+          <p:nvPr>
+            <p:ph type="body" sz="half" idx="1"/>
+          </p:nvPr>
+        </p:nvSpPr>
+        <p:spPr>
+          <a:xfrm>
+            <a:off x="142865" y="1035050"/>
+            <a:ext cx="8865056" cy="3994150"/>
+          </a:xfrm>
+        </p:spPr>
+        <p:txBody>
+          <a:bodyPr>
+            <a:noAutofit/>
+          </a:bodyPr>
+          <a:lstStyle/>
+          <a:p>
+            <a:pPr marL="0" indent="0" algn="just">
+              <a:buNone/>
+            </a:pPr>
+            <a:r>
+              <a:rPr lang="pt-BR" sz="2000" b="1" dirty="0">
+                <a:latin typeface="Times New Roman" panose="02020603050405020304" pitchFamily="18" charset="0"/>
+                <a:cs typeface="Times New Roman" panose="02020603050405020304" pitchFamily="18" charset="0"/>
+              </a:rPr>
+              <a:t>Internacional</a:t>
+            </a:r>
+            <a:endParaRPr lang="pt-BR" sz="2000" dirty="0">
+              <a:latin typeface="Times New Roman" panose="02020603050405020304" pitchFamily="18" charset="0"/>
+              <a:cs typeface="Times New Roman" panose="02020603050405020304" pitchFamily="18" charset="0"/>
+            </a:endParaRPr>
+          </a:p>
+          <a:p>
+            <a:pPr algn="just"/>
+            <a:r>
+              <a:rPr lang="pt-BR" sz="2000" dirty="0">
+                <a:latin typeface="Times New Roman" panose="02020603050405020304" pitchFamily="18" charset="0"/>
+                <a:cs typeface="Times New Roman" panose="02020603050405020304" pitchFamily="18" charset="0"/>
+              </a:rPr>
+              <a:t>Adoção de padrões como </a:t>
+            </a:r>
+            <a:r>
+              <a:rPr lang="pt-BR" sz="2000" b="1" dirty="0">
+                <a:latin typeface="Times New Roman" panose="02020603050405020304" pitchFamily="18" charset="0"/>
+                <a:cs typeface="Times New Roman" panose="02020603050405020304" pitchFamily="18" charset="0"/>
+              </a:rPr>
+              <a:t>COBIT</a:t>
+            </a:r>
+            <a:r>
+              <a:rPr lang="pt-BR" sz="2000" dirty="0">
+                <a:latin typeface="Times New Roman" panose="02020603050405020304" pitchFamily="18" charset="0"/>
+                <a:cs typeface="Times New Roman" panose="02020603050405020304" pitchFamily="18" charset="0"/>
+              </a:rPr>
+              <a:t> e </a:t>
+            </a:r>
+            <a:r>
+              <a:rPr lang="pt-BR" sz="2000" b="1" dirty="0">
+                <a:latin typeface="Times New Roman" panose="02020603050405020304" pitchFamily="18" charset="0"/>
+                <a:cs typeface="Times New Roman" panose="02020603050405020304" pitchFamily="18" charset="0"/>
+              </a:rPr>
+              <a:t>ITIL</a:t>
+            </a:r>
+            <a:r>
+              <a:rPr lang="pt-BR" sz="2000" dirty="0">
+                <a:latin typeface="Times New Roman" panose="02020603050405020304" pitchFamily="18" charset="0"/>
+                <a:cs typeface="Times New Roman" panose="02020603050405020304" pitchFamily="18" charset="0"/>
+              </a:rPr>
+              <a:t>.</a:t>
+            </a:r>
+          </a:p>
+          <a:p>
+            <a:pPr marL="0" indent="0" algn="just">
+              <a:buNone/>
+            </a:pPr>
+            <a:endParaRPr lang="pt-BR" sz="2000" dirty="0">
+              <a:latin typeface="Times New Roman" panose="02020603050405020304" pitchFamily="18" charset="0"/>
+              <a:cs typeface="Times New Roman" panose="02020603050405020304" pitchFamily="18" charset="0"/>
+            </a:endParaRPr>
+          </a:p>
+          <a:p>
+            <a:pPr marL="0" indent="0" algn="just">
+              <a:buNone/>
+            </a:pPr>
+            <a:r>
+              <a:rPr lang="pt-BR" sz="2000" b="1" dirty="0">
+                <a:solidFill>
+                  <a:srgbClr val="FF0000"/>
+                </a:solidFill>
+                <a:latin typeface="Times New Roman" panose="02020603050405020304" pitchFamily="18" charset="0"/>
+                <a:cs typeface="Times New Roman" panose="02020603050405020304" pitchFamily="18" charset="0"/>
+              </a:rPr>
+              <a:t>Brasil</a:t>
+            </a:r>
+            <a:endParaRPr lang="pt-BR" sz="2000" dirty="0">
+              <a:latin typeface="Times New Roman" panose="02020603050405020304" pitchFamily="18" charset="0"/>
+              <a:cs typeface="Times New Roman" panose="02020603050405020304" pitchFamily="18" charset="0"/>
+            </a:endParaRPr>
+          </a:p>
+          <a:p>
+            <a:pPr algn="just"/>
+            <a:r>
+              <a:rPr lang="pt-BR" sz="2000" dirty="0">
+                <a:latin typeface="Times New Roman" panose="02020603050405020304" pitchFamily="18" charset="0"/>
+                <a:cs typeface="Times New Roman" panose="02020603050405020304" pitchFamily="18" charset="0"/>
+              </a:rPr>
+              <a:t>Forte uso em bancos e setor público;</a:t>
+            </a:r>
+          </a:p>
+          <a:p>
+            <a:pPr algn="just"/>
+            <a:r>
+              <a:rPr lang="pt-BR" sz="2000" dirty="0">
+                <a:latin typeface="Times New Roman" panose="02020603050405020304" pitchFamily="18" charset="0"/>
+                <a:cs typeface="Times New Roman" panose="02020603050405020304" pitchFamily="18" charset="0"/>
+              </a:rPr>
+              <a:t>Influência de órgãos como </a:t>
+            </a:r>
+            <a:r>
+              <a:rPr lang="pt-BR" sz="2000" b="1" dirty="0">
+                <a:latin typeface="Times New Roman" panose="02020603050405020304" pitchFamily="18" charset="0"/>
+                <a:cs typeface="Times New Roman" panose="02020603050405020304" pitchFamily="18" charset="0"/>
+              </a:rPr>
+              <a:t>TCU</a:t>
+            </a:r>
+            <a:r>
+              <a:rPr lang="pt-BR" sz="2000" dirty="0">
+                <a:latin typeface="Times New Roman" panose="02020603050405020304" pitchFamily="18" charset="0"/>
+                <a:cs typeface="Times New Roman" panose="02020603050405020304" pitchFamily="18" charset="0"/>
+              </a:rPr>
+              <a:t>.</a:t>
+            </a:r>
+          </a:p>
+          <a:p>
+            <a:pPr marL="0" indent="0" algn="just">
+              <a:buNone/>
+            </a:pPr>
+            <a:endParaRPr lang="pt-BR" sz="2000" dirty="0">
+              <a:latin typeface="Times New Roman" panose="02020603050405020304" pitchFamily="18" charset="0"/>
+              <a:cs typeface="Times New Roman" panose="02020603050405020304" pitchFamily="18" charset="0"/>
+            </a:endParaRPr>
+          </a:p>
+          <a:p>
+            <a:pPr marL="0" indent="0" algn="just">
+              <a:buNone/>
+            </a:pPr>
+            <a:r>
+              <a:rPr lang="pt-BR" sz="2000" b="1" dirty="0">
+                <a:solidFill>
+                  <a:srgbClr val="FF0000"/>
+                </a:solidFill>
+                <a:latin typeface="Times New Roman" panose="02020603050405020304" pitchFamily="18" charset="0"/>
+                <a:cs typeface="Times New Roman" panose="02020603050405020304" pitchFamily="18" charset="0"/>
+              </a:rPr>
+              <a:t>Exemplo</a:t>
+            </a:r>
+            <a:r>
+              <a:rPr lang="pt-BR" sz="2000" dirty="0">
+                <a:latin typeface="Times New Roman" panose="02020603050405020304" pitchFamily="18" charset="0"/>
+                <a:cs typeface="Times New Roman" panose="02020603050405020304" pitchFamily="18" charset="0"/>
+              </a:rPr>
+              <a:t>:</a:t>
+            </a:r>
+          </a:p>
+          <a:p>
+            <a:pPr marL="0" indent="0" algn="just">
+              <a:buNone/>
+            </a:pPr>
+            <a:r>
+              <a:rPr lang="pt-BR" sz="2000" dirty="0">
+                <a:latin typeface="Times New Roman" panose="02020603050405020304" pitchFamily="18" charset="0"/>
+                <a:cs typeface="Times New Roman" panose="02020603050405020304" pitchFamily="18" charset="0"/>
+              </a:rPr>
+              <a:t>	Instituições financeiras utilizam </a:t>
+            </a:r>
+            <a:r>
+              <a:rPr lang="pt-BR" sz="2000" b="1" dirty="0">
+                <a:latin typeface="Times New Roman" panose="02020603050405020304" pitchFamily="18" charset="0"/>
+                <a:cs typeface="Times New Roman" panose="02020603050405020304" pitchFamily="18" charset="0"/>
+              </a:rPr>
+              <a:t>Governança de TI </a:t>
+            </a:r>
+            <a:r>
+              <a:rPr lang="pt-BR" sz="2000" dirty="0">
+                <a:latin typeface="Times New Roman" panose="02020603050405020304" pitchFamily="18" charset="0"/>
+                <a:cs typeface="Times New Roman" panose="02020603050405020304" pitchFamily="18" charset="0"/>
+              </a:rPr>
+              <a:t>para atender normas do Banco Central.</a:t>
+            </a:r>
+            <a:endParaRPr lang="pt-BR" sz="2000" dirty="0">
+              <a:solidFill>
+                <a:schemeClr val="tx1"/>
+              </a:solidFill>
+              <a:latin typeface="Times New Roman" panose="02020603050405020304" pitchFamily="18" charset="0"/>
+              <a:cs typeface="Times New Roman" panose="02020603050405020304" pitchFamily="18" charset="0"/>
+            </a:endParaRPr>
+          </a:p>
+        </p:txBody>
+      </p:sp>
+    </p:spTree>
+    <p:extLst>
+      <p:ext uri="{BB962C8B-B14F-4D97-AF65-F5344CB8AC3E}">
+        <p14:creationId xmlns:p14="http://schemas.microsoft.com/office/powerpoint/2010/main" val="1809676404"/>
+      </p:ext>
+    </p:extLst>
+  </p:cSld>
+  <p:clrMapOvr>
+    <a:masterClrMapping/>
+  </p:clrMapOvr>
+  <p:transition spd="med"/>
+</p:sld>
+</file>
+
+<file path=ppt/slides/slide8.xml><?xml version="1.0" encoding="utf-8"?>
+<p:sld xmlns:a="http://schemas.openxmlformats.org/drawingml/2006/main" xmlns:r="http://schemas.openxmlformats.org/officeDocument/2006/relationships" xmlns:p="http://schemas.openxmlformats.org/presentationml/2006/main">
+  <p:cSld>
+    <p:spTree>
+      <p:nvGrpSpPr>
+        <p:cNvPr id="1" name="">
+          <a:extLst>
+            <a:ext uri="{FF2B5EF4-FFF2-40B4-BE49-F238E27FC236}">
+              <a16:creationId xmlns:a16="http://schemas.microsoft.com/office/drawing/2014/main" id="{7630D1EA-8A9E-6BEE-CACA-850B953A5920}"/>
+            </a:ext>
+          </a:extLst>
+        </p:cNvPr>
+        <p:cNvGrpSpPr/>
+        <p:nvPr/>
+      </p:nvGrpSpPr>
+      <p:grpSpPr>
+        <a:xfrm>
+          <a:off x="0" y="0"/>
+          <a:ext cx="0" cy="0"/>
+          <a:chOff x="0" y="0"/>
+          <a:chExt cx="0" cy="0"/>
+        </a:xfrm>
+      </p:grpSpPr>
+      <p:sp>
+        <p:nvSpPr>
+          <p:cNvPr id="6" name="Title 1">
+            <a:extLst>
+              <a:ext uri="{FF2B5EF4-FFF2-40B4-BE49-F238E27FC236}">
+                <a16:creationId xmlns:a16="http://schemas.microsoft.com/office/drawing/2014/main" id="{8709DA42-67E2-B826-9E93-A0E945B9EF45}"/>
+              </a:ext>
+            </a:extLst>
+          </p:cNvPr>
+          <p:cNvSpPr>
+            <a:spLocks noGrp="1"/>
+          </p:cNvSpPr>
+          <p:nvPr>
+            <p:ph type="title"/>
+          </p:nvPr>
+        </p:nvSpPr>
+        <p:spPr>
+          <a:xfrm>
+            <a:off x="457200" y="205980"/>
+            <a:ext cx="8229600" cy="857251"/>
+          </a:xfrm>
+        </p:spPr>
+        <p:txBody>
+          <a:bodyPr>
+            <a:normAutofit/>
+          </a:bodyPr>
+          <a:lstStyle/>
+          <a:p>
+            <a:r>
+              <a:rPr lang="en-US" b="1" dirty="0" err="1">
+                <a:solidFill>
+                  <a:srgbClr val="0070C0"/>
+                </a:solidFill>
+              </a:rPr>
+              <a:t>Prática</a:t>
+            </a:r>
+            <a:r>
+              <a:rPr lang="en-US" b="1" dirty="0">
+                <a:solidFill>
+                  <a:srgbClr val="0070C0"/>
+                </a:solidFill>
+              </a:rPr>
+              <a:t> </a:t>
+            </a:r>
+            <a:r>
+              <a:rPr lang="en-US" b="1" dirty="0" err="1">
+                <a:solidFill>
+                  <a:srgbClr val="0070C0"/>
+                </a:solidFill>
+              </a:rPr>
+              <a:t>Nacionais</a:t>
+            </a:r>
+            <a:r>
+              <a:rPr lang="en-US" b="1" dirty="0">
+                <a:solidFill>
+                  <a:srgbClr val="0070C0"/>
+                </a:solidFill>
+              </a:rPr>
+              <a:t> e </a:t>
+            </a:r>
+            <a:r>
+              <a:rPr lang="en-US" b="1" dirty="0" err="1">
+                <a:solidFill>
+                  <a:srgbClr val="0070C0"/>
+                </a:solidFill>
+              </a:rPr>
+              <a:t>Internacionais</a:t>
+            </a:r>
+            <a:endParaRPr lang="en-US" b="1" dirty="0">
+              <a:solidFill>
+                <a:srgbClr val="0070C0"/>
+              </a:solidFill>
+            </a:endParaRPr>
+          </a:p>
+        </p:txBody>
+      </p:sp>
+      <p:sp>
+        <p:nvSpPr>
+          <p:cNvPr id="8" name="Text Placeholder 2">
+            <a:extLst>
+              <a:ext uri="{FF2B5EF4-FFF2-40B4-BE49-F238E27FC236}">
+                <a16:creationId xmlns:a16="http://schemas.microsoft.com/office/drawing/2014/main" id="{24031DA7-1013-5F71-707D-FECABCAF6638}"/>
+              </a:ext>
+            </a:extLst>
+          </p:cNvPr>
+          <p:cNvSpPr>
+            <a:spLocks noGrp="1"/>
+          </p:cNvSpPr>
+          <p:nvPr>
+            <p:ph type="body" sz="half" idx="1"/>
+          </p:nvPr>
+        </p:nvSpPr>
+        <p:spPr>
+          <a:xfrm>
+            <a:off x="142865" y="1035050"/>
+            <a:ext cx="8865056" cy="3994150"/>
+          </a:xfrm>
+        </p:spPr>
+        <p:txBody>
+          <a:bodyPr>
+            <a:noAutofit/>
+          </a:bodyPr>
+          <a:lstStyle/>
+          <a:p>
+            <a:pPr marL="0" indent="0" algn="just">
+              <a:buNone/>
+            </a:pPr>
+            <a:r>
+              <a:rPr lang="pt-BR" sz="2000" b="1" dirty="0">
+                <a:latin typeface="Times New Roman" panose="02020603050405020304" pitchFamily="18" charset="0"/>
+                <a:cs typeface="Times New Roman" panose="02020603050405020304" pitchFamily="18" charset="0"/>
+              </a:rPr>
+              <a:t>Internacional</a:t>
+            </a:r>
+            <a:endParaRPr lang="pt-BR" sz="2000" dirty="0">
+              <a:latin typeface="Times New Roman" panose="02020603050405020304" pitchFamily="18" charset="0"/>
+              <a:cs typeface="Times New Roman" panose="02020603050405020304" pitchFamily="18" charset="0"/>
+            </a:endParaRPr>
+          </a:p>
+          <a:p>
+            <a:pPr algn="just"/>
+            <a:r>
+              <a:rPr lang="pt-BR" sz="2000" dirty="0">
+                <a:latin typeface="Times New Roman" panose="02020603050405020304" pitchFamily="18" charset="0"/>
+                <a:cs typeface="Times New Roman" panose="02020603050405020304" pitchFamily="18" charset="0"/>
+              </a:rPr>
+              <a:t>Adoção de padrões como </a:t>
+            </a:r>
+            <a:r>
+              <a:rPr lang="pt-BR" sz="2000" b="1" dirty="0">
+                <a:latin typeface="Times New Roman" panose="02020603050405020304" pitchFamily="18" charset="0"/>
+                <a:cs typeface="Times New Roman" panose="02020603050405020304" pitchFamily="18" charset="0"/>
+              </a:rPr>
+              <a:t>COBIT</a:t>
+            </a:r>
+            <a:r>
+              <a:rPr lang="pt-BR" sz="2000" dirty="0">
+                <a:latin typeface="Times New Roman" panose="02020603050405020304" pitchFamily="18" charset="0"/>
+                <a:cs typeface="Times New Roman" panose="02020603050405020304" pitchFamily="18" charset="0"/>
+              </a:rPr>
+              <a:t> e </a:t>
+            </a:r>
+            <a:r>
+              <a:rPr lang="pt-BR" sz="2000" b="1" dirty="0">
+                <a:latin typeface="Times New Roman" panose="02020603050405020304" pitchFamily="18" charset="0"/>
+                <a:cs typeface="Times New Roman" panose="02020603050405020304" pitchFamily="18" charset="0"/>
+              </a:rPr>
+              <a:t>ITIL</a:t>
+            </a:r>
+            <a:r>
+              <a:rPr lang="pt-BR" sz="2000" dirty="0">
+                <a:latin typeface="Times New Roman" panose="02020603050405020304" pitchFamily="18" charset="0"/>
+                <a:cs typeface="Times New Roman" panose="02020603050405020304" pitchFamily="18" charset="0"/>
+              </a:rPr>
+              <a:t>.</a:t>
+            </a:r>
+          </a:p>
+          <a:p>
+            <a:pPr marL="0" indent="0" algn="just">
+              <a:buNone/>
+            </a:pPr>
+            <a:endParaRPr lang="pt-BR" sz="2000" dirty="0">
+              <a:latin typeface="Times New Roman" panose="02020603050405020304" pitchFamily="18" charset="0"/>
+              <a:cs typeface="Times New Roman" panose="02020603050405020304" pitchFamily="18" charset="0"/>
+            </a:endParaRPr>
+          </a:p>
+          <a:p>
+            <a:pPr marL="0" indent="0" algn="just">
+              <a:buNone/>
+            </a:pPr>
+            <a:r>
+              <a:rPr lang="pt-BR" sz="2000" b="1" dirty="0">
+                <a:solidFill>
+                  <a:srgbClr val="FF0000"/>
+                </a:solidFill>
+                <a:latin typeface="Times New Roman" panose="02020603050405020304" pitchFamily="18" charset="0"/>
+                <a:cs typeface="Times New Roman" panose="02020603050405020304" pitchFamily="18" charset="0"/>
+              </a:rPr>
+              <a:t>Brasil</a:t>
+            </a:r>
+            <a:endParaRPr lang="pt-BR" sz="2000" dirty="0">
+              <a:latin typeface="Times New Roman" panose="02020603050405020304" pitchFamily="18" charset="0"/>
+              <a:cs typeface="Times New Roman" panose="02020603050405020304" pitchFamily="18" charset="0"/>
+            </a:endParaRPr>
+          </a:p>
+          <a:p>
+            <a:pPr algn="just"/>
+            <a:r>
+              <a:rPr lang="pt-BR" sz="2000" dirty="0">
+                <a:latin typeface="Times New Roman" panose="02020603050405020304" pitchFamily="18" charset="0"/>
+                <a:cs typeface="Times New Roman" panose="02020603050405020304" pitchFamily="18" charset="0"/>
+              </a:rPr>
+              <a:t>Forte uso em bancos e setor público;</a:t>
+            </a:r>
+          </a:p>
+          <a:p>
+            <a:pPr algn="just"/>
+            <a:r>
+              <a:rPr lang="pt-BR" sz="2000" dirty="0">
+                <a:latin typeface="Times New Roman" panose="02020603050405020304" pitchFamily="18" charset="0"/>
+                <a:cs typeface="Times New Roman" panose="02020603050405020304" pitchFamily="18" charset="0"/>
+              </a:rPr>
+              <a:t>Influência de órgãos como </a:t>
+            </a:r>
+            <a:r>
+              <a:rPr lang="pt-BR" sz="2000" b="1" dirty="0">
+                <a:latin typeface="Times New Roman" panose="02020603050405020304" pitchFamily="18" charset="0"/>
+                <a:cs typeface="Times New Roman" panose="02020603050405020304" pitchFamily="18" charset="0"/>
+              </a:rPr>
+              <a:t>TCU</a:t>
+            </a:r>
+            <a:r>
+              <a:rPr lang="pt-BR" sz="2000" dirty="0">
+                <a:latin typeface="Times New Roman" panose="02020603050405020304" pitchFamily="18" charset="0"/>
+                <a:cs typeface="Times New Roman" panose="02020603050405020304" pitchFamily="18" charset="0"/>
+              </a:rPr>
+              <a:t>.</a:t>
+            </a:r>
+          </a:p>
+          <a:p>
+            <a:pPr marL="0" indent="0" algn="just">
+              <a:buNone/>
+            </a:pPr>
+            <a:endParaRPr lang="pt-BR" sz="2000" dirty="0">
+              <a:latin typeface="Times New Roman" panose="02020603050405020304" pitchFamily="18" charset="0"/>
+              <a:cs typeface="Times New Roman" panose="02020603050405020304" pitchFamily="18" charset="0"/>
+            </a:endParaRPr>
+          </a:p>
+          <a:p>
+            <a:pPr marL="0" indent="0" algn="just">
+              <a:buNone/>
+            </a:pPr>
+            <a:r>
+              <a:rPr lang="pt-BR" sz="2000" b="1" dirty="0">
+                <a:solidFill>
+                  <a:srgbClr val="FF0000"/>
+                </a:solidFill>
+                <a:latin typeface="Times New Roman" panose="02020603050405020304" pitchFamily="18" charset="0"/>
+                <a:cs typeface="Times New Roman" panose="02020603050405020304" pitchFamily="18" charset="0"/>
+              </a:rPr>
+              <a:t>Exemplo</a:t>
+            </a:r>
+            <a:r>
+              <a:rPr lang="pt-BR" sz="2000" dirty="0">
+                <a:latin typeface="Times New Roman" panose="02020603050405020304" pitchFamily="18" charset="0"/>
+                <a:cs typeface="Times New Roman" panose="02020603050405020304" pitchFamily="18" charset="0"/>
+              </a:rPr>
+              <a:t>:</a:t>
+            </a:r>
+          </a:p>
+          <a:p>
+            <a:pPr marL="0" indent="0" algn="just">
+              <a:buNone/>
+            </a:pPr>
+            <a:r>
+              <a:rPr lang="pt-BR" sz="2000" dirty="0">
+                <a:latin typeface="Times New Roman" panose="02020603050405020304" pitchFamily="18" charset="0"/>
+                <a:cs typeface="Times New Roman" panose="02020603050405020304" pitchFamily="18" charset="0"/>
+              </a:rPr>
+              <a:t>	Instituições financeiras utilizam </a:t>
+            </a:r>
+            <a:r>
+              <a:rPr lang="pt-BR" sz="2000" b="1" dirty="0">
+                <a:latin typeface="Times New Roman" panose="02020603050405020304" pitchFamily="18" charset="0"/>
+                <a:cs typeface="Times New Roman" panose="02020603050405020304" pitchFamily="18" charset="0"/>
+              </a:rPr>
+              <a:t>Governança de TI </a:t>
+            </a:r>
+            <a:r>
+              <a:rPr lang="pt-BR" sz="2000" dirty="0">
+                <a:latin typeface="Times New Roman" panose="02020603050405020304" pitchFamily="18" charset="0"/>
+                <a:cs typeface="Times New Roman" panose="02020603050405020304" pitchFamily="18" charset="0"/>
+              </a:rPr>
+              <a:t>para atender normas do Banco Central.</a:t>
+            </a:r>
+            <a:endParaRPr lang="pt-BR" sz="2000" dirty="0">
+              <a:solidFill>
+                <a:schemeClr val="tx1"/>
+              </a:solidFill>
+              <a:latin typeface="Times New Roman" panose="02020603050405020304" pitchFamily="18" charset="0"/>
+              <a:cs typeface="Times New Roman" panose="02020603050405020304" pitchFamily="18" charset="0"/>
+            </a:endParaRPr>
+          </a:p>
+        </p:txBody>
+      </p:sp>
+    </p:spTree>
+    <p:extLst>
+      <p:ext uri="{BB962C8B-B14F-4D97-AF65-F5344CB8AC3E}">
+        <p14:creationId xmlns:p14="http://schemas.microsoft.com/office/powerpoint/2010/main" val="2842588066"/>
+      </p:ext>
+    </p:extLst>
+  </p:cSld>
+  <p:clrMapOvr>
+    <a:masterClrMapping/>
+  </p:clrMapOvr>
+  <p:transition spd="med"/>
+</p:sld>
+</file>
+
+<file path=ppt/slides/slide9.xml><?xml version="1.0" encoding="utf-8"?>
 <p:sld xmlns:a="http://schemas.openxmlformats.org/drawingml/2006/main" xmlns:r="http://schemas.openxmlformats.org/officeDocument/2006/relationships" xmlns:p="http://schemas.openxmlformats.org/presentationml/2006/main">
   <p:cSld>
     <p:spTree>
@@ -4622,22 +8761,25 @@
           </a:bodyPr>
           <a:lstStyle/>
           <a:p>
-            <a:pPr marL="0" indent="0" algn="just">
+            <a:pPr marL="0" indent="0">
               <a:buNone/>
             </a:pPr>
             <a:r>
-              <a:rPr lang="pt-BR" sz="2400" dirty="0">
+              <a:rPr lang="pt-BR" sz="2200" dirty="0">
                 <a:latin typeface="Times New Roman" panose="02020603050405020304" pitchFamily="18" charset="0"/>
                 <a:cs typeface="Times New Roman" panose="02020603050405020304" pitchFamily="18" charset="0"/>
               </a:rPr>
               <a:t>[1] </a:t>
             </a:r>
             <a:r>
-              <a:rPr lang="pt-BR" sz="2400" b="1" dirty="0">
-                <a:latin typeface="Times New Roman" panose="02020603050405020304" pitchFamily="18" charset="0"/>
-                <a:cs typeface="Times New Roman" panose="02020603050405020304" pitchFamily="18" charset="0"/>
-              </a:rPr>
-              <a:t>Livro (Google Books)</a:t>
+              <a:rPr lang="pt-BR" sz="2200" b="1" dirty="0">
+                <a:solidFill>
+                  <a:schemeClr val="tx1"/>
+                </a:solidFill>
+                <a:latin typeface="Times New Roman" panose="02020603050405020304" pitchFamily="18" charset="0"/>
+                <a:cs typeface="Times New Roman" panose="02020603050405020304" pitchFamily="18" charset="0"/>
+              </a:rPr>
+              <a:t>ISACA – COBIT Framework (oficial)</a:t>
             </a:r>
           </a:p>
           <a:p>
@@ -4645,7 +8787,7 @@
               <a:buNone/>
             </a:pPr>
             <a:r>
-              <a:rPr lang="pt-BR" sz="2400" b="1" dirty="0">
+              <a:rPr lang="pt-BR" sz="2200" b="1" dirty="0">
                 <a:solidFill>
                   <a:srgbClr val="FF0000"/>
                 </a:solidFill>
@@ -4654,7 +8796,45 @@
               </a:rPr>
               <a:t>Disponível em: </a:t>
             </a:r>
-            <a:endParaRPr lang="pt-BR" sz="2400" dirty="0">
+            <a:r>
+              <a:rPr lang="pt-BR" sz="2200" dirty="0">
+                <a:solidFill>
+                  <a:schemeClr val="tx1"/>
+                </a:solidFill>
+                <a:latin typeface="Times New Roman" panose="02020603050405020304" pitchFamily="18" charset="0"/>
+                <a:cs typeface="Times New Roman" panose="02020603050405020304" pitchFamily="18" charset="0"/>
+                <a:hlinkClick r:id="rId3"/>
+              </a:rPr>
+              <a:t>https://www.isaca.org/resources/cobit</a:t>
+            </a:r>
+            <a:r>
+              <a:rPr lang="pt-BR" sz="2200" dirty="0">
+                <a:solidFill>
+                  <a:schemeClr val="tx1"/>
+                </a:solidFill>
+                <a:latin typeface="Times New Roman" panose="02020603050405020304" pitchFamily="18" charset="0"/>
+                <a:cs typeface="Times New Roman" panose="02020603050405020304" pitchFamily="18" charset="0"/>
+              </a:rPr>
+              <a:t> </a:t>
+            </a:r>
+          </a:p>
+          <a:p>
+            <a:pPr marL="0" indent="0">
+              <a:buNone/>
+            </a:pPr>
+            <a:r>
+              <a:rPr lang="pt-BR" sz="2200" dirty="0">
+                <a:latin typeface="Times New Roman" panose="02020603050405020304" pitchFamily="18" charset="0"/>
+                <a:cs typeface="Times New Roman" panose="02020603050405020304" pitchFamily="18" charset="0"/>
+              </a:rPr>
+              <a:t> </a:t>
+            </a:r>
+          </a:p>
+          <a:p>
+            <a:pPr marL="0" indent="0">
+              <a:buNone/>
+            </a:pPr>
+            <a:endParaRPr lang="pt-BR" sz="2200" dirty="0">
               <a:latin typeface="Times New Roman" panose="02020603050405020304" pitchFamily="18" charset="0"/>
               <a:cs typeface="Times New Roman" panose="02020603050405020304" pitchFamily="18" charset="0"/>
             </a:endParaRPr>
@@ -4663,7 +8843,7 @@
             <a:pPr marL="0" indent="0">
               <a:buNone/>
             </a:pPr>
-            <a:endParaRPr lang="pt-BR" sz="2400" dirty="0">
+            <a:endParaRPr lang="pt-BR" sz="2200" dirty="0">
               <a:latin typeface="Times New Roman" panose="02020603050405020304" pitchFamily="18" charset="0"/>
               <a:cs typeface="Times New Roman" panose="02020603050405020304" pitchFamily="18" charset="0"/>
             </a:endParaRPr>
@@ -4672,37 +8852,70 @@
             <a:pPr marL="0" indent="0">
               <a:buNone/>
             </a:pPr>
-            <a:endParaRPr lang="pt-BR" sz="2400" dirty="0">
-              <a:latin typeface="Times New Roman" panose="02020603050405020304" pitchFamily="18" charset="0"/>
-              <a:cs typeface="Times New Roman" panose="02020603050405020304" pitchFamily="18" charset="0"/>
-            </a:endParaRPr>
+            <a:r>
+              <a:rPr lang="pt-BR" sz="2200" dirty="0">
+                <a:latin typeface="Times New Roman" panose="02020603050405020304" pitchFamily="18" charset="0"/>
+                <a:cs typeface="Times New Roman" panose="02020603050405020304" pitchFamily="18" charset="0"/>
+              </a:rPr>
+              <a:t>[2] </a:t>
+            </a:r>
+            <a:r>
+              <a:rPr lang="pt-BR" sz="2200" b="1" dirty="0">
+                <a:solidFill>
+                  <a:schemeClr val="tx1"/>
+                </a:solidFill>
+                <a:latin typeface="Times New Roman" panose="02020603050405020304" pitchFamily="18" charset="0"/>
+                <a:cs typeface="Times New Roman" panose="02020603050405020304" pitchFamily="18" charset="0"/>
+              </a:rPr>
+              <a:t>Portal ITIL (</a:t>
+            </a:r>
+            <a:r>
+              <a:rPr lang="pt-BR" sz="2200" b="1" dirty="0" err="1">
+                <a:solidFill>
+                  <a:schemeClr val="tx1"/>
+                </a:solidFill>
+                <a:latin typeface="Times New Roman" panose="02020603050405020304" pitchFamily="18" charset="0"/>
+                <a:cs typeface="Times New Roman" panose="02020603050405020304" pitchFamily="18" charset="0"/>
+              </a:rPr>
+              <a:t>Axelos</a:t>
+            </a:r>
+            <a:r>
+              <a:rPr lang="pt-BR" sz="2200" b="1" dirty="0">
+                <a:solidFill>
+                  <a:schemeClr val="tx1"/>
+                </a:solidFill>
+                <a:latin typeface="Times New Roman" panose="02020603050405020304" pitchFamily="18" charset="0"/>
+                <a:cs typeface="Times New Roman" panose="02020603050405020304" pitchFamily="18" charset="0"/>
+              </a:rPr>
+              <a:t>/</a:t>
+            </a:r>
+            <a:r>
+              <a:rPr lang="pt-BR" sz="2200" b="1" dirty="0" err="1">
+                <a:solidFill>
+                  <a:schemeClr val="tx1"/>
+                </a:solidFill>
+                <a:latin typeface="Times New Roman" panose="02020603050405020304" pitchFamily="18" charset="0"/>
+                <a:cs typeface="Times New Roman" panose="02020603050405020304" pitchFamily="18" charset="0"/>
+              </a:rPr>
+              <a:t>PeopleCert</a:t>
+            </a:r>
+            <a:r>
+              <a:rPr lang="pt-BR" sz="2200" b="1" dirty="0">
+                <a:solidFill>
+                  <a:schemeClr val="tx1"/>
+                </a:solidFill>
+                <a:latin typeface="Times New Roman" panose="02020603050405020304" pitchFamily="18" charset="0"/>
+                <a:cs typeface="Times New Roman" panose="02020603050405020304" pitchFamily="18" charset="0"/>
+              </a:rPr>
+              <a:t>)</a:t>
+            </a:r>
           </a:p>
           <a:p>
             <a:pPr marL="0" indent="0">
               <a:buNone/>
             </a:pPr>
             <a:r>
-              <a:rPr lang="pt-BR" sz="2400" dirty="0">
-                <a:latin typeface="Times New Roman" panose="02020603050405020304" pitchFamily="18" charset="0"/>
-                <a:cs typeface="Times New Roman" panose="02020603050405020304" pitchFamily="18" charset="0"/>
-              </a:rPr>
-              <a:t>[2] </a:t>
-            </a:r>
-            <a:r>
-              <a:rPr lang="pt-BR" sz="2400" b="1" dirty="0">
-                <a:latin typeface="Times New Roman" panose="02020603050405020304" pitchFamily="18" charset="0"/>
-                <a:cs typeface="Times New Roman" panose="02020603050405020304" pitchFamily="18" charset="0"/>
-              </a:rPr>
-              <a:t>Livro clássico</a:t>
-            </a:r>
-            <a:br>
-              <a:rPr lang="pt-BR" sz="2400" dirty="0">
-                <a:latin typeface="Times New Roman" panose="02020603050405020304" pitchFamily="18" charset="0"/>
-                <a:cs typeface="Times New Roman" panose="02020603050405020304" pitchFamily="18" charset="0"/>
-              </a:rPr>
-            </a:br>
-            <a:r>
-              <a:rPr lang="pt-BR" sz="2400" b="1" dirty="0">
+              <a:rPr lang="pt-BR" sz="2200" b="1" dirty="0">
                 <a:solidFill>
                   <a:srgbClr val="FF0000"/>
                 </a:solidFill>
@@ -4711,7 +8924,31 @@
               </a:rPr>
               <a:t>Disponível em: </a:t>
             </a:r>
-            <a:endParaRPr lang="pt-BR" sz="2400" dirty="0">
+            <a:r>
+              <a:rPr lang="pt-BR" sz="2200" dirty="0">
+                <a:solidFill>
+                  <a:schemeClr val="tx1"/>
+                </a:solidFill>
+                <a:latin typeface="Times New Roman" panose="02020603050405020304" pitchFamily="18" charset="0"/>
+                <a:cs typeface="Times New Roman" panose="02020603050405020304" pitchFamily="18" charset="0"/>
+                <a:hlinkClick r:id="rId4"/>
+              </a:rPr>
+              <a:t>https://www.axelos.com/best-practice-solutions/itil</a:t>
+            </a:r>
+            <a:r>
+              <a:rPr lang="pt-BR" sz="2200" dirty="0">
+                <a:solidFill>
+                  <a:schemeClr val="tx1"/>
+                </a:solidFill>
+                <a:latin typeface="Times New Roman" panose="02020603050405020304" pitchFamily="18" charset="0"/>
+                <a:cs typeface="Times New Roman" panose="02020603050405020304" pitchFamily="18" charset="0"/>
+              </a:rPr>
+              <a:t> </a:t>
+            </a:r>
+            <a:endParaRPr lang="pt-BR" sz="2200" b="1" dirty="0">
+              <a:solidFill>
+                <a:srgbClr val="FF0000"/>
+              </a:solidFill>
               <a:latin typeface="Times New Roman" panose="02020603050405020304" pitchFamily="18" charset="0"/>
               <a:cs typeface="Times New Roman" panose="02020603050405020304" pitchFamily="18" charset="0"/>
             </a:endParaRPr>
@@ -4724,1259 +8961,6 @@
         <p14:creationId xmlns:p14="http://schemas.microsoft.com/office/powerpoint/2010/main" val="3680270425"/>
       </p:ext>
     </p:extLst>
-  </p:cSld>
-  <p:clrMapOvr>
-    <a:masterClrMapping/>
-  </p:clrMapOvr>
-  <p:transition spd="med"/>
-</p:sld>
-</file>
-
-<file path=ppt/slides/slide5.xml><?xml version="1.0" encoding="utf-8"?>
-<p:sld xmlns:a="http://schemas.openxmlformats.org/drawingml/2006/main" xmlns:r="http://schemas.openxmlformats.org/officeDocument/2006/relationships" xmlns:p="http://schemas.openxmlformats.org/presentationml/2006/main">
-  <p:cSld>
-    <p:spTree>
-      <p:nvGrpSpPr>
-        <p:cNvPr id="1" name=""/>
-        <p:cNvGrpSpPr/>
-        <p:nvPr/>
-      </p:nvGrpSpPr>
-      <p:grpSpPr>
-        <a:xfrm>
-          <a:off x="0" y="0"/>
-          <a:ext cx="0" cy="0"/>
-          <a:chOff x="0" y="0"/>
-          <a:chExt cx="0" cy="0"/>
-        </a:xfrm>
-      </p:grpSpPr>
-      <p:sp>
-        <p:nvSpPr>
-          <p:cNvPr id="6" name="Title 1"/>
-          <p:cNvSpPr>
-            <a:spLocks noGrp="1"/>
-          </p:cNvSpPr>
-          <p:nvPr>
-            <p:ph type="title"/>
-          </p:nvPr>
-        </p:nvSpPr>
-        <p:spPr>
-          <a:xfrm>
-            <a:off x="457200" y="205980"/>
-            <a:ext cx="8229600" cy="857251"/>
-          </a:xfrm>
-        </p:spPr>
-        <p:txBody>
-          <a:bodyPr>
-            <a:normAutofit/>
-          </a:bodyPr>
-          <a:lstStyle/>
-          <a:p>
-            <a:r>
-              <a:rPr lang="en-US" b="1" dirty="0" err="1">
-                <a:solidFill>
-                  <a:srgbClr val="0070C0"/>
-                </a:solidFill>
-              </a:rPr>
-              <a:t>Aprenda</a:t>
-            </a:r>
-            <a:r>
-              <a:rPr lang="en-US" b="1" dirty="0">
-                <a:solidFill>
-                  <a:srgbClr val="0070C0"/>
-                </a:solidFill>
-              </a:rPr>
-              <a:t>+</a:t>
-            </a:r>
-          </a:p>
-        </p:txBody>
-      </p:sp>
-      <p:sp>
-        <p:nvSpPr>
-          <p:cNvPr id="8" name="Text Placeholder 2"/>
-          <p:cNvSpPr>
-            <a:spLocks noGrp="1"/>
-          </p:cNvSpPr>
-          <p:nvPr>
-            <p:ph type="body" sz="half" idx="1"/>
-          </p:nvPr>
-        </p:nvSpPr>
-        <p:spPr>
-          <a:xfrm>
-            <a:off x="142865" y="1200150"/>
-            <a:ext cx="8865056" cy="3737370"/>
-          </a:xfrm>
-        </p:spPr>
-        <p:txBody>
-          <a:bodyPr>
-            <a:noAutofit/>
-          </a:bodyPr>
-          <a:lstStyle/>
-          <a:p>
-            <a:pPr marL="0" indent="0" algn="just">
-              <a:buNone/>
-            </a:pPr>
-            <a:r>
-              <a:rPr lang="pt-BR" sz="2200" dirty="0">
-                <a:latin typeface="Times New Roman" panose="02020603050405020304" pitchFamily="18" charset="0"/>
-                <a:cs typeface="Times New Roman" panose="02020603050405020304" pitchFamily="18" charset="0"/>
-              </a:rPr>
-              <a:t>[1] </a:t>
-            </a:r>
-            <a:r>
-              <a:rPr lang="pt-BR" sz="2400" b="1" dirty="0">
-                <a:latin typeface="Times New Roman" panose="02020603050405020304" pitchFamily="18" charset="0"/>
-                <a:cs typeface="Times New Roman" panose="02020603050405020304" pitchFamily="18" charset="0"/>
-              </a:rPr>
-              <a:t>Business </a:t>
-            </a:r>
-            <a:r>
-              <a:rPr lang="pt-BR" sz="2400" b="1" dirty="0" err="1">
-                <a:latin typeface="Times New Roman" panose="02020603050405020304" pitchFamily="18" charset="0"/>
-                <a:cs typeface="Times New Roman" panose="02020603050405020304" pitchFamily="18" charset="0"/>
-              </a:rPr>
-              <a:t>Intelligence</a:t>
-            </a:r>
-            <a:endParaRPr lang="pt-BR" sz="2400" b="1" dirty="0">
-              <a:latin typeface="Times New Roman" panose="02020603050405020304" pitchFamily="18" charset="0"/>
-              <a:cs typeface="Times New Roman" panose="02020603050405020304" pitchFamily="18" charset="0"/>
-            </a:endParaRPr>
-          </a:p>
-          <a:p>
-            <a:pPr marL="0" indent="0" algn="just">
-              <a:buNone/>
-            </a:pPr>
-            <a:r>
-              <a:rPr lang="pt-BR" sz="2200" b="1" dirty="0">
-                <a:solidFill>
-                  <a:srgbClr val="FF0000"/>
-                </a:solidFill>
-                <a:latin typeface="Times New Roman" panose="02020603050405020304" pitchFamily="18" charset="0"/>
-                <a:cs typeface="Times New Roman" panose="02020603050405020304" pitchFamily="18" charset="0"/>
-              </a:rPr>
-              <a:t>Disponível em: </a:t>
-            </a:r>
-            <a:endParaRPr lang="pt-BR" sz="2400" dirty="0">
-              <a:latin typeface="Times New Roman" panose="02020603050405020304" pitchFamily="18" charset="0"/>
-              <a:cs typeface="Times New Roman" panose="02020603050405020304" pitchFamily="18" charset="0"/>
-            </a:endParaRPr>
-          </a:p>
-          <a:p>
-            <a:pPr marL="0" indent="0" algn="just">
-              <a:buNone/>
-            </a:pPr>
-            <a:endParaRPr lang="pt-BR" sz="2200" dirty="0">
-              <a:latin typeface="Times New Roman" panose="02020603050405020304" pitchFamily="18" charset="0"/>
-              <a:cs typeface="Times New Roman" panose="02020603050405020304" pitchFamily="18" charset="0"/>
-            </a:endParaRPr>
-          </a:p>
-          <a:p>
-            <a:pPr marL="0" indent="0" algn="just">
-              <a:buNone/>
-            </a:pPr>
-            <a:endParaRPr lang="pt-BR" sz="2200" dirty="0">
-              <a:latin typeface="Times New Roman" panose="02020603050405020304" pitchFamily="18" charset="0"/>
-              <a:cs typeface="Times New Roman" panose="02020603050405020304" pitchFamily="18" charset="0"/>
-            </a:endParaRPr>
-          </a:p>
-          <a:p>
-            <a:pPr marL="0" indent="0" algn="just">
-              <a:buNone/>
-            </a:pPr>
-            <a:r>
-              <a:rPr lang="pt-BR" sz="2200" dirty="0">
-                <a:latin typeface="Times New Roman" panose="02020603050405020304" pitchFamily="18" charset="0"/>
-                <a:cs typeface="Times New Roman" panose="02020603050405020304" pitchFamily="18" charset="0"/>
-              </a:rPr>
-              <a:t>[2] </a:t>
-            </a:r>
-            <a:r>
-              <a:rPr lang="pt-BR" sz="2400" b="1" dirty="0">
-                <a:latin typeface="Times New Roman" panose="02020603050405020304" pitchFamily="18" charset="0"/>
-                <a:cs typeface="Times New Roman" panose="02020603050405020304" pitchFamily="18" charset="0"/>
-              </a:rPr>
-              <a:t>Business </a:t>
-            </a:r>
-            <a:r>
-              <a:rPr lang="pt-BR" sz="2400" b="1" dirty="0" err="1">
-                <a:latin typeface="Times New Roman" panose="02020603050405020304" pitchFamily="18" charset="0"/>
-                <a:cs typeface="Times New Roman" panose="02020603050405020304" pitchFamily="18" charset="0"/>
-              </a:rPr>
-              <a:t>Intelligence</a:t>
-            </a:r>
-            <a:endParaRPr lang="pt-BR" sz="2200" b="1" dirty="0">
-              <a:latin typeface="Times New Roman" panose="02020603050405020304" pitchFamily="18" charset="0"/>
-              <a:cs typeface="Times New Roman" panose="02020603050405020304" pitchFamily="18" charset="0"/>
-            </a:endParaRPr>
-          </a:p>
-          <a:p>
-            <a:pPr marL="0" indent="0" algn="just">
-              <a:buNone/>
-            </a:pPr>
-            <a:r>
-              <a:rPr lang="pt-BR" sz="2200" b="1" dirty="0">
-                <a:solidFill>
-                  <a:srgbClr val="FF0000"/>
-                </a:solidFill>
-                <a:latin typeface="Times New Roman" panose="02020603050405020304" pitchFamily="18" charset="0"/>
-                <a:cs typeface="Times New Roman" panose="02020603050405020304" pitchFamily="18" charset="0"/>
-              </a:rPr>
-              <a:t>Disponível em: </a:t>
-            </a:r>
-            <a:endParaRPr lang="pt-BR" sz="2400" dirty="0">
-              <a:latin typeface="Times New Roman" panose="02020603050405020304" pitchFamily="18" charset="0"/>
-              <a:cs typeface="Times New Roman" panose="02020603050405020304" pitchFamily="18" charset="0"/>
-            </a:endParaRPr>
-          </a:p>
-          <a:p>
-            <a:pPr marL="0" indent="0" algn="just">
-              <a:buNone/>
-            </a:pPr>
-            <a:endParaRPr lang="pt-BR" sz="2200" dirty="0">
-              <a:latin typeface="Times New Roman" panose="02020603050405020304" pitchFamily="18" charset="0"/>
-              <a:cs typeface="Times New Roman" panose="02020603050405020304" pitchFamily="18" charset="0"/>
-            </a:endParaRPr>
-          </a:p>
-        </p:txBody>
-      </p:sp>
-    </p:spTree>
-    <p:extLst>
-      <p:ext uri="{BB962C8B-B14F-4D97-AF65-F5344CB8AC3E}">
-        <p14:creationId xmlns:p14="http://schemas.microsoft.com/office/powerpoint/2010/main" val="2747596967"/>
-      </p:ext>
-    </p:extLst>
-  </p:cSld>
-  <p:clrMapOvr>
-    <a:masterClrMapping/>
-  </p:clrMapOvr>
-  <p:transition spd="med"/>
-</p:sld>
-</file>
-
-<file path=ppt/slides/slide6.xml><?xml version="1.0" encoding="utf-8"?>
-<p:sld xmlns:a="http://schemas.openxmlformats.org/drawingml/2006/main" xmlns:r="http://schemas.openxmlformats.org/officeDocument/2006/relationships" xmlns:p="http://schemas.openxmlformats.org/presentationml/2006/main">
-  <p:cSld>
-    <p:spTree>
-      <p:nvGrpSpPr>
-        <p:cNvPr id="1" name="">
-          <a:extLst>
-            <a:ext uri="{FF2B5EF4-FFF2-40B4-BE49-F238E27FC236}">
-              <a16:creationId xmlns:a16="http://schemas.microsoft.com/office/drawing/2014/main" id="{2953AC7D-8CF9-A63F-57A2-D983DEB50039}"/>
-            </a:ext>
-          </a:extLst>
-        </p:cNvPr>
-        <p:cNvGrpSpPr/>
-        <p:nvPr/>
-      </p:nvGrpSpPr>
-      <p:grpSpPr>
-        <a:xfrm>
-          <a:off x="0" y="0"/>
-          <a:ext cx="0" cy="0"/>
-          <a:chOff x="0" y="0"/>
-          <a:chExt cx="0" cy="0"/>
-        </a:xfrm>
-      </p:grpSpPr>
-      <p:sp>
-        <p:nvSpPr>
-          <p:cNvPr id="6" name="Title 1">
-            <a:extLst>
-              <a:ext uri="{FF2B5EF4-FFF2-40B4-BE49-F238E27FC236}">
-                <a16:creationId xmlns:a16="http://schemas.microsoft.com/office/drawing/2014/main" id="{CC4C3A19-ED0C-1CE0-1512-03DBBA8E622A}"/>
-              </a:ext>
-            </a:extLst>
-          </p:cNvPr>
-          <p:cNvSpPr>
-            <a:spLocks noGrp="1"/>
-          </p:cNvSpPr>
-          <p:nvPr>
-            <p:ph type="title"/>
-          </p:nvPr>
-        </p:nvSpPr>
-        <p:spPr>
-          <a:xfrm>
-            <a:off x="457200" y="205980"/>
-            <a:ext cx="8229600" cy="857251"/>
-          </a:xfrm>
-        </p:spPr>
-        <p:txBody>
-          <a:bodyPr>
-            <a:normAutofit/>
-          </a:bodyPr>
-          <a:lstStyle/>
-          <a:p>
-            <a:r>
-              <a:rPr lang="en-US" b="1" dirty="0" err="1">
-                <a:solidFill>
-                  <a:srgbClr val="0070C0"/>
-                </a:solidFill>
-              </a:rPr>
-              <a:t>Dinâmica</a:t>
-            </a:r>
-            <a:r>
-              <a:rPr lang="en-US" b="1" dirty="0">
-                <a:solidFill>
-                  <a:srgbClr val="0070C0"/>
-                </a:solidFill>
-              </a:rPr>
-              <a:t>/</a:t>
-            </a:r>
-            <a:r>
-              <a:rPr lang="en-US" b="1" dirty="0" err="1">
-                <a:solidFill>
-                  <a:srgbClr val="0070C0"/>
-                </a:solidFill>
-              </a:rPr>
-              <a:t>Atividade</a:t>
-            </a:r>
-            <a:endParaRPr lang="en-US" b="1" dirty="0">
-              <a:solidFill>
-                <a:srgbClr val="0070C0"/>
-              </a:solidFill>
-            </a:endParaRPr>
-          </a:p>
-        </p:txBody>
-      </p:sp>
-      <p:sp>
-        <p:nvSpPr>
-          <p:cNvPr id="8" name="Text Placeholder 2">
-            <a:extLst>
-              <a:ext uri="{FF2B5EF4-FFF2-40B4-BE49-F238E27FC236}">
-                <a16:creationId xmlns:a16="http://schemas.microsoft.com/office/drawing/2014/main" id="{B45119E1-EF11-7248-2ADA-8776A0D7E7E3}"/>
-              </a:ext>
-            </a:extLst>
-          </p:cNvPr>
-          <p:cNvSpPr>
-            <a:spLocks noGrp="1"/>
-          </p:cNvSpPr>
-          <p:nvPr>
-            <p:ph type="body" sz="half" idx="1"/>
-          </p:nvPr>
-        </p:nvSpPr>
-        <p:spPr>
-          <a:xfrm>
-            <a:off x="142865" y="1035050"/>
-            <a:ext cx="8865056" cy="3994150"/>
-          </a:xfrm>
-        </p:spPr>
-        <p:txBody>
-          <a:bodyPr>
-            <a:noAutofit/>
-          </a:bodyPr>
-          <a:lstStyle/>
-          <a:p>
-            <a:pPr marL="457200" indent="-457200">
-              <a:buFont typeface="+mj-lt"/>
-              <a:buAutoNum type="arabicPeriod"/>
-            </a:pPr>
-            <a:r>
-              <a:rPr lang="pt-BR" sz="2400" dirty="0">
-                <a:latin typeface="Times New Roman" panose="02020603050405020304" pitchFamily="18" charset="0"/>
-                <a:cs typeface="Times New Roman" panose="02020603050405020304" pitchFamily="18" charset="0"/>
-              </a:rPr>
-              <a:t>Escolher uma empresa (</a:t>
-            </a:r>
-            <a:r>
-              <a:rPr lang="pt-BR" sz="2400" b="1" dirty="0">
-                <a:latin typeface="Times New Roman" panose="02020603050405020304" pitchFamily="18" charset="0"/>
-                <a:cs typeface="Times New Roman" panose="02020603050405020304" pitchFamily="18" charset="0"/>
-              </a:rPr>
-              <a:t>real ou </a:t>
-            </a:r>
-            <a:r>
-              <a:rPr lang="pt-BR" sz="2400" b="1" dirty="0">
-                <a:solidFill>
-                  <a:srgbClr val="FF0000"/>
-                </a:solidFill>
-                <a:latin typeface="Times New Roman" panose="02020603050405020304" pitchFamily="18" charset="0"/>
-                <a:cs typeface="Times New Roman" panose="02020603050405020304" pitchFamily="18" charset="0"/>
-              </a:rPr>
-              <a:t>fictícia</a:t>
-            </a:r>
-            <a:r>
-              <a:rPr lang="pt-BR" sz="2400" dirty="0">
-                <a:latin typeface="Times New Roman" panose="02020603050405020304" pitchFamily="18" charset="0"/>
-                <a:cs typeface="Times New Roman" panose="02020603050405020304" pitchFamily="18" charset="0"/>
-              </a:rPr>
-              <a:t>)</a:t>
-            </a:r>
-          </a:p>
-          <a:p>
-            <a:pPr marL="457200" indent="-457200">
-              <a:buFont typeface="+mj-lt"/>
-              <a:buAutoNum type="arabicPeriod"/>
-            </a:pPr>
-            <a:r>
-              <a:rPr lang="pt-BR" sz="2400" dirty="0">
-                <a:latin typeface="Times New Roman" panose="02020603050405020304" pitchFamily="18" charset="0"/>
-                <a:cs typeface="Times New Roman" panose="02020603050405020304" pitchFamily="18" charset="0"/>
-              </a:rPr>
-              <a:t>Definir um problema gerencial</a:t>
-            </a:r>
-          </a:p>
-          <a:p>
-            <a:pPr marL="457200" indent="-457200">
-              <a:buFont typeface="+mj-lt"/>
-              <a:buAutoNum type="arabicPeriod"/>
-            </a:pPr>
-            <a:r>
-              <a:rPr lang="pt-BR" sz="2400" dirty="0">
-                <a:latin typeface="Times New Roman" panose="02020603050405020304" pitchFamily="18" charset="0"/>
-                <a:cs typeface="Times New Roman" panose="02020603050405020304" pitchFamily="18" charset="0"/>
-              </a:rPr>
-              <a:t>Propor uso de </a:t>
-            </a:r>
-            <a:r>
-              <a:rPr lang="pt-BR" sz="2400" b="1" dirty="0">
-                <a:latin typeface="Times New Roman" panose="02020603050405020304" pitchFamily="18" charset="0"/>
-                <a:cs typeface="Times New Roman" panose="02020603050405020304" pitchFamily="18" charset="0"/>
-              </a:rPr>
-              <a:t>BI</a:t>
-            </a:r>
-          </a:p>
-          <a:p>
-            <a:pPr marL="457200" indent="-457200">
-              <a:buFont typeface="+mj-lt"/>
-              <a:buAutoNum type="arabicPeriod"/>
-            </a:pPr>
-            <a:r>
-              <a:rPr lang="pt-BR" sz="2400" dirty="0">
-                <a:latin typeface="Times New Roman" panose="02020603050405020304" pitchFamily="18" charset="0"/>
-                <a:cs typeface="Times New Roman" panose="02020603050405020304" pitchFamily="18" charset="0"/>
-              </a:rPr>
-              <a:t>Criar 3 indicadores (</a:t>
-            </a:r>
-            <a:r>
-              <a:rPr lang="pt-BR" sz="2400" b="1" dirty="0">
-                <a:latin typeface="Times New Roman" panose="02020603050405020304" pitchFamily="18" charset="0"/>
-                <a:cs typeface="Times New Roman" panose="02020603050405020304" pitchFamily="18" charset="0"/>
-              </a:rPr>
-              <a:t>KPIs</a:t>
-            </a:r>
-            <a:r>
-              <a:rPr lang="pt-BR" sz="2400" dirty="0">
-                <a:latin typeface="Times New Roman" panose="02020603050405020304" pitchFamily="18" charset="0"/>
-                <a:cs typeface="Times New Roman" panose="02020603050405020304" pitchFamily="18" charset="0"/>
-              </a:rPr>
-              <a:t>)</a:t>
-            </a:r>
-          </a:p>
-          <a:p>
-            <a:pPr marL="457200" indent="-457200">
-              <a:buFont typeface="+mj-lt"/>
-              <a:buAutoNum type="arabicPeriod"/>
-            </a:pPr>
-            <a:r>
-              <a:rPr lang="pt-BR" sz="2400" dirty="0">
-                <a:latin typeface="Times New Roman" panose="02020603050405020304" pitchFamily="18" charset="0"/>
-                <a:cs typeface="Times New Roman" panose="02020603050405020304" pitchFamily="18" charset="0"/>
-              </a:rPr>
-              <a:t>Sugerir um </a:t>
-            </a:r>
-            <a:r>
-              <a:rPr lang="pt-BR" sz="2400" b="1" dirty="0">
-                <a:latin typeface="Times New Roman" panose="02020603050405020304" pitchFamily="18" charset="0"/>
-                <a:cs typeface="Times New Roman" panose="02020603050405020304" pitchFamily="18" charset="0"/>
-              </a:rPr>
-              <a:t>dashboard</a:t>
-            </a:r>
-          </a:p>
-          <a:p>
-            <a:pPr marL="0" indent="0">
-              <a:buNone/>
-            </a:pPr>
-            <a:endParaRPr lang="pt-BR" sz="2400" dirty="0">
-              <a:latin typeface="Times New Roman" panose="02020603050405020304" pitchFamily="18" charset="0"/>
-              <a:cs typeface="Times New Roman" panose="02020603050405020304" pitchFamily="18" charset="0"/>
-            </a:endParaRPr>
-          </a:p>
-          <a:p>
-            <a:pPr marL="0" indent="0" algn="just">
-              <a:buNone/>
-            </a:pPr>
-            <a:r>
-              <a:rPr lang="pt-BR" sz="2400" b="1" dirty="0">
-                <a:solidFill>
-                  <a:srgbClr val="FF0000"/>
-                </a:solidFill>
-                <a:latin typeface="Times New Roman" panose="02020603050405020304" pitchFamily="18" charset="0"/>
-                <a:cs typeface="Times New Roman" panose="02020603050405020304" pitchFamily="18" charset="0"/>
-              </a:rPr>
-              <a:t>Entrega</a:t>
-            </a:r>
-            <a:r>
-              <a:rPr lang="pt-BR" sz="2400" dirty="0">
-                <a:latin typeface="Times New Roman" panose="02020603050405020304" pitchFamily="18" charset="0"/>
-                <a:cs typeface="Times New Roman" panose="02020603050405020304" pitchFamily="18" charset="0"/>
-              </a:rPr>
-              <a:t>: apresentação (</a:t>
-            </a:r>
-            <a:r>
-              <a:rPr lang="pt-BR" sz="2400" b="1" dirty="0">
-                <a:solidFill>
-                  <a:srgbClr val="FF0000"/>
-                </a:solidFill>
-                <a:latin typeface="Times New Roman" panose="02020603050405020304" pitchFamily="18" charset="0"/>
-                <a:cs typeface="Times New Roman" panose="02020603050405020304" pitchFamily="18" charset="0"/>
-              </a:rPr>
-              <a:t>08 min</a:t>
-            </a:r>
-            <a:r>
-              <a:rPr lang="pt-BR" sz="2400" dirty="0">
-                <a:latin typeface="Times New Roman" panose="02020603050405020304" pitchFamily="18" charset="0"/>
-                <a:cs typeface="Times New Roman" panose="02020603050405020304" pitchFamily="18" charset="0"/>
-              </a:rPr>
-              <a:t>)</a:t>
-            </a:r>
-          </a:p>
-        </p:txBody>
-      </p:sp>
-    </p:spTree>
-    <p:extLst>
-      <p:ext uri="{BB962C8B-B14F-4D97-AF65-F5344CB8AC3E}">
-        <p14:creationId xmlns:p14="http://schemas.microsoft.com/office/powerpoint/2010/main" val="2976682751"/>
-      </p:ext>
-    </p:extLst>
-  </p:cSld>
-  <p:clrMapOvr>
-    <a:masterClrMapping/>
-  </p:clrMapOvr>
-  <p:transition spd="med"/>
-</p:sld>
-</file>
-
-<file path=ppt/slides/slide7.xml><?xml version="1.0" encoding="utf-8"?>
-<p:sld xmlns:a="http://schemas.openxmlformats.org/drawingml/2006/main" xmlns:r="http://schemas.openxmlformats.org/officeDocument/2006/relationships" xmlns:p="http://schemas.openxmlformats.org/presentationml/2006/main">
-  <p:cSld>
-    <p:spTree>
-      <p:nvGrpSpPr>
-        <p:cNvPr id="1" name=""/>
-        <p:cNvGrpSpPr/>
-        <p:nvPr/>
-      </p:nvGrpSpPr>
-      <p:grpSpPr>
-        <a:xfrm>
-          <a:off x="0" y="0"/>
-          <a:ext cx="0" cy="0"/>
-          <a:chOff x="0" y="0"/>
-          <a:chExt cx="0" cy="0"/>
-        </a:xfrm>
-      </p:grpSpPr>
-      <p:sp>
-        <p:nvSpPr>
-          <p:cNvPr id="6" name="Title 1"/>
-          <p:cNvSpPr>
-            <a:spLocks noGrp="1"/>
-          </p:cNvSpPr>
-          <p:nvPr>
-            <p:ph type="title"/>
-          </p:nvPr>
-        </p:nvSpPr>
-        <p:spPr>
-          <a:xfrm>
-            <a:off x="457200" y="205980"/>
-            <a:ext cx="8229600" cy="857251"/>
-          </a:xfrm>
-        </p:spPr>
-        <p:txBody>
-          <a:bodyPr>
-            <a:normAutofit/>
-          </a:bodyPr>
-          <a:lstStyle/>
-          <a:p>
-            <a:r>
-              <a:rPr lang="en-US" b="1" dirty="0" err="1">
-                <a:solidFill>
-                  <a:srgbClr val="0070C0"/>
-                </a:solidFill>
-              </a:rPr>
-              <a:t>Referências</a:t>
-            </a:r>
-            <a:r>
-              <a:rPr lang="en-US" b="1" dirty="0">
-                <a:solidFill>
-                  <a:srgbClr val="0070C0"/>
-                </a:solidFill>
-              </a:rPr>
-              <a:t> </a:t>
-            </a:r>
-            <a:r>
-              <a:rPr lang="en-US" b="1" dirty="0" err="1">
-                <a:solidFill>
-                  <a:srgbClr val="0070C0"/>
-                </a:solidFill>
-              </a:rPr>
-              <a:t>Bibliográficas</a:t>
-            </a:r>
-            <a:endParaRPr lang="en-US" b="1" dirty="0">
-              <a:solidFill>
-                <a:srgbClr val="0070C0"/>
-              </a:solidFill>
-            </a:endParaRPr>
-          </a:p>
-        </p:txBody>
-      </p:sp>
-      <p:sp>
-        <p:nvSpPr>
-          <p:cNvPr id="8" name="Text Placeholder 2"/>
-          <p:cNvSpPr>
-            <a:spLocks noGrp="1"/>
-          </p:cNvSpPr>
-          <p:nvPr>
-            <p:ph type="body" sz="half" idx="1"/>
-          </p:nvPr>
-        </p:nvSpPr>
-        <p:spPr>
-          <a:xfrm>
-            <a:off x="139472" y="1063230"/>
-            <a:ext cx="8865056" cy="3874289"/>
-          </a:xfrm>
-        </p:spPr>
-        <p:txBody>
-          <a:bodyPr>
-            <a:noAutofit/>
-          </a:bodyPr>
-          <a:lstStyle/>
-          <a:p>
-            <a:pPr marL="0" indent="0">
-              <a:buNone/>
-            </a:pPr>
-            <a:r>
-              <a:rPr lang="pt-BR" sz="1800" dirty="0">
-                <a:latin typeface="Times New Roman" panose="02020603050405020304" pitchFamily="18" charset="0"/>
-                <a:cs typeface="Times New Roman" panose="02020603050405020304" pitchFamily="18" charset="0"/>
-              </a:rPr>
-              <a:t>[1] </a:t>
-            </a:r>
-            <a:r>
-              <a:rPr lang="pt-BR" sz="1800" b="1" dirty="0">
-                <a:latin typeface="Times New Roman" panose="02020603050405020304" pitchFamily="18" charset="0"/>
-                <a:cs typeface="Times New Roman" panose="02020603050405020304" pitchFamily="18" charset="0"/>
-              </a:rPr>
-              <a:t>SHARDA, R.; DELEN, D.; TURBAN, E.</a:t>
-            </a:r>
-          </a:p>
-          <a:p>
-            <a:pPr marL="0" indent="0" algn="just">
-              <a:buNone/>
-            </a:pPr>
-            <a:r>
-              <a:rPr lang="pt-BR" sz="1800" dirty="0">
-                <a:latin typeface="Times New Roman" panose="02020603050405020304" pitchFamily="18" charset="0"/>
-                <a:cs typeface="Times New Roman" panose="02020603050405020304" pitchFamily="18" charset="0"/>
-              </a:rPr>
-              <a:t>Business </a:t>
-            </a:r>
-            <a:r>
-              <a:rPr lang="pt-BR" sz="1800" dirty="0" err="1">
-                <a:latin typeface="Times New Roman" panose="02020603050405020304" pitchFamily="18" charset="0"/>
-                <a:cs typeface="Times New Roman" panose="02020603050405020304" pitchFamily="18" charset="0"/>
-              </a:rPr>
-              <a:t>Intelligence</a:t>
-            </a:r>
-            <a:r>
-              <a:rPr lang="pt-BR" sz="1800" dirty="0">
-                <a:latin typeface="Times New Roman" panose="02020603050405020304" pitchFamily="18" charset="0"/>
-                <a:cs typeface="Times New Roman" panose="02020603050405020304" pitchFamily="18" charset="0"/>
-              </a:rPr>
-              <a:t> e análise de dados para gestão do negócio. São Paulo: Bookman, 2019.</a:t>
-            </a:r>
-          </a:p>
-          <a:p>
-            <a:pPr marL="0" indent="0" algn="just">
-              <a:buNone/>
-            </a:pPr>
-            <a:endParaRPr lang="pt-BR" sz="1800" dirty="0">
-              <a:latin typeface="Times New Roman" panose="02020603050405020304" pitchFamily="18" charset="0"/>
-              <a:cs typeface="Times New Roman" panose="02020603050405020304" pitchFamily="18" charset="0"/>
-            </a:endParaRPr>
-          </a:p>
-          <a:p>
-            <a:pPr marL="0" indent="0">
-              <a:buNone/>
-            </a:pPr>
-            <a:r>
-              <a:rPr lang="pt-BR" sz="1800" dirty="0">
-                <a:latin typeface="Times New Roman" panose="02020603050405020304" pitchFamily="18" charset="0"/>
-                <a:cs typeface="Times New Roman" panose="02020603050405020304" pitchFamily="18" charset="0"/>
-              </a:rPr>
-              <a:t>[2] </a:t>
-            </a:r>
-            <a:r>
-              <a:rPr lang="pt-BR" sz="1800" b="1" dirty="0">
-                <a:latin typeface="Times New Roman" panose="02020603050405020304" pitchFamily="18" charset="0"/>
-                <a:cs typeface="Times New Roman" panose="02020603050405020304" pitchFamily="18" charset="0"/>
-              </a:rPr>
-              <a:t>TURBAN, E. et al.</a:t>
-            </a:r>
-          </a:p>
-          <a:p>
-            <a:pPr marL="0" indent="0">
-              <a:buNone/>
-            </a:pPr>
-            <a:r>
-              <a:rPr lang="pt-BR" sz="1800" dirty="0">
-                <a:latin typeface="Times New Roman" panose="02020603050405020304" pitchFamily="18" charset="0"/>
-                <a:cs typeface="Times New Roman" panose="02020603050405020304" pitchFamily="18" charset="0"/>
-              </a:rPr>
-              <a:t>Business </a:t>
-            </a:r>
-            <a:r>
-              <a:rPr lang="pt-BR" sz="1800" dirty="0" err="1">
-                <a:latin typeface="Times New Roman" panose="02020603050405020304" pitchFamily="18" charset="0"/>
-                <a:cs typeface="Times New Roman" panose="02020603050405020304" pitchFamily="18" charset="0"/>
-              </a:rPr>
-              <a:t>Intelligence</a:t>
-            </a:r>
-            <a:r>
-              <a:rPr lang="pt-BR" sz="1800" dirty="0">
-                <a:latin typeface="Times New Roman" panose="02020603050405020304" pitchFamily="18" charset="0"/>
-                <a:cs typeface="Times New Roman" panose="02020603050405020304" pitchFamily="18" charset="0"/>
-              </a:rPr>
-              <a:t>: um enfoque gerencial. Porto Alegre: Bookman, 2009.</a:t>
-            </a:r>
-          </a:p>
-          <a:p>
-            <a:pPr marL="0" indent="0">
-              <a:buNone/>
-            </a:pPr>
-            <a:endParaRPr lang="pt-BR" sz="1800" dirty="0">
-              <a:latin typeface="Times New Roman" panose="02020603050405020304" pitchFamily="18" charset="0"/>
-              <a:cs typeface="Times New Roman" panose="02020603050405020304" pitchFamily="18" charset="0"/>
-            </a:endParaRPr>
-          </a:p>
-          <a:p>
-            <a:pPr marL="0" indent="0">
-              <a:buNone/>
-            </a:pPr>
-            <a:r>
-              <a:rPr lang="pt-BR" sz="1800" dirty="0">
-                <a:latin typeface="Times New Roman" panose="02020603050405020304" pitchFamily="18" charset="0"/>
-                <a:cs typeface="Times New Roman" panose="02020603050405020304" pitchFamily="18" charset="0"/>
-              </a:rPr>
-              <a:t>[3] </a:t>
-            </a:r>
-            <a:r>
-              <a:rPr lang="pt-BR" sz="1800" b="1" dirty="0">
-                <a:latin typeface="Times New Roman" panose="02020603050405020304" pitchFamily="18" charset="0"/>
-                <a:cs typeface="Times New Roman" panose="02020603050405020304" pitchFamily="18" charset="0"/>
-              </a:rPr>
-              <a:t>LAUDON, K.; LAUDON, J.</a:t>
-            </a:r>
-          </a:p>
-          <a:p>
-            <a:pPr marL="0" indent="0">
-              <a:buNone/>
-            </a:pPr>
-            <a:r>
-              <a:rPr lang="pt-BR" sz="1800" dirty="0">
-                <a:latin typeface="Times New Roman" panose="02020603050405020304" pitchFamily="18" charset="0"/>
-                <a:cs typeface="Times New Roman" panose="02020603050405020304" pitchFamily="18" charset="0"/>
-              </a:rPr>
-              <a:t>Sistemas de informação gerenciais. São Paulo: Pearson, 2014.</a:t>
-            </a:r>
-          </a:p>
-          <a:p>
-            <a:pPr marL="0" indent="0">
-              <a:buNone/>
-            </a:pPr>
-            <a:endParaRPr lang="pt-BR" sz="1800" dirty="0">
-              <a:latin typeface="Times New Roman" panose="02020603050405020304" pitchFamily="18" charset="0"/>
-              <a:cs typeface="Times New Roman" panose="02020603050405020304" pitchFamily="18" charset="0"/>
-            </a:endParaRPr>
-          </a:p>
-          <a:p>
-            <a:pPr marL="0" indent="0">
-              <a:buNone/>
-            </a:pPr>
-            <a:r>
-              <a:rPr lang="pt-BR" sz="1800" dirty="0">
-                <a:latin typeface="Times New Roman" panose="02020603050405020304" pitchFamily="18" charset="0"/>
-                <a:cs typeface="Times New Roman" panose="02020603050405020304" pitchFamily="18" charset="0"/>
-              </a:rPr>
-              <a:t>[4] </a:t>
-            </a:r>
-            <a:r>
-              <a:rPr lang="pt-BR" sz="1800" b="1" dirty="0">
-                <a:latin typeface="Times New Roman" panose="02020603050405020304" pitchFamily="18" charset="0"/>
-                <a:cs typeface="Times New Roman" panose="02020603050405020304" pitchFamily="18" charset="0"/>
-              </a:rPr>
-              <a:t>PORTER, M.</a:t>
-            </a:r>
-          </a:p>
-          <a:p>
-            <a:pPr marL="0" indent="0">
-              <a:buNone/>
-            </a:pPr>
-            <a:r>
-              <a:rPr lang="pt-BR" sz="1800" dirty="0">
-                <a:latin typeface="Times New Roman" panose="02020603050405020304" pitchFamily="18" charset="0"/>
-                <a:cs typeface="Times New Roman" panose="02020603050405020304" pitchFamily="18" charset="0"/>
-              </a:rPr>
-              <a:t>Estratégia competitiva. Rio de Janeiro: Elsevier, 2004.</a:t>
-            </a:r>
-          </a:p>
-        </p:txBody>
-      </p:sp>
-    </p:spTree>
-    <p:extLst>
-      <p:ext uri="{BB962C8B-B14F-4D97-AF65-F5344CB8AC3E}">
-        <p14:creationId xmlns:p14="http://schemas.microsoft.com/office/powerpoint/2010/main" val="1115311843"/>
-      </p:ext>
-    </p:extLst>
-  </p:cSld>
-  <p:clrMapOvr>
-    <a:masterClrMapping/>
-  </p:clrMapOvr>
-  <p:transition spd="med"/>
-</p:sld>
-</file>
-
-<file path=ppt/slides/slide8.xml><?xml version="1.0" encoding="utf-8"?>
-<p:sld xmlns:a="http://schemas.openxmlformats.org/drawingml/2006/main" xmlns:r="http://schemas.openxmlformats.org/officeDocument/2006/relationships" xmlns:p="http://schemas.openxmlformats.org/presentationml/2006/main">
-  <p:cSld>
-    <p:spTree>
-      <p:nvGrpSpPr>
-        <p:cNvPr id="1" name=""/>
-        <p:cNvGrpSpPr/>
-        <p:nvPr/>
-      </p:nvGrpSpPr>
-      <p:grpSpPr>
-        <a:xfrm>
-          <a:off x="0" y="0"/>
-          <a:ext cx="0" cy="0"/>
-          <a:chOff x="0" y="0"/>
-          <a:chExt cx="0" cy="0"/>
-        </a:xfrm>
-      </p:grpSpPr>
-      <p:pic>
-        <p:nvPicPr>
-          <p:cNvPr id="112" name="Picture 6" descr="Picture 6"/>
-          <p:cNvPicPr>
-            <a:picLocks noChangeAspect="1"/>
-          </p:cNvPicPr>
-          <p:nvPr/>
-        </p:nvPicPr>
-        <p:blipFill>
-          <a:blip r:embed="rId2"/>
-          <a:stretch>
-            <a:fillRect/>
-          </a:stretch>
-        </p:blipFill>
-        <p:spPr>
-          <a:xfrm>
-            <a:off x="0" y="0"/>
-            <a:ext cx="9144000" cy="5143500"/>
-          </a:xfrm>
-          <a:prstGeom prst="rect">
-            <a:avLst/>
-          </a:prstGeom>
-          <a:ln w="12700">
-            <a:miter lim="400000"/>
-            <a:headEnd/>
-            <a:tailEnd/>
-          </a:ln>
-        </p:spPr>
-      </p:pic>
-      <p:pic>
-        <p:nvPicPr>
-          <p:cNvPr id="114" name="Picture 5" descr="Picture 5"/>
-          <p:cNvPicPr>
-            <a:picLocks noChangeAspect="1"/>
-          </p:cNvPicPr>
-          <p:nvPr/>
-        </p:nvPicPr>
-        <p:blipFill>
-          <a:blip r:embed="rId3"/>
-          <a:stretch>
-            <a:fillRect/>
-          </a:stretch>
-        </p:blipFill>
-        <p:spPr>
-          <a:xfrm>
-            <a:off x="469900" y="0"/>
-            <a:ext cx="4391984" cy="171450"/>
-          </a:xfrm>
-          <a:prstGeom prst="rect">
-            <a:avLst/>
-          </a:prstGeom>
-          <a:ln w="12700">
-            <a:miter lim="400000"/>
-            <a:headEnd/>
-            <a:tailEnd/>
-          </a:ln>
-        </p:spPr>
-      </p:pic>
-      <p:sp>
-        <p:nvSpPr>
-          <p:cNvPr id="3" name="Título 2"/>
-          <p:cNvSpPr>
-            <a:spLocks noGrp="1"/>
-          </p:cNvSpPr>
-          <p:nvPr>
-            <p:ph type="title"/>
-          </p:nvPr>
-        </p:nvSpPr>
-        <p:spPr>
-          <a:xfrm>
-            <a:off x="285751" y="2386770"/>
-            <a:ext cx="8615364" cy="1102519"/>
-          </a:xfrm>
-        </p:spPr>
-        <p:txBody>
-          <a:bodyPr>
-            <a:noAutofit/>
-          </a:bodyPr>
-          <a:lstStyle/>
-          <a:p>
-            <a:r>
-              <a:rPr lang="pt-BR" sz="4800" b="1" dirty="0">
-                <a:solidFill>
-                  <a:schemeClr val="bg1"/>
-                </a:solidFill>
-              </a:rPr>
-              <a:t>GESTÃO DE INFORMAÇÃO</a:t>
-            </a:r>
-          </a:p>
-        </p:txBody>
-      </p:sp>
-      <p:sp>
-        <p:nvSpPr>
-          <p:cNvPr id="6" name="Título 2"/>
-          <p:cNvSpPr txBox="1"/>
-          <p:nvPr/>
-        </p:nvSpPr>
-        <p:spPr>
-          <a:xfrm>
-            <a:off x="975683" y="3866663"/>
-            <a:ext cx="7772400" cy="1102519"/>
-          </a:xfrm>
-          <a:prstGeom prst="rect">
-            <a:avLst/>
-          </a:prstGeom>
-          <a:ln w="12700">
-            <a:miter lim="400000"/>
-          </a:ln>
-        </p:spPr>
-        <p:txBody>
-          <a:bodyPr lIns="45718" tIns="45718" rIns="45718" bIns="45718" anchor="ctr">
-            <a:noAutofit/>
-          </a:bodyPr>
-          <a:lstStyle>
-            <a:lvl1pPr marL="0" marR="0" indent="0" algn="ctr" defTabSz="457200" rtl="0" latinLnBrk="0">
-              <a:lnSpc>
-                <a:spcPct val="100000"/>
-              </a:lnSpc>
-              <a:spcBef>
-                <a:spcPts val="0"/>
-              </a:spcBef>
-              <a:spcAft>
-                <a:spcPts val="0"/>
-              </a:spcAft>
-              <a:buClrTx/>
-              <a:buSzTx/>
-              <a:buFontTx/>
-              <a:buNone/>
-              <a:defRPr sz="4400" b="0" i="0" u="none" strike="noStrike" cap="none" spc="0" baseline="0">
-                <a:ln>
-                  <a:noFill/>
-                </a:ln>
-                <a:solidFill>
-                  <a:srgbClr val="000000"/>
-                </a:solidFill>
-                <a:uFillTx/>
-                <a:latin typeface="+mj-lt"/>
-                <a:ea typeface="+mj-ea"/>
-                <a:cs typeface="+mj-cs"/>
-                <a:sym typeface="Calibri"/>
-              </a:defRPr>
-            </a:lvl1pPr>
-            <a:lvl2pPr marL="0" marR="0" indent="0" algn="ctr" defTabSz="457200" rtl="0" latinLnBrk="0">
-              <a:lnSpc>
-                <a:spcPct val="100000"/>
-              </a:lnSpc>
-              <a:spcBef>
-                <a:spcPts val="0"/>
-              </a:spcBef>
-              <a:spcAft>
-                <a:spcPts val="0"/>
-              </a:spcAft>
-              <a:buClrTx/>
-              <a:buSzTx/>
-              <a:buFontTx/>
-              <a:buNone/>
-              <a:defRPr sz="4400" b="0" i="0" u="none" strike="noStrike" cap="none" spc="0" baseline="0">
-                <a:ln>
-                  <a:noFill/>
-                </a:ln>
-                <a:solidFill>
-                  <a:srgbClr val="000000"/>
-                </a:solidFill>
-                <a:uFillTx/>
-                <a:latin typeface="+mj-lt"/>
-                <a:ea typeface="+mj-ea"/>
-                <a:cs typeface="+mj-cs"/>
-                <a:sym typeface="Calibri"/>
-              </a:defRPr>
-            </a:lvl2pPr>
-            <a:lvl3pPr marL="0" marR="0" indent="0" algn="ctr" defTabSz="457200" rtl="0" latinLnBrk="0">
-              <a:lnSpc>
-                <a:spcPct val="100000"/>
-              </a:lnSpc>
-              <a:spcBef>
-                <a:spcPts val="0"/>
-              </a:spcBef>
-              <a:spcAft>
-                <a:spcPts val="0"/>
-              </a:spcAft>
-              <a:buClrTx/>
-              <a:buSzTx/>
-              <a:buFontTx/>
-              <a:buNone/>
-              <a:defRPr sz="4400" b="0" i="0" u="none" strike="noStrike" cap="none" spc="0" baseline="0">
-                <a:ln>
-                  <a:noFill/>
-                </a:ln>
-                <a:solidFill>
-                  <a:srgbClr val="000000"/>
-                </a:solidFill>
-                <a:uFillTx/>
-                <a:latin typeface="+mj-lt"/>
-                <a:ea typeface="+mj-ea"/>
-                <a:cs typeface="+mj-cs"/>
-                <a:sym typeface="Calibri"/>
-              </a:defRPr>
-            </a:lvl3pPr>
-            <a:lvl4pPr marL="0" marR="0" indent="0" algn="ctr" defTabSz="457200" rtl="0" latinLnBrk="0">
-              <a:lnSpc>
-                <a:spcPct val="100000"/>
-              </a:lnSpc>
-              <a:spcBef>
-                <a:spcPts val="0"/>
-              </a:spcBef>
-              <a:spcAft>
-                <a:spcPts val="0"/>
-              </a:spcAft>
-              <a:buClrTx/>
-              <a:buSzTx/>
-              <a:buFontTx/>
-              <a:buNone/>
-              <a:defRPr sz="4400" b="0" i="0" u="none" strike="noStrike" cap="none" spc="0" baseline="0">
-                <a:ln>
-                  <a:noFill/>
-                </a:ln>
-                <a:solidFill>
-                  <a:srgbClr val="000000"/>
-                </a:solidFill>
-                <a:uFillTx/>
-                <a:latin typeface="+mj-lt"/>
-                <a:ea typeface="+mj-ea"/>
-                <a:cs typeface="+mj-cs"/>
-                <a:sym typeface="Calibri"/>
-              </a:defRPr>
-            </a:lvl4pPr>
-            <a:lvl5pPr marL="0" marR="0" indent="0" algn="ctr" defTabSz="457200" rtl="0" latinLnBrk="0">
-              <a:lnSpc>
-                <a:spcPct val="100000"/>
-              </a:lnSpc>
-              <a:spcBef>
-                <a:spcPts val="0"/>
-              </a:spcBef>
-              <a:spcAft>
-                <a:spcPts val="0"/>
-              </a:spcAft>
-              <a:buClrTx/>
-              <a:buSzTx/>
-              <a:buFontTx/>
-              <a:buNone/>
-              <a:defRPr sz="4400" b="0" i="0" u="none" strike="noStrike" cap="none" spc="0" baseline="0">
-                <a:ln>
-                  <a:noFill/>
-                </a:ln>
-                <a:solidFill>
-                  <a:srgbClr val="000000"/>
-                </a:solidFill>
-                <a:uFillTx/>
-                <a:latin typeface="+mj-lt"/>
-                <a:ea typeface="+mj-ea"/>
-                <a:cs typeface="+mj-cs"/>
-                <a:sym typeface="Calibri"/>
-              </a:defRPr>
-            </a:lvl5pPr>
-            <a:lvl6pPr marL="0" marR="0" indent="0" algn="ctr" defTabSz="457200" rtl="0" latinLnBrk="0">
-              <a:lnSpc>
-                <a:spcPct val="100000"/>
-              </a:lnSpc>
-              <a:spcBef>
-                <a:spcPts val="0"/>
-              </a:spcBef>
-              <a:spcAft>
-                <a:spcPts val="0"/>
-              </a:spcAft>
-              <a:buClrTx/>
-              <a:buSzTx/>
-              <a:buFontTx/>
-              <a:buNone/>
-              <a:defRPr sz="4400" b="0" i="0" u="none" strike="noStrike" cap="none" spc="0" baseline="0">
-                <a:ln>
-                  <a:noFill/>
-                </a:ln>
-                <a:solidFill>
-                  <a:srgbClr val="000000"/>
-                </a:solidFill>
-                <a:uFillTx/>
-                <a:latin typeface="+mj-lt"/>
-                <a:ea typeface="+mj-ea"/>
-                <a:cs typeface="+mj-cs"/>
-                <a:sym typeface="Calibri"/>
-              </a:defRPr>
-            </a:lvl6pPr>
-            <a:lvl7pPr marL="0" marR="0" indent="0" algn="ctr" defTabSz="457200" rtl="0" latinLnBrk="0">
-              <a:lnSpc>
-                <a:spcPct val="100000"/>
-              </a:lnSpc>
-              <a:spcBef>
-                <a:spcPts val="0"/>
-              </a:spcBef>
-              <a:spcAft>
-                <a:spcPts val="0"/>
-              </a:spcAft>
-              <a:buClrTx/>
-              <a:buSzTx/>
-              <a:buFontTx/>
-              <a:buNone/>
-              <a:defRPr sz="4400" b="0" i="0" u="none" strike="noStrike" cap="none" spc="0" baseline="0">
-                <a:ln>
-                  <a:noFill/>
-                </a:ln>
-                <a:solidFill>
-                  <a:srgbClr val="000000"/>
-                </a:solidFill>
-                <a:uFillTx/>
-                <a:latin typeface="+mj-lt"/>
-                <a:ea typeface="+mj-ea"/>
-                <a:cs typeface="+mj-cs"/>
-                <a:sym typeface="Calibri"/>
-              </a:defRPr>
-            </a:lvl7pPr>
-            <a:lvl8pPr marL="0" marR="0" indent="0" algn="ctr" defTabSz="457200" rtl="0" latinLnBrk="0">
-              <a:lnSpc>
-                <a:spcPct val="100000"/>
-              </a:lnSpc>
-              <a:spcBef>
-                <a:spcPts val="0"/>
-              </a:spcBef>
-              <a:spcAft>
-                <a:spcPts val="0"/>
-              </a:spcAft>
-              <a:buClrTx/>
-              <a:buSzTx/>
-              <a:buFontTx/>
-              <a:buNone/>
-              <a:defRPr sz="4400" b="0" i="0" u="none" strike="noStrike" cap="none" spc="0" baseline="0">
-                <a:ln>
-                  <a:noFill/>
-                </a:ln>
-                <a:solidFill>
-                  <a:srgbClr val="000000"/>
-                </a:solidFill>
-                <a:uFillTx/>
-                <a:latin typeface="+mj-lt"/>
-                <a:ea typeface="+mj-ea"/>
-                <a:cs typeface="+mj-cs"/>
-                <a:sym typeface="Calibri"/>
-              </a:defRPr>
-            </a:lvl8pPr>
-            <a:lvl9pPr marL="0" marR="0" indent="0" algn="ctr" defTabSz="457200" rtl="0" latinLnBrk="0">
-              <a:lnSpc>
-                <a:spcPct val="100000"/>
-              </a:lnSpc>
-              <a:spcBef>
-                <a:spcPts val="0"/>
-              </a:spcBef>
-              <a:spcAft>
-                <a:spcPts val="0"/>
-              </a:spcAft>
-              <a:buClrTx/>
-              <a:buSzTx/>
-              <a:buFontTx/>
-              <a:buNone/>
-              <a:defRPr sz="4400" b="0" i="0" u="none" strike="noStrike" cap="none" spc="0" baseline="0">
-                <a:ln>
-                  <a:noFill/>
-                </a:ln>
-                <a:solidFill>
-                  <a:srgbClr val="000000"/>
-                </a:solidFill>
-                <a:uFillTx/>
-                <a:latin typeface="+mj-lt"/>
-                <a:ea typeface="+mj-ea"/>
-                <a:cs typeface="+mj-cs"/>
-                <a:sym typeface="Calibri"/>
-              </a:defRPr>
-            </a:lvl9pPr>
-          </a:lstStyle>
-          <a:p>
-            <a:pPr algn="r" hangingPunct="1"/>
-            <a:r>
-              <a:rPr lang="pt-BR" sz="2000" b="1" dirty="0">
-                <a:solidFill>
-                  <a:schemeClr val="bg1"/>
-                </a:solidFill>
-              </a:rPr>
-              <a:t>Professor </a:t>
-            </a:r>
-            <a:r>
-              <a:rPr lang="pt-BR" sz="2000" b="1">
-                <a:solidFill>
-                  <a:schemeClr val="bg1"/>
-                </a:solidFill>
-              </a:rPr>
-              <a:t>M.Sc</a:t>
-            </a:r>
-            <a:r>
-              <a:rPr lang="pt-BR" sz="2000" b="1" dirty="0">
-                <a:solidFill>
-                  <a:schemeClr val="bg1"/>
-                </a:solidFill>
-              </a:rPr>
-              <a:t>. Heleno Cardoso</a:t>
-            </a:r>
-          </a:p>
-        </p:txBody>
-      </p:sp>
-      <p:pic>
-        <p:nvPicPr>
-          <p:cNvPr id="2" name="Google Shape;62;p1" descr="Imagem">
-            <a:extLst>
-              <a:ext uri="{FF2B5EF4-FFF2-40B4-BE49-F238E27FC236}">
-                <a16:creationId xmlns:a16="http://schemas.microsoft.com/office/drawing/2014/main" id="{9C895622-2963-024D-634E-EA58F5381D06}"/>
-              </a:ext>
-            </a:extLst>
-          </p:cNvPr>
-          <p:cNvPicPr preferRelativeResize="0"/>
-          <p:nvPr/>
-        </p:nvPicPr>
-        <p:blipFill rotWithShape="1">
-          <a:blip r:embed="rId4">
-            <a:alphaModFix/>
-          </a:blip>
-          <a:srcRect/>
-          <a:stretch/>
-        </p:blipFill>
-        <p:spPr>
-          <a:xfrm>
-            <a:off x="469898" y="343798"/>
-            <a:ext cx="2858518" cy="1338697"/>
-          </a:xfrm>
-          <a:prstGeom prst="rect">
-            <a:avLst/>
-          </a:prstGeom>
-          <a:noFill/>
-          <a:ln>
-            <a:noFill/>
-          </a:ln>
-        </p:spPr>
-      </p:pic>
-    </p:spTree>
   </p:cSld>
   <p:clrMapOvr>
     <a:masterClrMapping/>
